--- a/Cource_LAB_AWS_3_AWS-cloud-platform.pptx
+++ b/Cource_LAB_AWS_3_AWS-cloud-platform.pptx
@@ -5,7 +5,7 @@
     <p:sldMasterId id="2147483689" r:id="rId1"/>
   </p:sldMasterIdLst>
   <p:notesMasterIdLst>
-    <p:notesMasterId r:id="rId9"/>
+    <p:notesMasterId r:id="rId13"/>
   </p:notesMasterIdLst>
   <p:sldIdLst>
     <p:sldId id="348" r:id="rId2"/>
@@ -14,7 +14,11 @@
     <p:sldId id="396" r:id="rId5"/>
     <p:sldId id="419" r:id="rId6"/>
     <p:sldId id="420" r:id="rId7"/>
-    <p:sldId id="350" r:id="rId8"/>
+    <p:sldId id="421" r:id="rId8"/>
+    <p:sldId id="424" r:id="rId9"/>
+    <p:sldId id="422" r:id="rId10"/>
+    <p:sldId id="423" r:id="rId11"/>
+    <p:sldId id="350" r:id="rId12"/>
   </p:sldIdLst>
   <p:sldSz cx="9144000" cy="5143500" type="screen16x9"/>
   <p:notesSz cx="7010400" cy="9296400"/>
@@ -3398,6 +3402,1351 @@
 </p:notes>
 </file>
 
+<file path=ppt/notesSlides/notesSlide6.xml><?xml version="1.0" encoding="utf-8"?>
+<p:notes xmlns:a="http://schemas.openxmlformats.org/drawingml/2006/main" xmlns:r="http://schemas.openxmlformats.org/officeDocument/2006/relationships" xmlns:p="http://schemas.openxmlformats.org/presentationml/2006/main">
+  <p:cSld>
+    <p:spTree>
+      <p:nvGrpSpPr>
+        <p:cNvPr id="1" name=""/>
+        <p:cNvGrpSpPr/>
+        <p:nvPr/>
+      </p:nvGrpSpPr>
+      <p:grpSpPr>
+        <a:xfrm>
+          <a:off x="0" y="0"/>
+          <a:ext cx="0" cy="0"/>
+          <a:chOff x="0" y="0"/>
+          <a:chExt cx="0" cy="0"/>
+        </a:xfrm>
+      </p:grpSpPr>
+      <p:sp>
+        <p:nvSpPr>
+          <p:cNvPr id="2" name="Slide Image Placeholder 1"/>
+          <p:cNvSpPr>
+            <a:spLocks noGrp="1" noRot="1" noChangeAspect="1"/>
+          </p:cNvSpPr>
+          <p:nvPr>
+            <p:ph type="sldImg"/>
+          </p:nvPr>
+        </p:nvSpPr>
+        <p:spPr>
+          <a:xfrm>
+            <a:off x="406400" y="696913"/>
+            <a:ext cx="6196013" cy="3486150"/>
+          </a:xfrm>
+        </p:spPr>
+      </p:sp>
+      <p:sp>
+        <p:nvSpPr>
+          <p:cNvPr id="3" name="Notes Placeholder 2"/>
+          <p:cNvSpPr>
+            <a:spLocks noGrp="1"/>
+          </p:cNvSpPr>
+          <p:nvPr>
+            <p:ph type="body" idx="1"/>
+          </p:nvPr>
+        </p:nvSpPr>
+        <p:spPr/>
+        <p:txBody>
+          <a:bodyPr/>
+          <a:lstStyle/>
+          <a:p>
+            <a:r>
+              <a:rPr lang="en-US" dirty="0" smtClean="0"/>
+              <a:t>https://k21academy.com/amazon-web-services/aws-for-testers-and-qa</a:t>
+            </a:r>
+            <a:r>
+              <a:rPr lang="en-US" dirty="0" smtClean="0"/>
+              <a:t>/</a:t>
+            </a:r>
+          </a:p>
+          <a:p>
+            <a:r>
+              <a:rPr lang="en-US" dirty="0" smtClean="0"/>
+              <a:t>https://dev.to/iaadidev/-creating-virtual-machines-on-cloud-platforms-aws-azure-and-gcp-2553</a:t>
+            </a:r>
+          </a:p>
+          <a:p>
+            <a:endParaRPr lang="en-US" dirty="0" smtClean="0"/>
+          </a:p>
+          <a:p>
+            <a:r>
+              <a:rPr lang="en-US" dirty="0" smtClean="0"/>
+              <a:t>https://www.emma.ms/tutorials/how-to-deploy-virtual-machines-with-emma</a:t>
+            </a:r>
+            <a:endParaRPr lang="en-US" dirty="0"/>
+          </a:p>
+        </p:txBody>
+      </p:sp>
+      <p:sp>
+        <p:nvSpPr>
+          <p:cNvPr id="4" name="Slide Number Placeholder 3"/>
+          <p:cNvSpPr>
+            <a:spLocks noGrp="1"/>
+          </p:cNvSpPr>
+          <p:nvPr>
+            <p:ph type="sldNum" idx="10"/>
+          </p:nvPr>
+        </p:nvSpPr>
+        <p:spPr/>
+        <p:txBody>
+          <a:bodyPr/>
+          <a:lstStyle/>
+          <a:p>
+            <a:pPr marL="0" marR="0" lvl="0" indent="0" algn="r" rtl="0">
+              <a:lnSpc>
+                <a:spcPct val="100000"/>
+              </a:lnSpc>
+              <a:spcBef>
+                <a:spcPts val="0"/>
+              </a:spcBef>
+              <a:spcAft>
+                <a:spcPts val="0"/>
+              </a:spcAft>
+              <a:buClr>
+                <a:srgbClr val="000000"/>
+              </a:buClr>
+              <a:buFont typeface="Arial"/>
+              <a:buNone/>
+            </a:pPr>
+            <a:endParaRPr lang="en-US" sz="1200" b="0" i="0" u="none" strike="noStrike" cap="none" smtClean="0">
+              <a:solidFill>
+                <a:srgbClr val="000000"/>
+              </a:solidFill>
+              <a:latin typeface="Arial"/>
+              <a:ea typeface="Arial"/>
+              <a:cs typeface="Arial"/>
+              <a:sym typeface="Arial"/>
+            </a:endParaRPr>
+          </a:p>
+          <a:p>
+            <a:pPr marL="0" marR="0" lvl="1" indent="0" algn="l" rtl="0">
+              <a:lnSpc>
+                <a:spcPct val="100000"/>
+              </a:lnSpc>
+              <a:spcBef>
+                <a:spcPts val="0"/>
+              </a:spcBef>
+              <a:spcAft>
+                <a:spcPts val="0"/>
+              </a:spcAft>
+              <a:buClr>
+                <a:srgbClr val="000000"/>
+              </a:buClr>
+              <a:buFont typeface="Arial"/>
+              <a:buNone/>
+            </a:pPr>
+            <a:endParaRPr lang="en-US" sz="1400" b="0" i="0" u="none" strike="noStrike" cap="none" smtClean="0">
+              <a:solidFill>
+                <a:srgbClr val="000000"/>
+              </a:solidFill>
+              <a:latin typeface="Arial"/>
+              <a:ea typeface="Arial"/>
+              <a:cs typeface="Arial"/>
+              <a:sym typeface="Arial"/>
+            </a:endParaRPr>
+          </a:p>
+          <a:p>
+            <a:pPr marL="0" marR="0" lvl="2" indent="0" algn="l" rtl="0">
+              <a:lnSpc>
+                <a:spcPct val="100000"/>
+              </a:lnSpc>
+              <a:spcBef>
+                <a:spcPts val="0"/>
+              </a:spcBef>
+              <a:spcAft>
+                <a:spcPts val="0"/>
+              </a:spcAft>
+              <a:buClr>
+                <a:srgbClr val="000000"/>
+              </a:buClr>
+              <a:buFont typeface="Arial"/>
+              <a:buNone/>
+            </a:pPr>
+            <a:endParaRPr lang="en-US" sz="1400" b="0" i="0" u="none" strike="noStrike" cap="none" smtClean="0">
+              <a:solidFill>
+                <a:srgbClr val="000000"/>
+              </a:solidFill>
+              <a:latin typeface="Arial"/>
+              <a:ea typeface="Arial"/>
+              <a:cs typeface="Arial"/>
+              <a:sym typeface="Arial"/>
+            </a:endParaRPr>
+          </a:p>
+          <a:p>
+            <a:pPr marL="0" marR="0" lvl="3" indent="0" algn="l" rtl="0">
+              <a:lnSpc>
+                <a:spcPct val="100000"/>
+              </a:lnSpc>
+              <a:spcBef>
+                <a:spcPts val="0"/>
+              </a:spcBef>
+              <a:spcAft>
+                <a:spcPts val="0"/>
+              </a:spcAft>
+              <a:buClr>
+                <a:srgbClr val="000000"/>
+              </a:buClr>
+              <a:buFont typeface="Arial"/>
+              <a:buNone/>
+            </a:pPr>
+            <a:endParaRPr lang="en-US" sz="1400" b="0" i="0" u="none" strike="noStrike" cap="none" smtClean="0">
+              <a:solidFill>
+                <a:srgbClr val="000000"/>
+              </a:solidFill>
+              <a:latin typeface="Arial"/>
+              <a:ea typeface="Arial"/>
+              <a:cs typeface="Arial"/>
+              <a:sym typeface="Arial"/>
+            </a:endParaRPr>
+          </a:p>
+          <a:p>
+            <a:pPr marL="0" marR="0" lvl="4" indent="0" algn="l" rtl="0">
+              <a:lnSpc>
+                <a:spcPct val="100000"/>
+              </a:lnSpc>
+              <a:spcBef>
+                <a:spcPts val="0"/>
+              </a:spcBef>
+              <a:spcAft>
+                <a:spcPts val="0"/>
+              </a:spcAft>
+              <a:buClr>
+                <a:srgbClr val="000000"/>
+              </a:buClr>
+              <a:buFont typeface="Arial"/>
+              <a:buNone/>
+            </a:pPr>
+            <a:endParaRPr lang="en-US" sz="1400" b="0" i="0" u="none" strike="noStrike" cap="none" smtClean="0">
+              <a:solidFill>
+                <a:srgbClr val="000000"/>
+              </a:solidFill>
+              <a:latin typeface="Arial"/>
+              <a:ea typeface="Arial"/>
+              <a:cs typeface="Arial"/>
+              <a:sym typeface="Arial"/>
+            </a:endParaRPr>
+          </a:p>
+          <a:p>
+            <a:pPr marL="0" marR="0" lvl="5" indent="0" algn="l" rtl="0">
+              <a:lnSpc>
+                <a:spcPct val="100000"/>
+              </a:lnSpc>
+              <a:spcBef>
+                <a:spcPts val="0"/>
+              </a:spcBef>
+              <a:spcAft>
+                <a:spcPts val="0"/>
+              </a:spcAft>
+              <a:buClr>
+                <a:srgbClr val="000000"/>
+              </a:buClr>
+              <a:buFont typeface="Arial"/>
+              <a:buNone/>
+            </a:pPr>
+            <a:endParaRPr lang="en-US" sz="1400" b="0" i="0" u="none" strike="noStrike" cap="none" smtClean="0">
+              <a:solidFill>
+                <a:srgbClr val="000000"/>
+              </a:solidFill>
+              <a:latin typeface="Arial"/>
+              <a:ea typeface="Arial"/>
+              <a:cs typeface="Arial"/>
+              <a:sym typeface="Arial"/>
+            </a:endParaRPr>
+          </a:p>
+          <a:p>
+            <a:pPr marL="0" marR="0" lvl="6" indent="0" algn="l" rtl="0">
+              <a:lnSpc>
+                <a:spcPct val="100000"/>
+              </a:lnSpc>
+              <a:spcBef>
+                <a:spcPts val="0"/>
+              </a:spcBef>
+              <a:spcAft>
+                <a:spcPts val="0"/>
+              </a:spcAft>
+              <a:buClr>
+                <a:srgbClr val="000000"/>
+              </a:buClr>
+              <a:buFont typeface="Arial"/>
+              <a:buNone/>
+            </a:pPr>
+            <a:endParaRPr lang="en-US" sz="1400" b="0" i="0" u="none" strike="noStrike" cap="none" smtClean="0">
+              <a:solidFill>
+                <a:srgbClr val="000000"/>
+              </a:solidFill>
+              <a:latin typeface="Arial"/>
+              <a:ea typeface="Arial"/>
+              <a:cs typeface="Arial"/>
+              <a:sym typeface="Arial"/>
+            </a:endParaRPr>
+          </a:p>
+          <a:p>
+            <a:pPr marL="0" marR="0" lvl="7" indent="0" algn="l" rtl="0">
+              <a:lnSpc>
+                <a:spcPct val="100000"/>
+              </a:lnSpc>
+              <a:spcBef>
+                <a:spcPts val="0"/>
+              </a:spcBef>
+              <a:spcAft>
+                <a:spcPts val="0"/>
+              </a:spcAft>
+              <a:buClr>
+                <a:srgbClr val="000000"/>
+              </a:buClr>
+              <a:buFont typeface="Arial"/>
+              <a:buNone/>
+            </a:pPr>
+            <a:endParaRPr lang="en-US" sz="1400" b="0" i="0" u="none" strike="noStrike" cap="none" smtClean="0">
+              <a:solidFill>
+                <a:srgbClr val="000000"/>
+              </a:solidFill>
+              <a:latin typeface="Arial"/>
+              <a:ea typeface="Arial"/>
+              <a:cs typeface="Arial"/>
+              <a:sym typeface="Arial"/>
+            </a:endParaRPr>
+          </a:p>
+          <a:p>
+            <a:pPr marL="0" marR="0" lvl="8" indent="0" algn="l" rtl="0">
+              <a:lnSpc>
+                <a:spcPct val="100000"/>
+              </a:lnSpc>
+              <a:spcBef>
+                <a:spcPts val="0"/>
+              </a:spcBef>
+              <a:spcAft>
+                <a:spcPts val="0"/>
+              </a:spcAft>
+              <a:buClr>
+                <a:srgbClr val="000000"/>
+              </a:buClr>
+              <a:buFont typeface="Arial"/>
+              <a:buNone/>
+            </a:pPr>
+            <a:endParaRPr lang="en-US" sz="1400" b="0" i="0" u="none" strike="noStrike" cap="none">
+              <a:solidFill>
+                <a:srgbClr val="000000"/>
+              </a:solidFill>
+              <a:latin typeface="Arial"/>
+              <a:ea typeface="Arial"/>
+              <a:cs typeface="Arial"/>
+              <a:sym typeface="Arial"/>
+            </a:endParaRPr>
+          </a:p>
+        </p:txBody>
+      </p:sp>
+    </p:spTree>
+    <p:extLst>
+      <p:ext uri="{BB962C8B-B14F-4D97-AF65-F5344CB8AC3E}">
+        <p14:creationId xmlns:p14="http://schemas.microsoft.com/office/powerpoint/2010/main" val="3671978657"/>
+      </p:ext>
+    </p:extLst>
+  </p:cSld>
+  <p:clrMapOvr>
+    <a:masterClrMapping/>
+  </p:clrMapOvr>
+</p:notes>
+</file>
+
+<file path=ppt/notesSlides/notesSlide7.xml><?xml version="1.0" encoding="utf-8"?>
+<p:notes xmlns:a="http://schemas.openxmlformats.org/drawingml/2006/main" xmlns:r="http://schemas.openxmlformats.org/officeDocument/2006/relationships" xmlns:p="http://schemas.openxmlformats.org/presentationml/2006/main">
+  <p:cSld>
+    <p:spTree>
+      <p:nvGrpSpPr>
+        <p:cNvPr id="1" name=""/>
+        <p:cNvGrpSpPr/>
+        <p:nvPr/>
+      </p:nvGrpSpPr>
+      <p:grpSpPr>
+        <a:xfrm>
+          <a:off x="0" y="0"/>
+          <a:ext cx="0" cy="0"/>
+          <a:chOff x="0" y="0"/>
+          <a:chExt cx="0" cy="0"/>
+        </a:xfrm>
+      </p:grpSpPr>
+      <p:sp>
+        <p:nvSpPr>
+          <p:cNvPr id="2" name="Slide Image Placeholder 1"/>
+          <p:cNvSpPr>
+            <a:spLocks noGrp="1" noRot="1" noChangeAspect="1"/>
+          </p:cNvSpPr>
+          <p:nvPr>
+            <p:ph type="sldImg"/>
+          </p:nvPr>
+        </p:nvSpPr>
+        <p:spPr>
+          <a:xfrm>
+            <a:off x="406400" y="696913"/>
+            <a:ext cx="6196013" cy="3486150"/>
+          </a:xfrm>
+        </p:spPr>
+      </p:sp>
+      <p:sp>
+        <p:nvSpPr>
+          <p:cNvPr id="3" name="Notes Placeholder 2"/>
+          <p:cNvSpPr>
+            <a:spLocks noGrp="1"/>
+          </p:cNvSpPr>
+          <p:nvPr>
+            <p:ph type="body" idx="1"/>
+          </p:nvPr>
+        </p:nvSpPr>
+        <p:spPr/>
+        <p:txBody>
+          <a:bodyPr/>
+          <a:lstStyle/>
+          <a:p>
+            <a:r>
+              <a:rPr lang="en-US" dirty="0" smtClean="0"/>
+              <a:t>https://k21academy.com/amazon-web-services/aws-for-testers-and-qa/</a:t>
+            </a:r>
+            <a:endParaRPr lang="en-US" dirty="0"/>
+          </a:p>
+        </p:txBody>
+      </p:sp>
+      <p:sp>
+        <p:nvSpPr>
+          <p:cNvPr id="4" name="Slide Number Placeholder 3"/>
+          <p:cNvSpPr>
+            <a:spLocks noGrp="1"/>
+          </p:cNvSpPr>
+          <p:nvPr>
+            <p:ph type="sldNum" idx="10"/>
+          </p:nvPr>
+        </p:nvSpPr>
+        <p:spPr/>
+        <p:txBody>
+          <a:bodyPr/>
+          <a:lstStyle/>
+          <a:p>
+            <a:pPr marL="0" marR="0" lvl="0" indent="0" algn="r" rtl="0">
+              <a:lnSpc>
+                <a:spcPct val="100000"/>
+              </a:lnSpc>
+              <a:spcBef>
+                <a:spcPts val="0"/>
+              </a:spcBef>
+              <a:spcAft>
+                <a:spcPts val="0"/>
+              </a:spcAft>
+              <a:buClr>
+                <a:srgbClr val="000000"/>
+              </a:buClr>
+              <a:buFont typeface="Arial"/>
+              <a:buNone/>
+            </a:pPr>
+            <a:endParaRPr lang="en-US" sz="1200" b="0" i="0" u="none" strike="noStrike" cap="none" smtClean="0">
+              <a:solidFill>
+                <a:srgbClr val="000000"/>
+              </a:solidFill>
+              <a:latin typeface="Arial"/>
+              <a:ea typeface="Arial"/>
+              <a:cs typeface="Arial"/>
+              <a:sym typeface="Arial"/>
+            </a:endParaRPr>
+          </a:p>
+          <a:p>
+            <a:pPr marL="0" marR="0" lvl="1" indent="0" algn="l" rtl="0">
+              <a:lnSpc>
+                <a:spcPct val="100000"/>
+              </a:lnSpc>
+              <a:spcBef>
+                <a:spcPts val="0"/>
+              </a:spcBef>
+              <a:spcAft>
+                <a:spcPts val="0"/>
+              </a:spcAft>
+              <a:buClr>
+                <a:srgbClr val="000000"/>
+              </a:buClr>
+              <a:buFont typeface="Arial"/>
+              <a:buNone/>
+            </a:pPr>
+            <a:endParaRPr lang="en-US" sz="1400" b="0" i="0" u="none" strike="noStrike" cap="none" smtClean="0">
+              <a:solidFill>
+                <a:srgbClr val="000000"/>
+              </a:solidFill>
+              <a:latin typeface="Arial"/>
+              <a:ea typeface="Arial"/>
+              <a:cs typeface="Arial"/>
+              <a:sym typeface="Arial"/>
+            </a:endParaRPr>
+          </a:p>
+          <a:p>
+            <a:pPr marL="0" marR="0" lvl="2" indent="0" algn="l" rtl="0">
+              <a:lnSpc>
+                <a:spcPct val="100000"/>
+              </a:lnSpc>
+              <a:spcBef>
+                <a:spcPts val="0"/>
+              </a:spcBef>
+              <a:spcAft>
+                <a:spcPts val="0"/>
+              </a:spcAft>
+              <a:buClr>
+                <a:srgbClr val="000000"/>
+              </a:buClr>
+              <a:buFont typeface="Arial"/>
+              <a:buNone/>
+            </a:pPr>
+            <a:endParaRPr lang="en-US" sz="1400" b="0" i="0" u="none" strike="noStrike" cap="none" smtClean="0">
+              <a:solidFill>
+                <a:srgbClr val="000000"/>
+              </a:solidFill>
+              <a:latin typeface="Arial"/>
+              <a:ea typeface="Arial"/>
+              <a:cs typeface="Arial"/>
+              <a:sym typeface="Arial"/>
+            </a:endParaRPr>
+          </a:p>
+          <a:p>
+            <a:pPr marL="0" marR="0" lvl="3" indent="0" algn="l" rtl="0">
+              <a:lnSpc>
+                <a:spcPct val="100000"/>
+              </a:lnSpc>
+              <a:spcBef>
+                <a:spcPts val="0"/>
+              </a:spcBef>
+              <a:spcAft>
+                <a:spcPts val="0"/>
+              </a:spcAft>
+              <a:buClr>
+                <a:srgbClr val="000000"/>
+              </a:buClr>
+              <a:buFont typeface="Arial"/>
+              <a:buNone/>
+            </a:pPr>
+            <a:endParaRPr lang="en-US" sz="1400" b="0" i="0" u="none" strike="noStrike" cap="none" smtClean="0">
+              <a:solidFill>
+                <a:srgbClr val="000000"/>
+              </a:solidFill>
+              <a:latin typeface="Arial"/>
+              <a:ea typeface="Arial"/>
+              <a:cs typeface="Arial"/>
+              <a:sym typeface="Arial"/>
+            </a:endParaRPr>
+          </a:p>
+          <a:p>
+            <a:pPr marL="0" marR="0" lvl="4" indent="0" algn="l" rtl="0">
+              <a:lnSpc>
+                <a:spcPct val="100000"/>
+              </a:lnSpc>
+              <a:spcBef>
+                <a:spcPts val="0"/>
+              </a:spcBef>
+              <a:spcAft>
+                <a:spcPts val="0"/>
+              </a:spcAft>
+              <a:buClr>
+                <a:srgbClr val="000000"/>
+              </a:buClr>
+              <a:buFont typeface="Arial"/>
+              <a:buNone/>
+            </a:pPr>
+            <a:endParaRPr lang="en-US" sz="1400" b="0" i="0" u="none" strike="noStrike" cap="none" smtClean="0">
+              <a:solidFill>
+                <a:srgbClr val="000000"/>
+              </a:solidFill>
+              <a:latin typeface="Arial"/>
+              <a:ea typeface="Arial"/>
+              <a:cs typeface="Arial"/>
+              <a:sym typeface="Arial"/>
+            </a:endParaRPr>
+          </a:p>
+          <a:p>
+            <a:pPr marL="0" marR="0" lvl="5" indent="0" algn="l" rtl="0">
+              <a:lnSpc>
+                <a:spcPct val="100000"/>
+              </a:lnSpc>
+              <a:spcBef>
+                <a:spcPts val="0"/>
+              </a:spcBef>
+              <a:spcAft>
+                <a:spcPts val="0"/>
+              </a:spcAft>
+              <a:buClr>
+                <a:srgbClr val="000000"/>
+              </a:buClr>
+              <a:buFont typeface="Arial"/>
+              <a:buNone/>
+            </a:pPr>
+            <a:endParaRPr lang="en-US" sz="1400" b="0" i="0" u="none" strike="noStrike" cap="none" smtClean="0">
+              <a:solidFill>
+                <a:srgbClr val="000000"/>
+              </a:solidFill>
+              <a:latin typeface="Arial"/>
+              <a:ea typeface="Arial"/>
+              <a:cs typeface="Arial"/>
+              <a:sym typeface="Arial"/>
+            </a:endParaRPr>
+          </a:p>
+          <a:p>
+            <a:pPr marL="0" marR="0" lvl="6" indent="0" algn="l" rtl="0">
+              <a:lnSpc>
+                <a:spcPct val="100000"/>
+              </a:lnSpc>
+              <a:spcBef>
+                <a:spcPts val="0"/>
+              </a:spcBef>
+              <a:spcAft>
+                <a:spcPts val="0"/>
+              </a:spcAft>
+              <a:buClr>
+                <a:srgbClr val="000000"/>
+              </a:buClr>
+              <a:buFont typeface="Arial"/>
+              <a:buNone/>
+            </a:pPr>
+            <a:endParaRPr lang="en-US" sz="1400" b="0" i="0" u="none" strike="noStrike" cap="none" smtClean="0">
+              <a:solidFill>
+                <a:srgbClr val="000000"/>
+              </a:solidFill>
+              <a:latin typeface="Arial"/>
+              <a:ea typeface="Arial"/>
+              <a:cs typeface="Arial"/>
+              <a:sym typeface="Arial"/>
+            </a:endParaRPr>
+          </a:p>
+          <a:p>
+            <a:pPr marL="0" marR="0" lvl="7" indent="0" algn="l" rtl="0">
+              <a:lnSpc>
+                <a:spcPct val="100000"/>
+              </a:lnSpc>
+              <a:spcBef>
+                <a:spcPts val="0"/>
+              </a:spcBef>
+              <a:spcAft>
+                <a:spcPts val="0"/>
+              </a:spcAft>
+              <a:buClr>
+                <a:srgbClr val="000000"/>
+              </a:buClr>
+              <a:buFont typeface="Arial"/>
+              <a:buNone/>
+            </a:pPr>
+            <a:endParaRPr lang="en-US" sz="1400" b="0" i="0" u="none" strike="noStrike" cap="none" smtClean="0">
+              <a:solidFill>
+                <a:srgbClr val="000000"/>
+              </a:solidFill>
+              <a:latin typeface="Arial"/>
+              <a:ea typeface="Arial"/>
+              <a:cs typeface="Arial"/>
+              <a:sym typeface="Arial"/>
+            </a:endParaRPr>
+          </a:p>
+          <a:p>
+            <a:pPr marL="0" marR="0" lvl="8" indent="0" algn="l" rtl="0">
+              <a:lnSpc>
+                <a:spcPct val="100000"/>
+              </a:lnSpc>
+              <a:spcBef>
+                <a:spcPts val="0"/>
+              </a:spcBef>
+              <a:spcAft>
+                <a:spcPts val="0"/>
+              </a:spcAft>
+              <a:buClr>
+                <a:srgbClr val="000000"/>
+              </a:buClr>
+              <a:buFont typeface="Arial"/>
+              <a:buNone/>
+            </a:pPr>
+            <a:endParaRPr lang="en-US" sz="1400" b="0" i="0" u="none" strike="noStrike" cap="none">
+              <a:solidFill>
+                <a:srgbClr val="000000"/>
+              </a:solidFill>
+              <a:latin typeface="Arial"/>
+              <a:ea typeface="Arial"/>
+              <a:cs typeface="Arial"/>
+              <a:sym typeface="Arial"/>
+            </a:endParaRPr>
+          </a:p>
+        </p:txBody>
+      </p:sp>
+    </p:spTree>
+    <p:extLst>
+      <p:ext uri="{BB962C8B-B14F-4D97-AF65-F5344CB8AC3E}">
+        <p14:creationId xmlns:p14="http://schemas.microsoft.com/office/powerpoint/2010/main" val="409523899"/>
+      </p:ext>
+    </p:extLst>
+  </p:cSld>
+  <p:clrMapOvr>
+    <a:masterClrMapping/>
+  </p:clrMapOvr>
+</p:notes>
+</file>
+
+<file path=ppt/notesSlides/notesSlide8.xml><?xml version="1.0" encoding="utf-8"?>
+<p:notes xmlns:a="http://schemas.openxmlformats.org/drawingml/2006/main" xmlns:r="http://schemas.openxmlformats.org/officeDocument/2006/relationships" xmlns:p="http://schemas.openxmlformats.org/presentationml/2006/main">
+  <p:cSld>
+    <p:spTree>
+      <p:nvGrpSpPr>
+        <p:cNvPr id="1" name=""/>
+        <p:cNvGrpSpPr/>
+        <p:nvPr/>
+      </p:nvGrpSpPr>
+      <p:grpSpPr>
+        <a:xfrm>
+          <a:off x="0" y="0"/>
+          <a:ext cx="0" cy="0"/>
+          <a:chOff x="0" y="0"/>
+          <a:chExt cx="0" cy="0"/>
+        </a:xfrm>
+      </p:grpSpPr>
+      <p:sp>
+        <p:nvSpPr>
+          <p:cNvPr id="2" name="Slide Image Placeholder 1"/>
+          <p:cNvSpPr>
+            <a:spLocks noGrp="1" noRot="1" noChangeAspect="1"/>
+          </p:cNvSpPr>
+          <p:nvPr>
+            <p:ph type="sldImg"/>
+          </p:nvPr>
+        </p:nvSpPr>
+        <p:spPr>
+          <a:xfrm>
+            <a:off x="406400" y="696913"/>
+            <a:ext cx="6196013" cy="3486150"/>
+          </a:xfrm>
+        </p:spPr>
+      </p:sp>
+      <p:sp>
+        <p:nvSpPr>
+          <p:cNvPr id="3" name="Notes Placeholder 2"/>
+          <p:cNvSpPr>
+            <a:spLocks noGrp="1"/>
+          </p:cNvSpPr>
+          <p:nvPr>
+            <p:ph type="body" idx="1"/>
+          </p:nvPr>
+        </p:nvSpPr>
+        <p:spPr/>
+        <p:txBody>
+          <a:bodyPr/>
+          <a:lstStyle/>
+          <a:p>
+            <a:r>
+              <a:rPr lang="en-US" dirty="0" smtClean="0"/>
+              <a:t>https://k21academy.com/amazon-web-services/aws-for-testers-and-qa/</a:t>
+            </a:r>
+            <a:endParaRPr lang="en-US" dirty="0"/>
+          </a:p>
+        </p:txBody>
+      </p:sp>
+      <p:sp>
+        <p:nvSpPr>
+          <p:cNvPr id="4" name="Slide Number Placeholder 3"/>
+          <p:cNvSpPr>
+            <a:spLocks noGrp="1"/>
+          </p:cNvSpPr>
+          <p:nvPr>
+            <p:ph type="sldNum" idx="10"/>
+          </p:nvPr>
+        </p:nvSpPr>
+        <p:spPr/>
+        <p:txBody>
+          <a:bodyPr/>
+          <a:lstStyle/>
+          <a:p>
+            <a:pPr marL="0" marR="0" lvl="0" indent="0" algn="r" rtl="0">
+              <a:lnSpc>
+                <a:spcPct val="100000"/>
+              </a:lnSpc>
+              <a:spcBef>
+                <a:spcPts val="0"/>
+              </a:spcBef>
+              <a:spcAft>
+                <a:spcPts val="0"/>
+              </a:spcAft>
+              <a:buClr>
+                <a:srgbClr val="000000"/>
+              </a:buClr>
+              <a:buFont typeface="Arial"/>
+              <a:buNone/>
+            </a:pPr>
+            <a:endParaRPr lang="en-US" sz="1200" b="0" i="0" u="none" strike="noStrike" cap="none" smtClean="0">
+              <a:solidFill>
+                <a:srgbClr val="000000"/>
+              </a:solidFill>
+              <a:latin typeface="Arial"/>
+              <a:ea typeface="Arial"/>
+              <a:cs typeface="Arial"/>
+              <a:sym typeface="Arial"/>
+            </a:endParaRPr>
+          </a:p>
+          <a:p>
+            <a:pPr marL="0" marR="0" lvl="1" indent="0" algn="l" rtl="0">
+              <a:lnSpc>
+                <a:spcPct val="100000"/>
+              </a:lnSpc>
+              <a:spcBef>
+                <a:spcPts val="0"/>
+              </a:spcBef>
+              <a:spcAft>
+                <a:spcPts val="0"/>
+              </a:spcAft>
+              <a:buClr>
+                <a:srgbClr val="000000"/>
+              </a:buClr>
+              <a:buFont typeface="Arial"/>
+              <a:buNone/>
+            </a:pPr>
+            <a:endParaRPr lang="en-US" sz="1400" b="0" i="0" u="none" strike="noStrike" cap="none" smtClean="0">
+              <a:solidFill>
+                <a:srgbClr val="000000"/>
+              </a:solidFill>
+              <a:latin typeface="Arial"/>
+              <a:ea typeface="Arial"/>
+              <a:cs typeface="Arial"/>
+              <a:sym typeface="Arial"/>
+            </a:endParaRPr>
+          </a:p>
+          <a:p>
+            <a:pPr marL="0" marR="0" lvl="2" indent="0" algn="l" rtl="0">
+              <a:lnSpc>
+                <a:spcPct val="100000"/>
+              </a:lnSpc>
+              <a:spcBef>
+                <a:spcPts val="0"/>
+              </a:spcBef>
+              <a:spcAft>
+                <a:spcPts val="0"/>
+              </a:spcAft>
+              <a:buClr>
+                <a:srgbClr val="000000"/>
+              </a:buClr>
+              <a:buFont typeface="Arial"/>
+              <a:buNone/>
+            </a:pPr>
+            <a:endParaRPr lang="en-US" sz="1400" b="0" i="0" u="none" strike="noStrike" cap="none" smtClean="0">
+              <a:solidFill>
+                <a:srgbClr val="000000"/>
+              </a:solidFill>
+              <a:latin typeface="Arial"/>
+              <a:ea typeface="Arial"/>
+              <a:cs typeface="Arial"/>
+              <a:sym typeface="Arial"/>
+            </a:endParaRPr>
+          </a:p>
+          <a:p>
+            <a:pPr marL="0" marR="0" lvl="3" indent="0" algn="l" rtl="0">
+              <a:lnSpc>
+                <a:spcPct val="100000"/>
+              </a:lnSpc>
+              <a:spcBef>
+                <a:spcPts val="0"/>
+              </a:spcBef>
+              <a:spcAft>
+                <a:spcPts val="0"/>
+              </a:spcAft>
+              <a:buClr>
+                <a:srgbClr val="000000"/>
+              </a:buClr>
+              <a:buFont typeface="Arial"/>
+              <a:buNone/>
+            </a:pPr>
+            <a:endParaRPr lang="en-US" sz="1400" b="0" i="0" u="none" strike="noStrike" cap="none" smtClean="0">
+              <a:solidFill>
+                <a:srgbClr val="000000"/>
+              </a:solidFill>
+              <a:latin typeface="Arial"/>
+              <a:ea typeface="Arial"/>
+              <a:cs typeface="Arial"/>
+              <a:sym typeface="Arial"/>
+            </a:endParaRPr>
+          </a:p>
+          <a:p>
+            <a:pPr marL="0" marR="0" lvl="4" indent="0" algn="l" rtl="0">
+              <a:lnSpc>
+                <a:spcPct val="100000"/>
+              </a:lnSpc>
+              <a:spcBef>
+                <a:spcPts val="0"/>
+              </a:spcBef>
+              <a:spcAft>
+                <a:spcPts val="0"/>
+              </a:spcAft>
+              <a:buClr>
+                <a:srgbClr val="000000"/>
+              </a:buClr>
+              <a:buFont typeface="Arial"/>
+              <a:buNone/>
+            </a:pPr>
+            <a:endParaRPr lang="en-US" sz="1400" b="0" i="0" u="none" strike="noStrike" cap="none" smtClean="0">
+              <a:solidFill>
+                <a:srgbClr val="000000"/>
+              </a:solidFill>
+              <a:latin typeface="Arial"/>
+              <a:ea typeface="Arial"/>
+              <a:cs typeface="Arial"/>
+              <a:sym typeface="Arial"/>
+            </a:endParaRPr>
+          </a:p>
+          <a:p>
+            <a:pPr marL="0" marR="0" lvl="5" indent="0" algn="l" rtl="0">
+              <a:lnSpc>
+                <a:spcPct val="100000"/>
+              </a:lnSpc>
+              <a:spcBef>
+                <a:spcPts val="0"/>
+              </a:spcBef>
+              <a:spcAft>
+                <a:spcPts val="0"/>
+              </a:spcAft>
+              <a:buClr>
+                <a:srgbClr val="000000"/>
+              </a:buClr>
+              <a:buFont typeface="Arial"/>
+              <a:buNone/>
+            </a:pPr>
+            <a:endParaRPr lang="en-US" sz="1400" b="0" i="0" u="none" strike="noStrike" cap="none" smtClean="0">
+              <a:solidFill>
+                <a:srgbClr val="000000"/>
+              </a:solidFill>
+              <a:latin typeface="Arial"/>
+              <a:ea typeface="Arial"/>
+              <a:cs typeface="Arial"/>
+              <a:sym typeface="Arial"/>
+            </a:endParaRPr>
+          </a:p>
+          <a:p>
+            <a:pPr marL="0" marR="0" lvl="6" indent="0" algn="l" rtl="0">
+              <a:lnSpc>
+                <a:spcPct val="100000"/>
+              </a:lnSpc>
+              <a:spcBef>
+                <a:spcPts val="0"/>
+              </a:spcBef>
+              <a:spcAft>
+                <a:spcPts val="0"/>
+              </a:spcAft>
+              <a:buClr>
+                <a:srgbClr val="000000"/>
+              </a:buClr>
+              <a:buFont typeface="Arial"/>
+              <a:buNone/>
+            </a:pPr>
+            <a:endParaRPr lang="en-US" sz="1400" b="0" i="0" u="none" strike="noStrike" cap="none" smtClean="0">
+              <a:solidFill>
+                <a:srgbClr val="000000"/>
+              </a:solidFill>
+              <a:latin typeface="Arial"/>
+              <a:ea typeface="Arial"/>
+              <a:cs typeface="Arial"/>
+              <a:sym typeface="Arial"/>
+            </a:endParaRPr>
+          </a:p>
+          <a:p>
+            <a:pPr marL="0" marR="0" lvl="7" indent="0" algn="l" rtl="0">
+              <a:lnSpc>
+                <a:spcPct val="100000"/>
+              </a:lnSpc>
+              <a:spcBef>
+                <a:spcPts val="0"/>
+              </a:spcBef>
+              <a:spcAft>
+                <a:spcPts val="0"/>
+              </a:spcAft>
+              <a:buClr>
+                <a:srgbClr val="000000"/>
+              </a:buClr>
+              <a:buFont typeface="Arial"/>
+              <a:buNone/>
+            </a:pPr>
+            <a:endParaRPr lang="en-US" sz="1400" b="0" i="0" u="none" strike="noStrike" cap="none" smtClean="0">
+              <a:solidFill>
+                <a:srgbClr val="000000"/>
+              </a:solidFill>
+              <a:latin typeface="Arial"/>
+              <a:ea typeface="Arial"/>
+              <a:cs typeface="Arial"/>
+              <a:sym typeface="Arial"/>
+            </a:endParaRPr>
+          </a:p>
+          <a:p>
+            <a:pPr marL="0" marR="0" lvl="8" indent="0" algn="l" rtl="0">
+              <a:lnSpc>
+                <a:spcPct val="100000"/>
+              </a:lnSpc>
+              <a:spcBef>
+                <a:spcPts val="0"/>
+              </a:spcBef>
+              <a:spcAft>
+                <a:spcPts val="0"/>
+              </a:spcAft>
+              <a:buClr>
+                <a:srgbClr val="000000"/>
+              </a:buClr>
+              <a:buFont typeface="Arial"/>
+              <a:buNone/>
+            </a:pPr>
+            <a:endParaRPr lang="en-US" sz="1400" b="0" i="0" u="none" strike="noStrike" cap="none">
+              <a:solidFill>
+                <a:srgbClr val="000000"/>
+              </a:solidFill>
+              <a:latin typeface="Arial"/>
+              <a:ea typeface="Arial"/>
+              <a:cs typeface="Arial"/>
+              <a:sym typeface="Arial"/>
+            </a:endParaRPr>
+          </a:p>
+        </p:txBody>
+      </p:sp>
+    </p:spTree>
+    <p:extLst>
+      <p:ext uri="{BB962C8B-B14F-4D97-AF65-F5344CB8AC3E}">
+        <p14:creationId xmlns:p14="http://schemas.microsoft.com/office/powerpoint/2010/main" val="3138731109"/>
+      </p:ext>
+    </p:extLst>
+  </p:cSld>
+  <p:clrMapOvr>
+    <a:masterClrMapping/>
+  </p:clrMapOvr>
+</p:notes>
+</file>
+
+<file path=ppt/notesSlides/notesSlide9.xml><?xml version="1.0" encoding="utf-8"?>
+<p:notes xmlns:a="http://schemas.openxmlformats.org/drawingml/2006/main" xmlns:r="http://schemas.openxmlformats.org/officeDocument/2006/relationships" xmlns:p="http://schemas.openxmlformats.org/presentationml/2006/main">
+  <p:cSld>
+    <p:spTree>
+      <p:nvGrpSpPr>
+        <p:cNvPr id="1" name=""/>
+        <p:cNvGrpSpPr/>
+        <p:nvPr/>
+      </p:nvGrpSpPr>
+      <p:grpSpPr>
+        <a:xfrm>
+          <a:off x="0" y="0"/>
+          <a:ext cx="0" cy="0"/>
+          <a:chOff x="0" y="0"/>
+          <a:chExt cx="0" cy="0"/>
+        </a:xfrm>
+      </p:grpSpPr>
+      <p:sp>
+        <p:nvSpPr>
+          <p:cNvPr id="2" name="Slide Image Placeholder 1"/>
+          <p:cNvSpPr>
+            <a:spLocks noGrp="1" noRot="1" noChangeAspect="1"/>
+          </p:cNvSpPr>
+          <p:nvPr>
+            <p:ph type="sldImg"/>
+          </p:nvPr>
+        </p:nvSpPr>
+        <p:spPr>
+          <a:xfrm>
+            <a:off x="406400" y="696913"/>
+            <a:ext cx="6196013" cy="3486150"/>
+          </a:xfrm>
+        </p:spPr>
+      </p:sp>
+      <p:sp>
+        <p:nvSpPr>
+          <p:cNvPr id="3" name="Notes Placeholder 2"/>
+          <p:cNvSpPr>
+            <a:spLocks noGrp="1"/>
+          </p:cNvSpPr>
+          <p:nvPr>
+            <p:ph type="body" idx="1"/>
+          </p:nvPr>
+        </p:nvSpPr>
+        <p:spPr/>
+        <p:txBody>
+          <a:bodyPr/>
+          <a:lstStyle/>
+          <a:p>
+            <a:r>
+              <a:rPr lang="en-US" dirty="0" smtClean="0"/>
+              <a:t>https://k21academy.com/amazon-web-services/aws-for-testers-and-qa</a:t>
+            </a:r>
+            <a:r>
+              <a:rPr lang="en-US" dirty="0" smtClean="0"/>
+              <a:t>/</a:t>
+            </a:r>
+          </a:p>
+          <a:p>
+            <a:r>
+              <a:rPr lang="en-US" dirty="0" smtClean="0"/>
+              <a:t>https://dev.to/iaadidev/-creating-virtual-machines-on-cloud-platforms-aws-azure-and-gcp-2553</a:t>
+            </a:r>
+            <a:endParaRPr lang="en-US" dirty="0"/>
+          </a:p>
+        </p:txBody>
+      </p:sp>
+      <p:sp>
+        <p:nvSpPr>
+          <p:cNvPr id="4" name="Slide Number Placeholder 3"/>
+          <p:cNvSpPr>
+            <a:spLocks noGrp="1"/>
+          </p:cNvSpPr>
+          <p:nvPr>
+            <p:ph type="sldNum" idx="10"/>
+          </p:nvPr>
+        </p:nvSpPr>
+        <p:spPr/>
+        <p:txBody>
+          <a:bodyPr/>
+          <a:lstStyle/>
+          <a:p>
+            <a:pPr marL="0" marR="0" lvl="0" indent="0" algn="r" rtl="0">
+              <a:lnSpc>
+                <a:spcPct val="100000"/>
+              </a:lnSpc>
+              <a:spcBef>
+                <a:spcPts val="0"/>
+              </a:spcBef>
+              <a:spcAft>
+                <a:spcPts val="0"/>
+              </a:spcAft>
+              <a:buClr>
+                <a:srgbClr val="000000"/>
+              </a:buClr>
+              <a:buFont typeface="Arial"/>
+              <a:buNone/>
+            </a:pPr>
+            <a:endParaRPr lang="en-US" sz="1200" b="0" i="0" u="none" strike="noStrike" cap="none" smtClean="0">
+              <a:solidFill>
+                <a:srgbClr val="000000"/>
+              </a:solidFill>
+              <a:latin typeface="Arial"/>
+              <a:ea typeface="Arial"/>
+              <a:cs typeface="Arial"/>
+              <a:sym typeface="Arial"/>
+            </a:endParaRPr>
+          </a:p>
+          <a:p>
+            <a:pPr marL="0" marR="0" lvl="1" indent="0" algn="l" rtl="0">
+              <a:lnSpc>
+                <a:spcPct val="100000"/>
+              </a:lnSpc>
+              <a:spcBef>
+                <a:spcPts val="0"/>
+              </a:spcBef>
+              <a:spcAft>
+                <a:spcPts val="0"/>
+              </a:spcAft>
+              <a:buClr>
+                <a:srgbClr val="000000"/>
+              </a:buClr>
+              <a:buFont typeface="Arial"/>
+              <a:buNone/>
+            </a:pPr>
+            <a:endParaRPr lang="en-US" sz="1400" b="0" i="0" u="none" strike="noStrike" cap="none" smtClean="0">
+              <a:solidFill>
+                <a:srgbClr val="000000"/>
+              </a:solidFill>
+              <a:latin typeface="Arial"/>
+              <a:ea typeface="Arial"/>
+              <a:cs typeface="Arial"/>
+              <a:sym typeface="Arial"/>
+            </a:endParaRPr>
+          </a:p>
+          <a:p>
+            <a:pPr marL="0" marR="0" lvl="2" indent="0" algn="l" rtl="0">
+              <a:lnSpc>
+                <a:spcPct val="100000"/>
+              </a:lnSpc>
+              <a:spcBef>
+                <a:spcPts val="0"/>
+              </a:spcBef>
+              <a:spcAft>
+                <a:spcPts val="0"/>
+              </a:spcAft>
+              <a:buClr>
+                <a:srgbClr val="000000"/>
+              </a:buClr>
+              <a:buFont typeface="Arial"/>
+              <a:buNone/>
+            </a:pPr>
+            <a:endParaRPr lang="en-US" sz="1400" b="0" i="0" u="none" strike="noStrike" cap="none" smtClean="0">
+              <a:solidFill>
+                <a:srgbClr val="000000"/>
+              </a:solidFill>
+              <a:latin typeface="Arial"/>
+              <a:ea typeface="Arial"/>
+              <a:cs typeface="Arial"/>
+              <a:sym typeface="Arial"/>
+            </a:endParaRPr>
+          </a:p>
+          <a:p>
+            <a:pPr marL="0" marR="0" lvl="3" indent="0" algn="l" rtl="0">
+              <a:lnSpc>
+                <a:spcPct val="100000"/>
+              </a:lnSpc>
+              <a:spcBef>
+                <a:spcPts val="0"/>
+              </a:spcBef>
+              <a:spcAft>
+                <a:spcPts val="0"/>
+              </a:spcAft>
+              <a:buClr>
+                <a:srgbClr val="000000"/>
+              </a:buClr>
+              <a:buFont typeface="Arial"/>
+              <a:buNone/>
+            </a:pPr>
+            <a:endParaRPr lang="en-US" sz="1400" b="0" i="0" u="none" strike="noStrike" cap="none" smtClean="0">
+              <a:solidFill>
+                <a:srgbClr val="000000"/>
+              </a:solidFill>
+              <a:latin typeface="Arial"/>
+              <a:ea typeface="Arial"/>
+              <a:cs typeface="Arial"/>
+              <a:sym typeface="Arial"/>
+            </a:endParaRPr>
+          </a:p>
+          <a:p>
+            <a:pPr marL="0" marR="0" lvl="4" indent="0" algn="l" rtl="0">
+              <a:lnSpc>
+                <a:spcPct val="100000"/>
+              </a:lnSpc>
+              <a:spcBef>
+                <a:spcPts val="0"/>
+              </a:spcBef>
+              <a:spcAft>
+                <a:spcPts val="0"/>
+              </a:spcAft>
+              <a:buClr>
+                <a:srgbClr val="000000"/>
+              </a:buClr>
+              <a:buFont typeface="Arial"/>
+              <a:buNone/>
+            </a:pPr>
+            <a:endParaRPr lang="en-US" sz="1400" b="0" i="0" u="none" strike="noStrike" cap="none" smtClean="0">
+              <a:solidFill>
+                <a:srgbClr val="000000"/>
+              </a:solidFill>
+              <a:latin typeface="Arial"/>
+              <a:ea typeface="Arial"/>
+              <a:cs typeface="Arial"/>
+              <a:sym typeface="Arial"/>
+            </a:endParaRPr>
+          </a:p>
+          <a:p>
+            <a:pPr marL="0" marR="0" lvl="5" indent="0" algn="l" rtl="0">
+              <a:lnSpc>
+                <a:spcPct val="100000"/>
+              </a:lnSpc>
+              <a:spcBef>
+                <a:spcPts val="0"/>
+              </a:spcBef>
+              <a:spcAft>
+                <a:spcPts val="0"/>
+              </a:spcAft>
+              <a:buClr>
+                <a:srgbClr val="000000"/>
+              </a:buClr>
+              <a:buFont typeface="Arial"/>
+              <a:buNone/>
+            </a:pPr>
+            <a:endParaRPr lang="en-US" sz="1400" b="0" i="0" u="none" strike="noStrike" cap="none" smtClean="0">
+              <a:solidFill>
+                <a:srgbClr val="000000"/>
+              </a:solidFill>
+              <a:latin typeface="Arial"/>
+              <a:ea typeface="Arial"/>
+              <a:cs typeface="Arial"/>
+              <a:sym typeface="Arial"/>
+            </a:endParaRPr>
+          </a:p>
+          <a:p>
+            <a:pPr marL="0" marR="0" lvl="6" indent="0" algn="l" rtl="0">
+              <a:lnSpc>
+                <a:spcPct val="100000"/>
+              </a:lnSpc>
+              <a:spcBef>
+                <a:spcPts val="0"/>
+              </a:spcBef>
+              <a:spcAft>
+                <a:spcPts val="0"/>
+              </a:spcAft>
+              <a:buClr>
+                <a:srgbClr val="000000"/>
+              </a:buClr>
+              <a:buFont typeface="Arial"/>
+              <a:buNone/>
+            </a:pPr>
+            <a:endParaRPr lang="en-US" sz="1400" b="0" i="0" u="none" strike="noStrike" cap="none" smtClean="0">
+              <a:solidFill>
+                <a:srgbClr val="000000"/>
+              </a:solidFill>
+              <a:latin typeface="Arial"/>
+              <a:ea typeface="Arial"/>
+              <a:cs typeface="Arial"/>
+              <a:sym typeface="Arial"/>
+            </a:endParaRPr>
+          </a:p>
+          <a:p>
+            <a:pPr marL="0" marR="0" lvl="7" indent="0" algn="l" rtl="0">
+              <a:lnSpc>
+                <a:spcPct val="100000"/>
+              </a:lnSpc>
+              <a:spcBef>
+                <a:spcPts val="0"/>
+              </a:spcBef>
+              <a:spcAft>
+                <a:spcPts val="0"/>
+              </a:spcAft>
+              <a:buClr>
+                <a:srgbClr val="000000"/>
+              </a:buClr>
+              <a:buFont typeface="Arial"/>
+              <a:buNone/>
+            </a:pPr>
+            <a:endParaRPr lang="en-US" sz="1400" b="0" i="0" u="none" strike="noStrike" cap="none" smtClean="0">
+              <a:solidFill>
+                <a:srgbClr val="000000"/>
+              </a:solidFill>
+              <a:latin typeface="Arial"/>
+              <a:ea typeface="Arial"/>
+              <a:cs typeface="Arial"/>
+              <a:sym typeface="Arial"/>
+            </a:endParaRPr>
+          </a:p>
+          <a:p>
+            <a:pPr marL="0" marR="0" lvl="8" indent="0" algn="l" rtl="0">
+              <a:lnSpc>
+                <a:spcPct val="100000"/>
+              </a:lnSpc>
+              <a:spcBef>
+                <a:spcPts val="0"/>
+              </a:spcBef>
+              <a:spcAft>
+                <a:spcPts val="0"/>
+              </a:spcAft>
+              <a:buClr>
+                <a:srgbClr val="000000"/>
+              </a:buClr>
+              <a:buFont typeface="Arial"/>
+              <a:buNone/>
+            </a:pPr>
+            <a:endParaRPr lang="en-US" sz="1400" b="0" i="0" u="none" strike="noStrike" cap="none">
+              <a:solidFill>
+                <a:srgbClr val="000000"/>
+              </a:solidFill>
+              <a:latin typeface="Arial"/>
+              <a:ea typeface="Arial"/>
+              <a:cs typeface="Arial"/>
+              <a:sym typeface="Arial"/>
+            </a:endParaRPr>
+          </a:p>
+        </p:txBody>
+      </p:sp>
+    </p:spTree>
+    <p:extLst>
+      <p:ext uri="{BB962C8B-B14F-4D97-AF65-F5344CB8AC3E}">
+        <p14:creationId xmlns:p14="http://schemas.microsoft.com/office/powerpoint/2010/main" val="1057190905"/>
+      </p:ext>
+    </p:extLst>
+  </p:cSld>
+  <p:clrMapOvr>
+    <a:masterClrMapping/>
+  </p:clrMapOvr>
+</p:notes>
+</file>
+
 <file path=ppt/slideLayouts/slideLayout1.xml><?xml version="1.0" encoding="utf-8"?>
 <p:sldLayout xmlns:a="http://schemas.openxmlformats.org/drawingml/2006/main" xmlns:r="http://schemas.openxmlformats.org/officeDocument/2006/relationships" xmlns:p="http://schemas.openxmlformats.org/presentationml/2006/main" type="title" preserve="1">
   <p:cSld name="Title Slide">
@@ -3529,7 +4878,7 @@
           <a:p>
             <a:fld id="{7A02337E-4703-49AB-8D81-EA2F8A6577FC}" type="datetimeFigureOut">
               <a:rPr lang="en-US" smtClean="0"/>
-              <a:t>9/3/2025</a:t>
+              <a:t>9/11/2025</a:t>
             </a:fld>
             <a:endParaRPr lang="en-US"/>
           </a:p>
@@ -3700,7 +5049,7 @@
           <a:p>
             <a:fld id="{7A02337E-4703-49AB-8D81-EA2F8A6577FC}" type="datetimeFigureOut">
               <a:rPr lang="en-US" smtClean="0"/>
-              <a:t>9/3/2025</a:t>
+              <a:t>9/11/2025</a:t>
             </a:fld>
             <a:endParaRPr lang="en-US"/>
           </a:p>
@@ -3881,7 +5230,7 @@
           <a:p>
             <a:fld id="{7A02337E-4703-49AB-8D81-EA2F8A6577FC}" type="datetimeFigureOut">
               <a:rPr lang="en-US" smtClean="0"/>
-              <a:t>9/3/2025</a:t>
+              <a:t>9/11/2025</a:t>
             </a:fld>
             <a:endParaRPr lang="en-US"/>
           </a:p>
@@ -4052,7 +5401,7 @@
           <a:p>
             <a:fld id="{48A87A34-81AB-432B-8DAE-1953F412C126}" type="datetimeFigureOut">
               <a:rPr lang="en-US" smtClean="0"/>
-              <a:t>9/3/2025</a:t>
+              <a:t>9/11/2025</a:t>
             </a:fld>
             <a:endParaRPr lang="en-US" dirty="0"/>
           </a:p>
@@ -4298,7 +5647,7 @@
           <a:p>
             <a:fld id="{7A02337E-4703-49AB-8D81-EA2F8A6577FC}" type="datetimeFigureOut">
               <a:rPr lang="en-US" smtClean="0"/>
-              <a:t>9/3/2025</a:t>
+              <a:t>9/11/2025</a:t>
             </a:fld>
             <a:endParaRPr lang="en-US"/>
           </a:p>
@@ -4531,7 +5880,7 @@
           <a:p>
             <a:fld id="{7A02337E-4703-49AB-8D81-EA2F8A6577FC}" type="datetimeFigureOut">
               <a:rPr lang="en-US" smtClean="0"/>
-              <a:t>9/3/2025</a:t>
+              <a:t>9/11/2025</a:t>
             </a:fld>
             <a:endParaRPr lang="en-US"/>
           </a:p>
@@ -4899,7 +6248,7 @@
           <a:p>
             <a:fld id="{7A02337E-4703-49AB-8D81-EA2F8A6577FC}" type="datetimeFigureOut">
               <a:rPr lang="en-US" smtClean="0"/>
-              <a:t>9/3/2025</a:t>
+              <a:t>9/11/2025</a:t>
             </a:fld>
             <a:endParaRPr lang="en-US"/>
           </a:p>
@@ -5018,7 +6367,7 @@
           <a:p>
             <a:fld id="{7A02337E-4703-49AB-8D81-EA2F8A6577FC}" type="datetimeFigureOut">
               <a:rPr lang="en-US" smtClean="0"/>
-              <a:t>9/3/2025</a:t>
+              <a:t>9/11/2025</a:t>
             </a:fld>
             <a:endParaRPr lang="en-US"/>
           </a:p>
@@ -5114,7 +6463,7 @@
           <a:p>
             <a:fld id="{7A02337E-4703-49AB-8D81-EA2F8A6577FC}" type="datetimeFigureOut">
               <a:rPr lang="en-US" smtClean="0"/>
-              <a:t>9/3/2025</a:t>
+              <a:t>9/11/2025</a:t>
             </a:fld>
             <a:endParaRPr lang="en-US"/>
           </a:p>
@@ -5392,7 +6741,7 @@
           <a:p>
             <a:fld id="{7A02337E-4703-49AB-8D81-EA2F8A6577FC}" type="datetimeFigureOut">
               <a:rPr lang="en-US" smtClean="0"/>
-              <a:t>9/3/2025</a:t>
+              <a:t>9/11/2025</a:t>
             </a:fld>
             <a:endParaRPr lang="en-US"/>
           </a:p>
@@ -5646,7 +6995,7 @@
           <a:p>
             <a:fld id="{7A02337E-4703-49AB-8D81-EA2F8A6577FC}" type="datetimeFigureOut">
               <a:rPr lang="en-US" smtClean="0"/>
-              <a:t>9/3/2025</a:t>
+              <a:t>9/11/2025</a:t>
             </a:fld>
             <a:endParaRPr lang="en-US"/>
           </a:p>
@@ -5860,7 +7209,7 @@
           <a:p>
             <a:fld id="{7A02337E-4703-49AB-8D81-EA2F8A6577FC}" type="datetimeFigureOut">
               <a:rPr lang="en-US" smtClean="0"/>
-              <a:t>9/3/2025</a:t>
+              <a:t>9/11/2025</a:t>
             </a:fld>
             <a:endParaRPr lang="en-US"/>
           </a:p>
@@ -7986,6 +9335,13 @@
               <a:rPr lang="en-US" sz="3200" dirty="0" smtClean="0"/>
               <a:t>AWS</a:t>
             </a:r>
+          </a:p>
+          <a:p>
+            <a:pPr algn="l"/>
+            <a:r>
+              <a:rPr lang="en-US" sz="3200" dirty="0" smtClean="0"/>
+              <a:t>AWS-cloud-platform</a:t>
+            </a:r>
             <a:endParaRPr lang="en-US" sz="3200" dirty="0"/>
           </a:p>
         </p:txBody>
@@ -8104,6 +9460,310 @@
     <p:extLst>
       <p:ext uri="{BB962C8B-B14F-4D97-AF65-F5344CB8AC3E}">
         <p14:creationId xmlns:p14="http://schemas.microsoft.com/office/powerpoint/2010/main" val="2864224306"/>
+      </p:ext>
+    </p:extLst>
+  </p:cSld>
+  <p:clrMapOvr>
+    <a:masterClrMapping/>
+  </p:clrMapOvr>
+  <p:timing>
+    <p:tnLst>
+      <p:par>
+        <p:cTn id="1" dur="indefinite" restart="never" nodeType="tmRoot"/>
+      </p:par>
+    </p:tnLst>
+  </p:timing>
+</p:sld>
+</file>
+
+<file path=ppt/slides/slide10.xml><?xml version="1.0" encoding="utf-8"?>
+<p:sld xmlns:a="http://schemas.openxmlformats.org/drawingml/2006/main" xmlns:r="http://schemas.openxmlformats.org/officeDocument/2006/relationships" xmlns:p="http://schemas.openxmlformats.org/presentationml/2006/main">
+  <p:cSld>
+    <p:spTree>
+      <p:nvGrpSpPr>
+        <p:cNvPr id="1" name=""/>
+        <p:cNvGrpSpPr/>
+        <p:nvPr/>
+      </p:nvGrpSpPr>
+      <p:grpSpPr>
+        <a:xfrm>
+          <a:off x="0" y="0"/>
+          <a:ext cx="0" cy="0"/>
+          <a:chOff x="0" y="0"/>
+          <a:chExt cx="0" cy="0"/>
+        </a:xfrm>
+      </p:grpSpPr>
+      <p:sp>
+        <p:nvSpPr>
+          <p:cNvPr id="2" name="Title 1"/>
+          <p:cNvSpPr>
+            <a:spLocks noGrp="1"/>
+          </p:cNvSpPr>
+          <p:nvPr>
+            <p:ph type="title"/>
+          </p:nvPr>
+        </p:nvSpPr>
+        <p:spPr>
+          <a:xfrm>
+            <a:off x="977833" y="1596207"/>
+            <a:ext cx="7886700" cy="994172"/>
+          </a:xfrm>
+        </p:spPr>
+        <p:txBody>
+          <a:bodyPr>
+            <a:normAutofit/>
+          </a:bodyPr>
+          <a:lstStyle/>
+          <a:p>
+            <a:pPr algn="ctr"/>
+            <a:r>
+              <a:rPr lang="en-US" b="1" dirty="0"/>
+              <a:t>**Amazon Web Services (AWS)**</a:t>
+            </a:r>
+            <a:endParaRPr lang="en-US" dirty="0"/>
+          </a:p>
+        </p:txBody>
+      </p:sp>
+      <p:sp>
+        <p:nvSpPr>
+          <p:cNvPr id="4" name="Slide Number Placeholder 3"/>
+          <p:cNvSpPr>
+            <a:spLocks noGrp="1"/>
+          </p:cNvSpPr>
+          <p:nvPr>
+            <p:ph type="sldNum" sz="quarter" idx="12"/>
+          </p:nvPr>
+        </p:nvSpPr>
+        <p:spPr/>
+        <p:txBody>
+          <a:bodyPr/>
+          <a:lstStyle/>
+          <a:p>
+            <a:fld id="{6D22F896-40B5-4ADD-8801-0D06FADFA095}" type="slidenum">
+              <a:rPr lang="en-US" smtClean="0"/>
+              <a:t>10</a:t>
+            </a:fld>
+            <a:endParaRPr lang="en-US" dirty="0"/>
+          </a:p>
+        </p:txBody>
+      </p:sp>
+      <p:sp>
+        <p:nvSpPr>
+          <p:cNvPr id="3" name="Content Placeholder 2"/>
+          <p:cNvSpPr>
+            <a:spLocks noGrp="1"/>
+          </p:cNvSpPr>
+          <p:nvPr>
+            <p:ph idx="1"/>
+          </p:nvPr>
+        </p:nvSpPr>
+        <p:spPr/>
+        <p:txBody>
+          <a:bodyPr/>
+          <a:lstStyle/>
+          <a:p>
+            <a:endParaRPr lang="en-US" dirty="0"/>
+          </a:p>
+        </p:txBody>
+      </p:sp>
+      <p:pic>
+        <p:nvPicPr>
+          <p:cNvPr id="6" name="Picture 5"/>
+          <p:cNvPicPr>
+            <a:picLocks noChangeAspect="1"/>
+          </p:cNvPicPr>
+          <p:nvPr/>
+        </p:nvPicPr>
+        <p:blipFill>
+          <a:blip r:embed="rId3"/>
+          <a:stretch>
+            <a:fillRect/>
+          </a:stretch>
+        </p:blipFill>
+        <p:spPr>
+          <a:xfrm>
+            <a:off x="5531241" y="2638343"/>
+            <a:ext cx="2984109" cy="1994380"/>
+          </a:xfrm>
+          <a:prstGeom prst="rect">
+            <a:avLst/>
+          </a:prstGeom>
+        </p:spPr>
+      </p:pic>
+      <p:sp>
+        <p:nvSpPr>
+          <p:cNvPr id="7" name="Title 1"/>
+          <p:cNvSpPr txBox="1">
+            <a:spLocks/>
+          </p:cNvSpPr>
+          <p:nvPr/>
+        </p:nvSpPr>
+        <p:spPr>
+          <a:xfrm>
+            <a:off x="7666892" y="154745"/>
+            <a:ext cx="1364566" cy="407963"/>
+          </a:xfrm>
+          <a:prstGeom prst="rect">
+            <a:avLst/>
+          </a:prstGeom>
+        </p:spPr>
+        <p:txBody>
+          <a:bodyPr vert="horz" lIns="91440" tIns="45720" rIns="91440" bIns="45720" rtlCol="0" anchor="ctr">
+            <a:normAutofit/>
+          </a:bodyPr>
+          <a:lstStyle>
+            <a:lvl1pPr algn="l" defTabSz="685800" rtl="0" eaLnBrk="1" latinLnBrk="0" hangingPunct="1">
+              <a:lnSpc>
+                <a:spcPct val="90000"/>
+              </a:lnSpc>
+              <a:spcBef>
+                <a:spcPct val="0"/>
+              </a:spcBef>
+              <a:buNone/>
+              <a:defRPr sz="3300" kern="1200">
+                <a:solidFill>
+                  <a:schemeClr val="tx1"/>
+                </a:solidFill>
+                <a:latin typeface="+mj-lt"/>
+                <a:ea typeface="+mj-ea"/>
+                <a:cs typeface="+mj-cs"/>
+              </a:defRPr>
+            </a:lvl1pPr>
+          </a:lstStyle>
+          <a:p>
+            <a:r>
+              <a:rPr lang="en-US" sz="1200" b="1" dirty="0" smtClean="0">
+                <a:solidFill>
+                  <a:srgbClr val="0070C0"/>
+                </a:solidFill>
+              </a:rPr>
+              <a:t>Cloud providers**</a:t>
+            </a:r>
+            <a:endParaRPr lang="en-US" sz="1200" dirty="0">
+              <a:solidFill>
+                <a:srgbClr val="0070C0"/>
+              </a:solidFill>
+            </a:endParaRPr>
+          </a:p>
+        </p:txBody>
+      </p:sp>
+    </p:spTree>
+    <p:extLst>
+      <p:ext uri="{BB962C8B-B14F-4D97-AF65-F5344CB8AC3E}">
+        <p14:creationId xmlns:p14="http://schemas.microsoft.com/office/powerpoint/2010/main" val="894073909"/>
+      </p:ext>
+    </p:extLst>
+  </p:cSld>
+  <p:clrMapOvr>
+    <a:masterClrMapping/>
+  </p:clrMapOvr>
+  <p:timing>
+    <p:tnLst>
+      <p:par>
+        <p:cTn id="1" dur="indefinite" restart="never" nodeType="tmRoot"/>
+      </p:par>
+    </p:tnLst>
+  </p:timing>
+</p:sld>
+</file>
+
+<file path=ppt/slides/slide11.xml><?xml version="1.0" encoding="utf-8"?>
+<p:sld xmlns:a="http://schemas.openxmlformats.org/drawingml/2006/main" xmlns:r="http://schemas.openxmlformats.org/officeDocument/2006/relationships" xmlns:p="http://schemas.openxmlformats.org/presentationml/2006/main">
+  <p:cSld>
+    <p:spTree>
+      <p:nvGrpSpPr>
+        <p:cNvPr id="1" name=""/>
+        <p:cNvGrpSpPr/>
+        <p:nvPr/>
+      </p:nvGrpSpPr>
+      <p:grpSpPr>
+        <a:xfrm>
+          <a:off x="0" y="0"/>
+          <a:ext cx="0" cy="0"/>
+          <a:chOff x="0" y="0"/>
+          <a:chExt cx="0" cy="0"/>
+        </a:xfrm>
+      </p:grpSpPr>
+      <p:sp>
+        <p:nvSpPr>
+          <p:cNvPr id="4" name="Slide Number Placeholder 3"/>
+          <p:cNvSpPr>
+            <a:spLocks noGrp="1"/>
+          </p:cNvSpPr>
+          <p:nvPr>
+            <p:ph type="sldNum" sz="quarter" idx="12"/>
+          </p:nvPr>
+        </p:nvSpPr>
+        <p:spPr/>
+        <p:txBody>
+          <a:bodyPr/>
+          <a:lstStyle/>
+          <a:p>
+            <a:fld id="{6D22F896-40B5-4ADD-8801-0D06FADFA095}" type="slidenum">
+              <a:rPr lang="en-US" smtClean="0"/>
+              <a:t>11</a:t>
+            </a:fld>
+            <a:endParaRPr lang="en-US" dirty="0"/>
+          </a:p>
+        </p:txBody>
+      </p:sp>
+      <p:sp>
+        <p:nvSpPr>
+          <p:cNvPr id="2" name="Rectangle 1"/>
+          <p:cNvSpPr/>
+          <p:nvPr/>
+        </p:nvSpPr>
+        <p:spPr>
+          <a:xfrm>
+            <a:off x="2286000" y="2248585"/>
+            <a:ext cx="4572000" cy="830997"/>
+          </a:xfrm>
+          <a:prstGeom prst="rect">
+            <a:avLst/>
+          </a:prstGeom>
+        </p:spPr>
+        <p:txBody>
+          <a:bodyPr>
+            <a:spAutoFit/>
+          </a:bodyPr>
+          <a:lstStyle/>
+          <a:p>
+            <a:r>
+              <a:rPr lang="en-US" sz="4800" dirty="0" err="1" smtClean="0">
+                <a:solidFill>
+                  <a:srgbClr val="0070C0"/>
+                </a:solidFill>
+              </a:rPr>
+              <a:t>Mauliate</a:t>
+            </a:r>
+            <a:r>
+              <a:rPr lang="en-US" sz="4800" dirty="0" smtClean="0">
+                <a:solidFill>
+                  <a:srgbClr val="0070C0"/>
+                </a:solidFill>
+              </a:rPr>
+              <a:t> </a:t>
+            </a:r>
+            <a:r>
+              <a:rPr lang="en-US" sz="4800" dirty="0" err="1" smtClean="0">
+                <a:solidFill>
+                  <a:srgbClr val="0070C0"/>
+                </a:solidFill>
+              </a:rPr>
+              <a:t>Godang</a:t>
+            </a:r>
+            <a:endParaRPr lang="en-US" sz="4800" dirty="0">
+              <a:solidFill>
+                <a:srgbClr val="0070C0"/>
+              </a:solidFill>
+            </a:endParaRPr>
+          </a:p>
+        </p:txBody>
+      </p:sp>
+    </p:spTree>
+    <p:extLst>
+      <p:ext uri="{BB962C8B-B14F-4D97-AF65-F5344CB8AC3E}">
+        <p14:creationId xmlns:p14="http://schemas.microsoft.com/office/powerpoint/2010/main" val="1961932074"/>
       </p:ext>
     </p:extLst>
   </p:cSld>
@@ -9280,50 +10940,625 @@
       </p:sp>
       <p:sp>
         <p:nvSpPr>
-          <p:cNvPr id="2" name="Rectangle 1"/>
-          <p:cNvSpPr/>
+          <p:cNvPr id="7" name="Title 1"/>
+          <p:cNvSpPr txBox="1">
+            <a:spLocks/>
+          </p:cNvSpPr>
           <p:nvPr/>
         </p:nvSpPr>
         <p:spPr>
           <a:xfrm>
-            <a:off x="2286000" y="2248585"/>
-            <a:ext cx="4572000" cy="830997"/>
+            <a:off x="7666892" y="154745"/>
+            <a:ext cx="1364566" cy="407963"/>
           </a:xfrm>
           <a:prstGeom prst="rect">
             <a:avLst/>
           </a:prstGeom>
         </p:spPr>
         <p:txBody>
+          <a:bodyPr vert="horz" lIns="91440" tIns="45720" rIns="91440" bIns="45720" rtlCol="0" anchor="ctr">
+            <a:normAutofit/>
+          </a:bodyPr>
+          <a:lstStyle>
+            <a:lvl1pPr algn="l" defTabSz="685800" rtl="0" eaLnBrk="1" latinLnBrk="0" hangingPunct="1">
+              <a:lnSpc>
+                <a:spcPct val="90000"/>
+              </a:lnSpc>
+              <a:spcBef>
+                <a:spcPct val="0"/>
+              </a:spcBef>
+              <a:buNone/>
+              <a:defRPr sz="3300" kern="1200">
+                <a:solidFill>
+                  <a:schemeClr val="tx1"/>
+                </a:solidFill>
+                <a:latin typeface="+mj-lt"/>
+                <a:ea typeface="+mj-ea"/>
+                <a:cs typeface="+mj-cs"/>
+              </a:defRPr>
+            </a:lvl1pPr>
+          </a:lstStyle>
+          <a:p>
+            <a:r>
+              <a:rPr lang="en-US" sz="1200" b="1" dirty="0" smtClean="0">
+                <a:solidFill>
+                  <a:srgbClr val="0070C0"/>
+                </a:solidFill>
+              </a:rPr>
+              <a:t>Cloud providers**</a:t>
+            </a:r>
+            <a:endParaRPr lang="en-US" sz="1200" dirty="0">
+              <a:solidFill>
+                <a:srgbClr val="0070C0"/>
+              </a:solidFill>
+            </a:endParaRPr>
+          </a:p>
+        </p:txBody>
+      </p:sp>
+      <p:sp>
+        <p:nvSpPr>
+          <p:cNvPr id="5" name="Rectangle 4"/>
+          <p:cNvSpPr/>
+          <p:nvPr/>
+        </p:nvSpPr>
+        <p:spPr>
+          <a:xfrm>
+            <a:off x="249382" y="206138"/>
+            <a:ext cx="4572000" cy="646331"/>
+          </a:xfrm>
+          <a:prstGeom prst="rect">
+            <a:avLst/>
+          </a:prstGeom>
+        </p:spPr>
+        <p:txBody>
           <a:bodyPr>
             <a:spAutoFit/>
           </a:bodyPr>
           <a:lstStyle/>
           <a:p>
             <a:r>
-              <a:rPr lang="en-US" sz="4800" dirty="0" err="1" smtClean="0">
+              <a:rPr lang="en-US" b="1" dirty="0"/>
+              <a:t>Creating Virtual Machines on Cloud Platforms: AWS, Azure, and GCP</a:t>
+            </a:r>
+          </a:p>
+        </p:txBody>
+      </p:sp>
+      <p:sp>
+        <p:nvSpPr>
+          <p:cNvPr id="9" name="Rectangle 8"/>
+          <p:cNvSpPr/>
+          <p:nvPr/>
+        </p:nvSpPr>
+        <p:spPr>
+          <a:xfrm>
+            <a:off x="249382" y="736635"/>
+            <a:ext cx="8091054" cy="2862322"/>
+          </a:xfrm>
+          <a:prstGeom prst="rect">
+            <a:avLst/>
+          </a:prstGeom>
+        </p:spPr>
+        <p:txBody>
+          <a:bodyPr wrap="square">
+            <a:spAutoFit/>
+          </a:bodyPr>
+          <a:lstStyle/>
+          <a:p>
+            <a:r>
+              <a:rPr lang="en-US" sz="1200" dirty="0"/>
+              <a:t>AWS (Amazon Web Services)</a:t>
+            </a:r>
+          </a:p>
+          <a:p>
+            <a:r>
+              <a:rPr lang="en-US" sz="1200" dirty="0"/>
+              <a:t>AWS offers a robust and scalable cloud computing environment. The Elastic Compute Cloud (EC2) service is commonly used to create and manage virtual machines.</a:t>
+            </a:r>
+          </a:p>
+          <a:p>
+            <a:endParaRPr lang="en-US" sz="1200" dirty="0"/>
+          </a:p>
+          <a:p>
+            <a:r>
+              <a:rPr lang="en-US" sz="1200" dirty="0"/>
+              <a:t>Step-by-Step Guide to Creating an EC2 Instance</a:t>
+            </a:r>
+          </a:p>
+          <a:p>
+            <a:pPr marL="228600" indent="-228600">
+              <a:buFont typeface="+mj-lt"/>
+              <a:buAutoNum type="arabicPeriod"/>
+            </a:pPr>
+            <a:r>
+              <a:rPr lang="en-US" sz="1200" dirty="0"/>
+              <a:t>Sign in to the AWS Management Console.</a:t>
+            </a:r>
+          </a:p>
+          <a:p>
+            <a:pPr marL="228600" indent="-228600">
+              <a:buFont typeface="+mj-lt"/>
+              <a:buAutoNum type="arabicPeriod"/>
+            </a:pPr>
+            <a:r>
+              <a:rPr lang="en-US" sz="1200" dirty="0"/>
+              <a:t>Navigate to the EC2 Dashboard.</a:t>
+            </a:r>
+          </a:p>
+          <a:p>
+            <a:pPr marL="228600" indent="-228600">
+              <a:buFont typeface="+mj-lt"/>
+              <a:buAutoNum type="arabicPeriod"/>
+            </a:pPr>
+            <a:r>
+              <a:rPr lang="en-US" sz="1200" dirty="0"/>
+              <a:t>Launch Instance</a:t>
+            </a:r>
+            <a:r>
+              <a:rPr lang="en-US" sz="1200" dirty="0" smtClean="0"/>
+              <a:t>:  Click </a:t>
+            </a:r>
+            <a:r>
+              <a:rPr lang="en-US" sz="1200" dirty="0"/>
+              <a:t>on the “Launch Instance” button.</a:t>
+            </a:r>
+          </a:p>
+          <a:p>
+            <a:pPr marL="228600" indent="-228600">
+              <a:buFont typeface="+mj-lt"/>
+              <a:buAutoNum type="arabicPeriod"/>
+            </a:pPr>
+            <a:r>
+              <a:rPr lang="en-US" sz="1200" dirty="0"/>
+              <a:t>Choose an Amazon Machine Image (AMI</a:t>
+            </a:r>
+            <a:r>
+              <a:rPr lang="en-US" sz="1200" dirty="0" smtClean="0"/>
+              <a:t>): Select </a:t>
+            </a:r>
+            <a:r>
+              <a:rPr lang="en-US" sz="1200" dirty="0"/>
+              <a:t>an AMI. For this example, we’ll use the Amazon Linux 2 AMI.</a:t>
+            </a:r>
+          </a:p>
+          <a:p>
+            <a:pPr marL="228600" indent="-228600">
+              <a:buFont typeface="+mj-lt"/>
+              <a:buAutoNum type="arabicPeriod"/>
+            </a:pPr>
+            <a:r>
+              <a:rPr lang="en-US" sz="1200" dirty="0"/>
+              <a:t>Choose an Instance Type</a:t>
+            </a:r>
+            <a:r>
+              <a:rPr lang="en-US" sz="1200" dirty="0" smtClean="0"/>
+              <a:t>: Select </a:t>
+            </a:r>
+            <a:r>
+              <a:rPr lang="en-US" sz="1200" dirty="0"/>
+              <a:t>an instance type. The t2.micro instance is a good choice for beginners.</a:t>
+            </a:r>
+          </a:p>
+          <a:p>
+            <a:pPr marL="228600" indent="-228600">
+              <a:buFont typeface="+mj-lt"/>
+              <a:buAutoNum type="arabicPeriod"/>
+            </a:pPr>
+            <a:r>
+              <a:rPr lang="en-US" sz="1200" dirty="0"/>
+              <a:t>Configure Instance Details</a:t>
+            </a:r>
+            <a:r>
+              <a:rPr lang="en-US" sz="1200" dirty="0" smtClean="0"/>
+              <a:t>: Configure </a:t>
+            </a:r>
+            <a:r>
+              <a:rPr lang="en-US" sz="1200" dirty="0"/>
+              <a:t>settings like the number of instances, network, and IAM role.</a:t>
+            </a:r>
+          </a:p>
+          <a:p>
+            <a:pPr marL="228600" indent="-228600">
+              <a:buFont typeface="+mj-lt"/>
+              <a:buAutoNum type="arabicPeriod"/>
+            </a:pPr>
+            <a:r>
+              <a:rPr lang="en-US" sz="1200" dirty="0"/>
+              <a:t>Add Storage</a:t>
+            </a:r>
+            <a:r>
+              <a:rPr lang="en-US" sz="1200" dirty="0" smtClean="0"/>
+              <a:t>: Specify </a:t>
+            </a:r>
+            <a:r>
+              <a:rPr lang="en-US" sz="1200" dirty="0"/>
+              <a:t>the storage size and type.</a:t>
+            </a:r>
+          </a:p>
+          <a:p>
+            <a:pPr marL="228600" indent="-228600">
+              <a:buFont typeface="+mj-lt"/>
+              <a:buAutoNum type="arabicPeriod"/>
+            </a:pPr>
+            <a:r>
+              <a:rPr lang="en-US" sz="1200" dirty="0"/>
+              <a:t>Add Tags</a:t>
+            </a:r>
+            <a:r>
+              <a:rPr lang="en-US" sz="1200" dirty="0" smtClean="0"/>
+              <a:t>: Add </a:t>
+            </a:r>
+            <a:r>
+              <a:rPr lang="en-US" sz="1200" dirty="0"/>
+              <a:t>tags to organize and manage your instances.</a:t>
+            </a:r>
+          </a:p>
+          <a:p>
+            <a:pPr marL="228600" indent="-228600">
+              <a:buFont typeface="+mj-lt"/>
+              <a:buAutoNum type="arabicPeriod"/>
+            </a:pPr>
+            <a:r>
+              <a:rPr lang="en-US" sz="1200" dirty="0"/>
+              <a:t>Configure Security Group</a:t>
+            </a:r>
+            <a:r>
+              <a:rPr lang="en-US" sz="1200" dirty="0" smtClean="0"/>
+              <a:t>: Configure </a:t>
+            </a:r>
+            <a:r>
+              <a:rPr lang="en-US" sz="1200" dirty="0"/>
+              <a:t>firewall settings to control traffic to your instance.</a:t>
+            </a:r>
+          </a:p>
+          <a:p>
+            <a:pPr marL="228600" indent="-228600">
+              <a:buFont typeface="+mj-lt"/>
+              <a:buAutoNum type="arabicPeriod"/>
+            </a:pPr>
+            <a:r>
+              <a:rPr lang="en-US" sz="1200" dirty="0"/>
+              <a:t>Review and Launch</a:t>
+            </a:r>
+            <a:r>
+              <a:rPr lang="en-US" sz="1200" dirty="0" smtClean="0"/>
+              <a:t>: Review </a:t>
+            </a:r>
+            <a:r>
+              <a:rPr lang="en-US" sz="1200" dirty="0"/>
+              <a:t>your settings and click “Launch”. Choose an existing key pair or create a new one for SSH access.</a:t>
+            </a:r>
+          </a:p>
+        </p:txBody>
+      </p:sp>
+    </p:spTree>
+    <p:extLst>
+      <p:ext uri="{BB962C8B-B14F-4D97-AF65-F5344CB8AC3E}">
+        <p14:creationId xmlns:p14="http://schemas.microsoft.com/office/powerpoint/2010/main" val="3806754534"/>
+      </p:ext>
+    </p:extLst>
+  </p:cSld>
+  <p:clrMapOvr>
+    <a:masterClrMapping/>
+  </p:clrMapOvr>
+  <p:timing>
+    <p:tnLst>
+      <p:par>
+        <p:cTn id="1" dur="indefinite" restart="never" nodeType="tmRoot"/>
+      </p:par>
+    </p:tnLst>
+  </p:timing>
+</p:sld>
+</file>
+
+<file path=ppt/slides/slide8.xml><?xml version="1.0" encoding="utf-8"?>
+<p:sld xmlns:a="http://schemas.openxmlformats.org/drawingml/2006/main" xmlns:r="http://schemas.openxmlformats.org/officeDocument/2006/relationships" xmlns:p="http://schemas.openxmlformats.org/presentationml/2006/main">
+  <p:cSld>
+    <p:spTree>
+      <p:nvGrpSpPr>
+        <p:cNvPr id="1" name=""/>
+        <p:cNvGrpSpPr/>
+        <p:nvPr/>
+      </p:nvGrpSpPr>
+      <p:grpSpPr>
+        <a:xfrm>
+          <a:off x="0" y="0"/>
+          <a:ext cx="0" cy="0"/>
+          <a:chOff x="0" y="0"/>
+          <a:chExt cx="0" cy="0"/>
+        </a:xfrm>
+      </p:grpSpPr>
+      <p:sp>
+        <p:nvSpPr>
+          <p:cNvPr id="4" name="Slide Number Placeholder 3"/>
+          <p:cNvSpPr>
+            <a:spLocks noGrp="1"/>
+          </p:cNvSpPr>
+          <p:nvPr>
+            <p:ph type="sldNum" sz="quarter" idx="12"/>
+          </p:nvPr>
+        </p:nvSpPr>
+        <p:spPr/>
+        <p:txBody>
+          <a:bodyPr/>
+          <a:lstStyle/>
+          <a:p>
+            <a:fld id="{6D22F896-40B5-4ADD-8801-0D06FADFA095}" type="slidenum">
+              <a:rPr lang="en-US" smtClean="0"/>
+              <a:t>8</a:t>
+            </a:fld>
+            <a:endParaRPr lang="en-US" dirty="0"/>
+          </a:p>
+        </p:txBody>
+      </p:sp>
+      <p:sp>
+        <p:nvSpPr>
+          <p:cNvPr id="7" name="Title 1"/>
+          <p:cNvSpPr txBox="1">
+            <a:spLocks/>
+          </p:cNvSpPr>
+          <p:nvPr/>
+        </p:nvSpPr>
+        <p:spPr>
+          <a:xfrm>
+            <a:off x="7666892" y="154745"/>
+            <a:ext cx="1364566" cy="407963"/>
+          </a:xfrm>
+          <a:prstGeom prst="rect">
+            <a:avLst/>
+          </a:prstGeom>
+        </p:spPr>
+        <p:txBody>
+          <a:bodyPr vert="horz" lIns="91440" tIns="45720" rIns="91440" bIns="45720" rtlCol="0" anchor="ctr">
+            <a:normAutofit/>
+          </a:bodyPr>
+          <a:lstStyle>
+            <a:lvl1pPr algn="l" defTabSz="685800" rtl="0" eaLnBrk="1" latinLnBrk="0" hangingPunct="1">
+              <a:lnSpc>
+                <a:spcPct val="90000"/>
+              </a:lnSpc>
+              <a:spcBef>
+                <a:spcPct val="0"/>
+              </a:spcBef>
+              <a:buNone/>
+              <a:defRPr sz="3300" kern="1200">
+                <a:solidFill>
+                  <a:schemeClr val="tx1"/>
+                </a:solidFill>
+                <a:latin typeface="+mj-lt"/>
+                <a:ea typeface="+mj-ea"/>
+                <a:cs typeface="+mj-cs"/>
+              </a:defRPr>
+            </a:lvl1pPr>
+          </a:lstStyle>
+          <a:p>
+            <a:r>
+              <a:rPr lang="en-US" sz="1200" b="1" dirty="0" smtClean="0">
                 <a:solidFill>
                   <a:srgbClr val="0070C0"/>
                 </a:solidFill>
               </a:rPr>
-              <a:t>Mauliate</a:t>
-            </a:r>
-            <a:r>
-              <a:rPr lang="en-US" sz="4800" dirty="0" smtClean="0">
+              <a:t>Cloud providers**</a:t>
+            </a:r>
+            <a:endParaRPr lang="en-US" sz="1200" dirty="0">
+              <a:solidFill>
+                <a:srgbClr val="0070C0"/>
+              </a:solidFill>
+            </a:endParaRPr>
+          </a:p>
+        </p:txBody>
+      </p:sp>
+      <p:sp>
+        <p:nvSpPr>
+          <p:cNvPr id="5" name="Rectangle 4"/>
+          <p:cNvSpPr/>
+          <p:nvPr/>
+        </p:nvSpPr>
+        <p:spPr>
+          <a:xfrm>
+            <a:off x="249382" y="206138"/>
+            <a:ext cx="4572000" cy="646331"/>
+          </a:xfrm>
+          <a:prstGeom prst="rect">
+            <a:avLst/>
+          </a:prstGeom>
+        </p:spPr>
+        <p:txBody>
+          <a:bodyPr>
+            <a:spAutoFit/>
+          </a:bodyPr>
+          <a:lstStyle/>
+          <a:p>
+            <a:r>
+              <a:rPr lang="en-US" b="1" dirty="0"/>
+              <a:t>Creating Virtual Machines on Cloud Platforms: AWS, Azure, and GCP</a:t>
+            </a:r>
+          </a:p>
+        </p:txBody>
+      </p:sp>
+    </p:spTree>
+    <p:extLst>
+      <p:ext uri="{BB962C8B-B14F-4D97-AF65-F5344CB8AC3E}">
+        <p14:creationId xmlns:p14="http://schemas.microsoft.com/office/powerpoint/2010/main" val="2337116584"/>
+      </p:ext>
+    </p:extLst>
+  </p:cSld>
+  <p:clrMapOvr>
+    <a:masterClrMapping/>
+  </p:clrMapOvr>
+  <p:timing>
+    <p:tnLst>
+      <p:par>
+        <p:cTn id="1" dur="indefinite" restart="never" nodeType="tmRoot"/>
+      </p:par>
+    </p:tnLst>
+  </p:timing>
+</p:sld>
+</file>
+
+<file path=ppt/slides/slide9.xml><?xml version="1.0" encoding="utf-8"?>
+<p:sld xmlns:a="http://schemas.openxmlformats.org/drawingml/2006/main" xmlns:r="http://schemas.openxmlformats.org/officeDocument/2006/relationships" xmlns:p="http://schemas.openxmlformats.org/presentationml/2006/main">
+  <p:cSld>
+    <p:spTree>
+      <p:nvGrpSpPr>
+        <p:cNvPr id="1" name=""/>
+        <p:cNvGrpSpPr/>
+        <p:nvPr/>
+      </p:nvGrpSpPr>
+      <p:grpSpPr>
+        <a:xfrm>
+          <a:off x="0" y="0"/>
+          <a:ext cx="0" cy="0"/>
+          <a:chOff x="0" y="0"/>
+          <a:chExt cx="0" cy="0"/>
+        </a:xfrm>
+      </p:grpSpPr>
+      <p:sp>
+        <p:nvSpPr>
+          <p:cNvPr id="2" name="Title 1"/>
+          <p:cNvSpPr>
+            <a:spLocks noGrp="1"/>
+          </p:cNvSpPr>
+          <p:nvPr>
+            <p:ph type="title"/>
+          </p:nvPr>
+        </p:nvSpPr>
+        <p:spPr>
+          <a:xfrm>
+            <a:off x="977833" y="1596207"/>
+            <a:ext cx="7886700" cy="994172"/>
+          </a:xfrm>
+        </p:spPr>
+        <p:txBody>
+          <a:bodyPr>
+            <a:normAutofit/>
+          </a:bodyPr>
+          <a:lstStyle/>
+          <a:p>
+            <a:pPr algn="ctr"/>
+            <a:r>
+              <a:rPr lang="en-US" b="1" dirty="0"/>
+              <a:t>**Amazon Web Services (AWS)**</a:t>
+            </a:r>
+            <a:endParaRPr lang="en-US" dirty="0"/>
+          </a:p>
+        </p:txBody>
+      </p:sp>
+      <p:sp>
+        <p:nvSpPr>
+          <p:cNvPr id="4" name="Slide Number Placeholder 3"/>
+          <p:cNvSpPr>
+            <a:spLocks noGrp="1"/>
+          </p:cNvSpPr>
+          <p:nvPr>
+            <p:ph type="sldNum" sz="quarter" idx="12"/>
+          </p:nvPr>
+        </p:nvSpPr>
+        <p:spPr/>
+        <p:txBody>
+          <a:bodyPr/>
+          <a:lstStyle/>
+          <a:p>
+            <a:fld id="{6D22F896-40B5-4ADD-8801-0D06FADFA095}" type="slidenum">
+              <a:rPr lang="en-US" smtClean="0"/>
+              <a:t>9</a:t>
+            </a:fld>
+            <a:endParaRPr lang="en-US" dirty="0"/>
+          </a:p>
+        </p:txBody>
+      </p:sp>
+      <p:sp>
+        <p:nvSpPr>
+          <p:cNvPr id="3" name="Content Placeholder 2"/>
+          <p:cNvSpPr>
+            <a:spLocks noGrp="1"/>
+          </p:cNvSpPr>
+          <p:nvPr>
+            <p:ph idx="1"/>
+          </p:nvPr>
+        </p:nvSpPr>
+        <p:spPr/>
+        <p:txBody>
+          <a:bodyPr/>
+          <a:lstStyle/>
+          <a:p>
+            <a:endParaRPr lang="en-US" dirty="0"/>
+          </a:p>
+        </p:txBody>
+      </p:sp>
+      <p:pic>
+        <p:nvPicPr>
+          <p:cNvPr id="6" name="Picture 5"/>
+          <p:cNvPicPr>
+            <a:picLocks noChangeAspect="1"/>
+          </p:cNvPicPr>
+          <p:nvPr/>
+        </p:nvPicPr>
+        <p:blipFill>
+          <a:blip r:embed="rId3"/>
+          <a:stretch>
+            <a:fillRect/>
+          </a:stretch>
+        </p:blipFill>
+        <p:spPr>
+          <a:xfrm>
+            <a:off x="5531241" y="2638343"/>
+            <a:ext cx="2984109" cy="1994380"/>
+          </a:xfrm>
+          <a:prstGeom prst="rect">
+            <a:avLst/>
+          </a:prstGeom>
+        </p:spPr>
+      </p:pic>
+      <p:sp>
+        <p:nvSpPr>
+          <p:cNvPr id="7" name="Title 1"/>
+          <p:cNvSpPr txBox="1">
+            <a:spLocks/>
+          </p:cNvSpPr>
+          <p:nvPr/>
+        </p:nvSpPr>
+        <p:spPr>
+          <a:xfrm>
+            <a:off x="7666892" y="154745"/>
+            <a:ext cx="1364566" cy="407963"/>
+          </a:xfrm>
+          <a:prstGeom prst="rect">
+            <a:avLst/>
+          </a:prstGeom>
+        </p:spPr>
+        <p:txBody>
+          <a:bodyPr vert="horz" lIns="91440" tIns="45720" rIns="91440" bIns="45720" rtlCol="0" anchor="ctr">
+            <a:normAutofit/>
+          </a:bodyPr>
+          <a:lstStyle>
+            <a:lvl1pPr algn="l" defTabSz="685800" rtl="0" eaLnBrk="1" latinLnBrk="0" hangingPunct="1">
+              <a:lnSpc>
+                <a:spcPct val="90000"/>
+              </a:lnSpc>
+              <a:spcBef>
+                <a:spcPct val="0"/>
+              </a:spcBef>
+              <a:buNone/>
+              <a:defRPr sz="3300" kern="1200">
+                <a:solidFill>
+                  <a:schemeClr val="tx1"/>
+                </a:solidFill>
+                <a:latin typeface="+mj-lt"/>
+                <a:ea typeface="+mj-ea"/>
+                <a:cs typeface="+mj-cs"/>
+              </a:defRPr>
+            </a:lvl1pPr>
+          </a:lstStyle>
+          <a:p>
+            <a:r>
+              <a:rPr lang="en-US" sz="1200" b="1" dirty="0" smtClean="0">
                 <a:solidFill>
                   <a:srgbClr val="0070C0"/>
                 </a:solidFill>
               </a:rPr>
-              <a:t> </a:t>
-            </a:r>
-            <a:r>
-              <a:rPr lang="en-US" sz="4800" dirty="0" err="1" smtClean="0">
-                <a:solidFill>
-                  <a:srgbClr val="0070C0"/>
-                </a:solidFill>
-              </a:rPr>
-              <a:t>Godang</a:t>
-            </a:r>
-            <a:endParaRPr lang="en-US" sz="4800" dirty="0">
+              <a:t>Cloud providers**</a:t>
+            </a:r>
+            <a:endParaRPr lang="en-US" sz="1200" dirty="0">
               <a:solidFill>
                 <a:srgbClr val="0070C0"/>
               </a:solidFill>
@@ -9334,7 +11569,7 @@
     </p:spTree>
     <p:extLst>
       <p:ext uri="{BB962C8B-B14F-4D97-AF65-F5344CB8AC3E}">
-        <p14:creationId xmlns:p14="http://schemas.microsoft.com/office/powerpoint/2010/main" val="1961932074"/>
+        <p14:creationId xmlns:p14="http://schemas.microsoft.com/office/powerpoint/2010/main" val="3157119036"/>
       </p:ext>
     </p:extLst>
   </p:cSld>

--- a/Cource_LAB_AWS_3_AWS-cloud-platform.pptx
+++ b/Cource_LAB_AWS_3_AWS-cloud-platform.pptx
@@ -5,7 +5,7 @@
     <p:sldMasterId id="2147483689" r:id="rId1"/>
   </p:sldMasterIdLst>
   <p:notesMasterIdLst>
-    <p:notesMasterId r:id="rId13"/>
+    <p:notesMasterId r:id="rId17"/>
   </p:notesMasterIdLst>
   <p:sldIdLst>
     <p:sldId id="348" r:id="rId2"/>
@@ -18,7 +18,11 @@
     <p:sldId id="424" r:id="rId9"/>
     <p:sldId id="422" r:id="rId10"/>
     <p:sldId id="423" r:id="rId11"/>
-    <p:sldId id="350" r:id="rId12"/>
+    <p:sldId id="425" r:id="rId12"/>
+    <p:sldId id="427" r:id="rId13"/>
+    <p:sldId id="426" r:id="rId14"/>
+    <p:sldId id="428" r:id="rId15"/>
+    <p:sldId id="350" r:id="rId16"/>
   </p:sldIdLst>
   <p:sldSz cx="9144000" cy="5143500" type="screen16x9"/>
   <p:notesSz cx="7010400" cy="9296400"/>
@@ -1627,6 +1631,1322 @@
 </p:notes>
 </file>
 
+<file path=ppt/notesSlides/notesSlide10.xml><?xml version="1.0" encoding="utf-8"?>
+<p:notes xmlns:a="http://schemas.openxmlformats.org/drawingml/2006/main" xmlns:r="http://schemas.openxmlformats.org/officeDocument/2006/relationships" xmlns:p="http://schemas.openxmlformats.org/presentationml/2006/main">
+  <p:cSld>
+    <p:spTree>
+      <p:nvGrpSpPr>
+        <p:cNvPr id="1" name=""/>
+        <p:cNvGrpSpPr/>
+        <p:nvPr/>
+      </p:nvGrpSpPr>
+      <p:grpSpPr>
+        <a:xfrm>
+          <a:off x="0" y="0"/>
+          <a:ext cx="0" cy="0"/>
+          <a:chOff x="0" y="0"/>
+          <a:chExt cx="0" cy="0"/>
+        </a:xfrm>
+      </p:grpSpPr>
+      <p:sp>
+        <p:nvSpPr>
+          <p:cNvPr id="2" name="Slide Image Placeholder 1"/>
+          <p:cNvSpPr>
+            <a:spLocks noGrp="1" noRot="1" noChangeAspect="1"/>
+          </p:cNvSpPr>
+          <p:nvPr>
+            <p:ph type="sldImg"/>
+          </p:nvPr>
+        </p:nvSpPr>
+        <p:spPr>
+          <a:xfrm>
+            <a:off x="406400" y="696913"/>
+            <a:ext cx="6196013" cy="3486150"/>
+          </a:xfrm>
+        </p:spPr>
+      </p:sp>
+      <p:sp>
+        <p:nvSpPr>
+          <p:cNvPr id="3" name="Notes Placeholder 2"/>
+          <p:cNvSpPr>
+            <a:spLocks noGrp="1"/>
+          </p:cNvSpPr>
+          <p:nvPr>
+            <p:ph type="body" idx="1"/>
+          </p:nvPr>
+        </p:nvSpPr>
+        <p:spPr/>
+        <p:txBody>
+          <a:bodyPr/>
+          <a:lstStyle/>
+          <a:p>
+            <a:r>
+              <a:rPr lang="en-US" dirty="0" smtClean="0"/>
+              <a:t>https://docs.ultralytics.com/yolov5/environments/aws_quickstart_tutorial/</a:t>
+            </a:r>
+            <a:endParaRPr lang="en-US" dirty="0"/>
+          </a:p>
+        </p:txBody>
+      </p:sp>
+      <p:sp>
+        <p:nvSpPr>
+          <p:cNvPr id="4" name="Slide Number Placeholder 3"/>
+          <p:cNvSpPr>
+            <a:spLocks noGrp="1"/>
+          </p:cNvSpPr>
+          <p:nvPr>
+            <p:ph type="sldNum" idx="10"/>
+          </p:nvPr>
+        </p:nvSpPr>
+        <p:spPr/>
+        <p:txBody>
+          <a:bodyPr/>
+          <a:lstStyle/>
+          <a:p>
+            <a:pPr marL="0" marR="0" lvl="0" indent="0" algn="r" rtl="0">
+              <a:lnSpc>
+                <a:spcPct val="100000"/>
+              </a:lnSpc>
+              <a:spcBef>
+                <a:spcPts val="0"/>
+              </a:spcBef>
+              <a:spcAft>
+                <a:spcPts val="0"/>
+              </a:spcAft>
+              <a:buClr>
+                <a:srgbClr val="000000"/>
+              </a:buClr>
+              <a:buFont typeface="Arial"/>
+              <a:buNone/>
+            </a:pPr>
+            <a:endParaRPr lang="en-US" sz="1200" b="0" i="0" u="none" strike="noStrike" cap="none" smtClean="0">
+              <a:solidFill>
+                <a:srgbClr val="000000"/>
+              </a:solidFill>
+              <a:latin typeface="Arial"/>
+              <a:ea typeface="Arial"/>
+              <a:cs typeface="Arial"/>
+              <a:sym typeface="Arial"/>
+            </a:endParaRPr>
+          </a:p>
+          <a:p>
+            <a:pPr marL="0" marR="0" lvl="1" indent="0" algn="l" rtl="0">
+              <a:lnSpc>
+                <a:spcPct val="100000"/>
+              </a:lnSpc>
+              <a:spcBef>
+                <a:spcPts val="0"/>
+              </a:spcBef>
+              <a:spcAft>
+                <a:spcPts val="0"/>
+              </a:spcAft>
+              <a:buClr>
+                <a:srgbClr val="000000"/>
+              </a:buClr>
+              <a:buFont typeface="Arial"/>
+              <a:buNone/>
+            </a:pPr>
+            <a:endParaRPr lang="en-US" sz="1400" b="0" i="0" u="none" strike="noStrike" cap="none" smtClean="0">
+              <a:solidFill>
+                <a:srgbClr val="000000"/>
+              </a:solidFill>
+              <a:latin typeface="Arial"/>
+              <a:ea typeface="Arial"/>
+              <a:cs typeface="Arial"/>
+              <a:sym typeface="Arial"/>
+            </a:endParaRPr>
+          </a:p>
+          <a:p>
+            <a:pPr marL="0" marR="0" lvl="2" indent="0" algn="l" rtl="0">
+              <a:lnSpc>
+                <a:spcPct val="100000"/>
+              </a:lnSpc>
+              <a:spcBef>
+                <a:spcPts val="0"/>
+              </a:spcBef>
+              <a:spcAft>
+                <a:spcPts val="0"/>
+              </a:spcAft>
+              <a:buClr>
+                <a:srgbClr val="000000"/>
+              </a:buClr>
+              <a:buFont typeface="Arial"/>
+              <a:buNone/>
+            </a:pPr>
+            <a:endParaRPr lang="en-US" sz="1400" b="0" i="0" u="none" strike="noStrike" cap="none" smtClean="0">
+              <a:solidFill>
+                <a:srgbClr val="000000"/>
+              </a:solidFill>
+              <a:latin typeface="Arial"/>
+              <a:ea typeface="Arial"/>
+              <a:cs typeface="Arial"/>
+              <a:sym typeface="Arial"/>
+            </a:endParaRPr>
+          </a:p>
+          <a:p>
+            <a:pPr marL="0" marR="0" lvl="3" indent="0" algn="l" rtl="0">
+              <a:lnSpc>
+                <a:spcPct val="100000"/>
+              </a:lnSpc>
+              <a:spcBef>
+                <a:spcPts val="0"/>
+              </a:spcBef>
+              <a:spcAft>
+                <a:spcPts val="0"/>
+              </a:spcAft>
+              <a:buClr>
+                <a:srgbClr val="000000"/>
+              </a:buClr>
+              <a:buFont typeface="Arial"/>
+              <a:buNone/>
+            </a:pPr>
+            <a:endParaRPr lang="en-US" sz="1400" b="0" i="0" u="none" strike="noStrike" cap="none" smtClean="0">
+              <a:solidFill>
+                <a:srgbClr val="000000"/>
+              </a:solidFill>
+              <a:latin typeface="Arial"/>
+              <a:ea typeface="Arial"/>
+              <a:cs typeface="Arial"/>
+              <a:sym typeface="Arial"/>
+            </a:endParaRPr>
+          </a:p>
+          <a:p>
+            <a:pPr marL="0" marR="0" lvl="4" indent="0" algn="l" rtl="0">
+              <a:lnSpc>
+                <a:spcPct val="100000"/>
+              </a:lnSpc>
+              <a:spcBef>
+                <a:spcPts val="0"/>
+              </a:spcBef>
+              <a:spcAft>
+                <a:spcPts val="0"/>
+              </a:spcAft>
+              <a:buClr>
+                <a:srgbClr val="000000"/>
+              </a:buClr>
+              <a:buFont typeface="Arial"/>
+              <a:buNone/>
+            </a:pPr>
+            <a:endParaRPr lang="en-US" sz="1400" b="0" i="0" u="none" strike="noStrike" cap="none" smtClean="0">
+              <a:solidFill>
+                <a:srgbClr val="000000"/>
+              </a:solidFill>
+              <a:latin typeface="Arial"/>
+              <a:ea typeface="Arial"/>
+              <a:cs typeface="Arial"/>
+              <a:sym typeface="Arial"/>
+            </a:endParaRPr>
+          </a:p>
+          <a:p>
+            <a:pPr marL="0" marR="0" lvl="5" indent="0" algn="l" rtl="0">
+              <a:lnSpc>
+                <a:spcPct val="100000"/>
+              </a:lnSpc>
+              <a:spcBef>
+                <a:spcPts val="0"/>
+              </a:spcBef>
+              <a:spcAft>
+                <a:spcPts val="0"/>
+              </a:spcAft>
+              <a:buClr>
+                <a:srgbClr val="000000"/>
+              </a:buClr>
+              <a:buFont typeface="Arial"/>
+              <a:buNone/>
+            </a:pPr>
+            <a:endParaRPr lang="en-US" sz="1400" b="0" i="0" u="none" strike="noStrike" cap="none" smtClean="0">
+              <a:solidFill>
+                <a:srgbClr val="000000"/>
+              </a:solidFill>
+              <a:latin typeface="Arial"/>
+              <a:ea typeface="Arial"/>
+              <a:cs typeface="Arial"/>
+              <a:sym typeface="Arial"/>
+            </a:endParaRPr>
+          </a:p>
+          <a:p>
+            <a:pPr marL="0" marR="0" lvl="6" indent="0" algn="l" rtl="0">
+              <a:lnSpc>
+                <a:spcPct val="100000"/>
+              </a:lnSpc>
+              <a:spcBef>
+                <a:spcPts val="0"/>
+              </a:spcBef>
+              <a:spcAft>
+                <a:spcPts val="0"/>
+              </a:spcAft>
+              <a:buClr>
+                <a:srgbClr val="000000"/>
+              </a:buClr>
+              <a:buFont typeface="Arial"/>
+              <a:buNone/>
+            </a:pPr>
+            <a:endParaRPr lang="en-US" sz="1400" b="0" i="0" u="none" strike="noStrike" cap="none" smtClean="0">
+              <a:solidFill>
+                <a:srgbClr val="000000"/>
+              </a:solidFill>
+              <a:latin typeface="Arial"/>
+              <a:ea typeface="Arial"/>
+              <a:cs typeface="Arial"/>
+              <a:sym typeface="Arial"/>
+            </a:endParaRPr>
+          </a:p>
+          <a:p>
+            <a:pPr marL="0" marR="0" lvl="7" indent="0" algn="l" rtl="0">
+              <a:lnSpc>
+                <a:spcPct val="100000"/>
+              </a:lnSpc>
+              <a:spcBef>
+                <a:spcPts val="0"/>
+              </a:spcBef>
+              <a:spcAft>
+                <a:spcPts val="0"/>
+              </a:spcAft>
+              <a:buClr>
+                <a:srgbClr val="000000"/>
+              </a:buClr>
+              <a:buFont typeface="Arial"/>
+              <a:buNone/>
+            </a:pPr>
+            <a:endParaRPr lang="en-US" sz="1400" b="0" i="0" u="none" strike="noStrike" cap="none" smtClean="0">
+              <a:solidFill>
+                <a:srgbClr val="000000"/>
+              </a:solidFill>
+              <a:latin typeface="Arial"/>
+              <a:ea typeface="Arial"/>
+              <a:cs typeface="Arial"/>
+              <a:sym typeface="Arial"/>
+            </a:endParaRPr>
+          </a:p>
+          <a:p>
+            <a:pPr marL="0" marR="0" lvl="8" indent="0" algn="l" rtl="0">
+              <a:lnSpc>
+                <a:spcPct val="100000"/>
+              </a:lnSpc>
+              <a:spcBef>
+                <a:spcPts val="0"/>
+              </a:spcBef>
+              <a:spcAft>
+                <a:spcPts val="0"/>
+              </a:spcAft>
+              <a:buClr>
+                <a:srgbClr val="000000"/>
+              </a:buClr>
+              <a:buFont typeface="Arial"/>
+              <a:buNone/>
+            </a:pPr>
+            <a:endParaRPr lang="en-US" sz="1400" b="0" i="0" u="none" strike="noStrike" cap="none">
+              <a:solidFill>
+                <a:srgbClr val="000000"/>
+              </a:solidFill>
+              <a:latin typeface="Arial"/>
+              <a:ea typeface="Arial"/>
+              <a:cs typeface="Arial"/>
+              <a:sym typeface="Arial"/>
+            </a:endParaRPr>
+          </a:p>
+        </p:txBody>
+      </p:sp>
+    </p:spTree>
+    <p:extLst>
+      <p:ext uri="{BB962C8B-B14F-4D97-AF65-F5344CB8AC3E}">
+        <p14:creationId xmlns:p14="http://schemas.microsoft.com/office/powerpoint/2010/main" val="286381343"/>
+      </p:ext>
+    </p:extLst>
+  </p:cSld>
+  <p:clrMapOvr>
+    <a:masterClrMapping/>
+  </p:clrMapOvr>
+</p:notes>
+</file>
+
+<file path=ppt/notesSlides/notesSlide11.xml><?xml version="1.0" encoding="utf-8"?>
+<p:notes xmlns:a="http://schemas.openxmlformats.org/drawingml/2006/main" xmlns:r="http://schemas.openxmlformats.org/officeDocument/2006/relationships" xmlns:p="http://schemas.openxmlformats.org/presentationml/2006/main">
+  <p:cSld>
+    <p:spTree>
+      <p:nvGrpSpPr>
+        <p:cNvPr id="1" name=""/>
+        <p:cNvGrpSpPr/>
+        <p:nvPr/>
+      </p:nvGrpSpPr>
+      <p:grpSpPr>
+        <a:xfrm>
+          <a:off x="0" y="0"/>
+          <a:ext cx="0" cy="0"/>
+          <a:chOff x="0" y="0"/>
+          <a:chExt cx="0" cy="0"/>
+        </a:xfrm>
+      </p:grpSpPr>
+      <p:sp>
+        <p:nvSpPr>
+          <p:cNvPr id="2" name="Slide Image Placeholder 1"/>
+          <p:cNvSpPr>
+            <a:spLocks noGrp="1" noRot="1" noChangeAspect="1"/>
+          </p:cNvSpPr>
+          <p:nvPr>
+            <p:ph type="sldImg"/>
+          </p:nvPr>
+        </p:nvSpPr>
+        <p:spPr>
+          <a:xfrm>
+            <a:off x="406400" y="696913"/>
+            <a:ext cx="6196013" cy="3486150"/>
+          </a:xfrm>
+        </p:spPr>
+      </p:sp>
+      <p:sp>
+        <p:nvSpPr>
+          <p:cNvPr id="3" name="Notes Placeholder 2"/>
+          <p:cNvSpPr>
+            <a:spLocks noGrp="1"/>
+          </p:cNvSpPr>
+          <p:nvPr>
+            <p:ph type="body" idx="1"/>
+          </p:nvPr>
+        </p:nvSpPr>
+        <p:spPr/>
+        <p:txBody>
+          <a:bodyPr/>
+          <a:lstStyle/>
+          <a:p>
+            <a:r>
+              <a:rPr lang="en-US" dirty="0" smtClean="0"/>
+              <a:t>https://docs.ultralytics.com/yolov5/environments/aws_quickstart_tutorial/</a:t>
+            </a:r>
+            <a:endParaRPr lang="en-US" dirty="0"/>
+          </a:p>
+        </p:txBody>
+      </p:sp>
+      <p:sp>
+        <p:nvSpPr>
+          <p:cNvPr id="4" name="Slide Number Placeholder 3"/>
+          <p:cNvSpPr>
+            <a:spLocks noGrp="1"/>
+          </p:cNvSpPr>
+          <p:nvPr>
+            <p:ph type="sldNum" idx="10"/>
+          </p:nvPr>
+        </p:nvSpPr>
+        <p:spPr/>
+        <p:txBody>
+          <a:bodyPr/>
+          <a:lstStyle/>
+          <a:p>
+            <a:pPr marL="0" marR="0" lvl="0" indent="0" algn="r" rtl="0">
+              <a:lnSpc>
+                <a:spcPct val="100000"/>
+              </a:lnSpc>
+              <a:spcBef>
+                <a:spcPts val="0"/>
+              </a:spcBef>
+              <a:spcAft>
+                <a:spcPts val="0"/>
+              </a:spcAft>
+              <a:buClr>
+                <a:srgbClr val="000000"/>
+              </a:buClr>
+              <a:buFont typeface="Arial"/>
+              <a:buNone/>
+            </a:pPr>
+            <a:endParaRPr lang="en-US" sz="1200" b="0" i="0" u="none" strike="noStrike" cap="none" smtClean="0">
+              <a:solidFill>
+                <a:srgbClr val="000000"/>
+              </a:solidFill>
+              <a:latin typeface="Arial"/>
+              <a:ea typeface="Arial"/>
+              <a:cs typeface="Arial"/>
+              <a:sym typeface="Arial"/>
+            </a:endParaRPr>
+          </a:p>
+          <a:p>
+            <a:pPr marL="0" marR="0" lvl="1" indent="0" algn="l" rtl="0">
+              <a:lnSpc>
+                <a:spcPct val="100000"/>
+              </a:lnSpc>
+              <a:spcBef>
+                <a:spcPts val="0"/>
+              </a:spcBef>
+              <a:spcAft>
+                <a:spcPts val="0"/>
+              </a:spcAft>
+              <a:buClr>
+                <a:srgbClr val="000000"/>
+              </a:buClr>
+              <a:buFont typeface="Arial"/>
+              <a:buNone/>
+            </a:pPr>
+            <a:endParaRPr lang="en-US" sz="1400" b="0" i="0" u="none" strike="noStrike" cap="none" smtClean="0">
+              <a:solidFill>
+                <a:srgbClr val="000000"/>
+              </a:solidFill>
+              <a:latin typeface="Arial"/>
+              <a:ea typeface="Arial"/>
+              <a:cs typeface="Arial"/>
+              <a:sym typeface="Arial"/>
+            </a:endParaRPr>
+          </a:p>
+          <a:p>
+            <a:pPr marL="0" marR="0" lvl="2" indent="0" algn="l" rtl="0">
+              <a:lnSpc>
+                <a:spcPct val="100000"/>
+              </a:lnSpc>
+              <a:spcBef>
+                <a:spcPts val="0"/>
+              </a:spcBef>
+              <a:spcAft>
+                <a:spcPts val="0"/>
+              </a:spcAft>
+              <a:buClr>
+                <a:srgbClr val="000000"/>
+              </a:buClr>
+              <a:buFont typeface="Arial"/>
+              <a:buNone/>
+            </a:pPr>
+            <a:endParaRPr lang="en-US" sz="1400" b="0" i="0" u="none" strike="noStrike" cap="none" smtClean="0">
+              <a:solidFill>
+                <a:srgbClr val="000000"/>
+              </a:solidFill>
+              <a:latin typeface="Arial"/>
+              <a:ea typeface="Arial"/>
+              <a:cs typeface="Arial"/>
+              <a:sym typeface="Arial"/>
+            </a:endParaRPr>
+          </a:p>
+          <a:p>
+            <a:pPr marL="0" marR="0" lvl="3" indent="0" algn="l" rtl="0">
+              <a:lnSpc>
+                <a:spcPct val="100000"/>
+              </a:lnSpc>
+              <a:spcBef>
+                <a:spcPts val="0"/>
+              </a:spcBef>
+              <a:spcAft>
+                <a:spcPts val="0"/>
+              </a:spcAft>
+              <a:buClr>
+                <a:srgbClr val="000000"/>
+              </a:buClr>
+              <a:buFont typeface="Arial"/>
+              <a:buNone/>
+            </a:pPr>
+            <a:endParaRPr lang="en-US" sz="1400" b="0" i="0" u="none" strike="noStrike" cap="none" smtClean="0">
+              <a:solidFill>
+                <a:srgbClr val="000000"/>
+              </a:solidFill>
+              <a:latin typeface="Arial"/>
+              <a:ea typeface="Arial"/>
+              <a:cs typeface="Arial"/>
+              <a:sym typeface="Arial"/>
+            </a:endParaRPr>
+          </a:p>
+          <a:p>
+            <a:pPr marL="0" marR="0" lvl="4" indent="0" algn="l" rtl="0">
+              <a:lnSpc>
+                <a:spcPct val="100000"/>
+              </a:lnSpc>
+              <a:spcBef>
+                <a:spcPts val="0"/>
+              </a:spcBef>
+              <a:spcAft>
+                <a:spcPts val="0"/>
+              </a:spcAft>
+              <a:buClr>
+                <a:srgbClr val="000000"/>
+              </a:buClr>
+              <a:buFont typeface="Arial"/>
+              <a:buNone/>
+            </a:pPr>
+            <a:endParaRPr lang="en-US" sz="1400" b="0" i="0" u="none" strike="noStrike" cap="none" smtClean="0">
+              <a:solidFill>
+                <a:srgbClr val="000000"/>
+              </a:solidFill>
+              <a:latin typeface="Arial"/>
+              <a:ea typeface="Arial"/>
+              <a:cs typeface="Arial"/>
+              <a:sym typeface="Arial"/>
+            </a:endParaRPr>
+          </a:p>
+          <a:p>
+            <a:pPr marL="0" marR="0" lvl="5" indent="0" algn="l" rtl="0">
+              <a:lnSpc>
+                <a:spcPct val="100000"/>
+              </a:lnSpc>
+              <a:spcBef>
+                <a:spcPts val="0"/>
+              </a:spcBef>
+              <a:spcAft>
+                <a:spcPts val="0"/>
+              </a:spcAft>
+              <a:buClr>
+                <a:srgbClr val="000000"/>
+              </a:buClr>
+              <a:buFont typeface="Arial"/>
+              <a:buNone/>
+            </a:pPr>
+            <a:endParaRPr lang="en-US" sz="1400" b="0" i="0" u="none" strike="noStrike" cap="none" smtClean="0">
+              <a:solidFill>
+                <a:srgbClr val="000000"/>
+              </a:solidFill>
+              <a:latin typeface="Arial"/>
+              <a:ea typeface="Arial"/>
+              <a:cs typeface="Arial"/>
+              <a:sym typeface="Arial"/>
+            </a:endParaRPr>
+          </a:p>
+          <a:p>
+            <a:pPr marL="0" marR="0" lvl="6" indent="0" algn="l" rtl="0">
+              <a:lnSpc>
+                <a:spcPct val="100000"/>
+              </a:lnSpc>
+              <a:spcBef>
+                <a:spcPts val="0"/>
+              </a:spcBef>
+              <a:spcAft>
+                <a:spcPts val="0"/>
+              </a:spcAft>
+              <a:buClr>
+                <a:srgbClr val="000000"/>
+              </a:buClr>
+              <a:buFont typeface="Arial"/>
+              <a:buNone/>
+            </a:pPr>
+            <a:endParaRPr lang="en-US" sz="1400" b="0" i="0" u="none" strike="noStrike" cap="none" smtClean="0">
+              <a:solidFill>
+                <a:srgbClr val="000000"/>
+              </a:solidFill>
+              <a:latin typeface="Arial"/>
+              <a:ea typeface="Arial"/>
+              <a:cs typeface="Arial"/>
+              <a:sym typeface="Arial"/>
+            </a:endParaRPr>
+          </a:p>
+          <a:p>
+            <a:pPr marL="0" marR="0" lvl="7" indent="0" algn="l" rtl="0">
+              <a:lnSpc>
+                <a:spcPct val="100000"/>
+              </a:lnSpc>
+              <a:spcBef>
+                <a:spcPts val="0"/>
+              </a:spcBef>
+              <a:spcAft>
+                <a:spcPts val="0"/>
+              </a:spcAft>
+              <a:buClr>
+                <a:srgbClr val="000000"/>
+              </a:buClr>
+              <a:buFont typeface="Arial"/>
+              <a:buNone/>
+            </a:pPr>
+            <a:endParaRPr lang="en-US" sz="1400" b="0" i="0" u="none" strike="noStrike" cap="none" smtClean="0">
+              <a:solidFill>
+                <a:srgbClr val="000000"/>
+              </a:solidFill>
+              <a:latin typeface="Arial"/>
+              <a:ea typeface="Arial"/>
+              <a:cs typeface="Arial"/>
+              <a:sym typeface="Arial"/>
+            </a:endParaRPr>
+          </a:p>
+          <a:p>
+            <a:pPr marL="0" marR="0" lvl="8" indent="0" algn="l" rtl="0">
+              <a:lnSpc>
+                <a:spcPct val="100000"/>
+              </a:lnSpc>
+              <a:spcBef>
+                <a:spcPts val="0"/>
+              </a:spcBef>
+              <a:spcAft>
+                <a:spcPts val="0"/>
+              </a:spcAft>
+              <a:buClr>
+                <a:srgbClr val="000000"/>
+              </a:buClr>
+              <a:buFont typeface="Arial"/>
+              <a:buNone/>
+            </a:pPr>
+            <a:endParaRPr lang="en-US" sz="1400" b="0" i="0" u="none" strike="noStrike" cap="none">
+              <a:solidFill>
+                <a:srgbClr val="000000"/>
+              </a:solidFill>
+              <a:latin typeface="Arial"/>
+              <a:ea typeface="Arial"/>
+              <a:cs typeface="Arial"/>
+              <a:sym typeface="Arial"/>
+            </a:endParaRPr>
+          </a:p>
+        </p:txBody>
+      </p:sp>
+    </p:spTree>
+    <p:extLst>
+      <p:ext uri="{BB962C8B-B14F-4D97-AF65-F5344CB8AC3E}">
+        <p14:creationId xmlns:p14="http://schemas.microsoft.com/office/powerpoint/2010/main" val="1534187738"/>
+      </p:ext>
+    </p:extLst>
+  </p:cSld>
+  <p:clrMapOvr>
+    <a:masterClrMapping/>
+  </p:clrMapOvr>
+</p:notes>
+</file>
+
+<file path=ppt/notesSlides/notesSlide12.xml><?xml version="1.0" encoding="utf-8"?>
+<p:notes xmlns:a="http://schemas.openxmlformats.org/drawingml/2006/main" xmlns:r="http://schemas.openxmlformats.org/officeDocument/2006/relationships" xmlns:p="http://schemas.openxmlformats.org/presentationml/2006/main">
+  <p:cSld>
+    <p:spTree>
+      <p:nvGrpSpPr>
+        <p:cNvPr id="1" name=""/>
+        <p:cNvGrpSpPr/>
+        <p:nvPr/>
+      </p:nvGrpSpPr>
+      <p:grpSpPr>
+        <a:xfrm>
+          <a:off x="0" y="0"/>
+          <a:ext cx="0" cy="0"/>
+          <a:chOff x="0" y="0"/>
+          <a:chExt cx="0" cy="0"/>
+        </a:xfrm>
+      </p:grpSpPr>
+      <p:sp>
+        <p:nvSpPr>
+          <p:cNvPr id="2" name="Slide Image Placeholder 1"/>
+          <p:cNvSpPr>
+            <a:spLocks noGrp="1" noRot="1" noChangeAspect="1"/>
+          </p:cNvSpPr>
+          <p:nvPr>
+            <p:ph type="sldImg"/>
+          </p:nvPr>
+        </p:nvSpPr>
+        <p:spPr>
+          <a:xfrm>
+            <a:off x="406400" y="696913"/>
+            <a:ext cx="6196013" cy="3486150"/>
+          </a:xfrm>
+        </p:spPr>
+      </p:sp>
+      <p:sp>
+        <p:nvSpPr>
+          <p:cNvPr id="3" name="Notes Placeholder 2"/>
+          <p:cNvSpPr>
+            <a:spLocks noGrp="1"/>
+          </p:cNvSpPr>
+          <p:nvPr>
+            <p:ph type="body" idx="1"/>
+          </p:nvPr>
+        </p:nvSpPr>
+        <p:spPr/>
+        <p:txBody>
+          <a:bodyPr/>
+          <a:lstStyle/>
+          <a:p>
+            <a:r>
+              <a:rPr lang="en-US" dirty="0" smtClean="0"/>
+              <a:t>https://docs.ultralytics.com/yolov5/environments/aws_quickstart_tutorial/</a:t>
+            </a:r>
+            <a:endParaRPr lang="en-US" dirty="0"/>
+          </a:p>
+        </p:txBody>
+      </p:sp>
+      <p:sp>
+        <p:nvSpPr>
+          <p:cNvPr id="4" name="Slide Number Placeholder 3"/>
+          <p:cNvSpPr>
+            <a:spLocks noGrp="1"/>
+          </p:cNvSpPr>
+          <p:nvPr>
+            <p:ph type="sldNum" idx="10"/>
+          </p:nvPr>
+        </p:nvSpPr>
+        <p:spPr/>
+        <p:txBody>
+          <a:bodyPr/>
+          <a:lstStyle/>
+          <a:p>
+            <a:pPr marL="0" marR="0" lvl="0" indent="0" algn="r" rtl="0">
+              <a:lnSpc>
+                <a:spcPct val="100000"/>
+              </a:lnSpc>
+              <a:spcBef>
+                <a:spcPts val="0"/>
+              </a:spcBef>
+              <a:spcAft>
+                <a:spcPts val="0"/>
+              </a:spcAft>
+              <a:buClr>
+                <a:srgbClr val="000000"/>
+              </a:buClr>
+              <a:buFont typeface="Arial"/>
+              <a:buNone/>
+            </a:pPr>
+            <a:endParaRPr lang="en-US" sz="1200" b="0" i="0" u="none" strike="noStrike" cap="none" smtClean="0">
+              <a:solidFill>
+                <a:srgbClr val="000000"/>
+              </a:solidFill>
+              <a:latin typeface="Arial"/>
+              <a:ea typeface="Arial"/>
+              <a:cs typeface="Arial"/>
+              <a:sym typeface="Arial"/>
+            </a:endParaRPr>
+          </a:p>
+          <a:p>
+            <a:pPr marL="0" marR="0" lvl="1" indent="0" algn="l" rtl="0">
+              <a:lnSpc>
+                <a:spcPct val="100000"/>
+              </a:lnSpc>
+              <a:spcBef>
+                <a:spcPts val="0"/>
+              </a:spcBef>
+              <a:spcAft>
+                <a:spcPts val="0"/>
+              </a:spcAft>
+              <a:buClr>
+                <a:srgbClr val="000000"/>
+              </a:buClr>
+              <a:buFont typeface="Arial"/>
+              <a:buNone/>
+            </a:pPr>
+            <a:endParaRPr lang="en-US" sz="1400" b="0" i="0" u="none" strike="noStrike" cap="none" smtClean="0">
+              <a:solidFill>
+                <a:srgbClr val="000000"/>
+              </a:solidFill>
+              <a:latin typeface="Arial"/>
+              <a:ea typeface="Arial"/>
+              <a:cs typeface="Arial"/>
+              <a:sym typeface="Arial"/>
+            </a:endParaRPr>
+          </a:p>
+          <a:p>
+            <a:pPr marL="0" marR="0" lvl="2" indent="0" algn="l" rtl="0">
+              <a:lnSpc>
+                <a:spcPct val="100000"/>
+              </a:lnSpc>
+              <a:spcBef>
+                <a:spcPts val="0"/>
+              </a:spcBef>
+              <a:spcAft>
+                <a:spcPts val="0"/>
+              </a:spcAft>
+              <a:buClr>
+                <a:srgbClr val="000000"/>
+              </a:buClr>
+              <a:buFont typeface="Arial"/>
+              <a:buNone/>
+            </a:pPr>
+            <a:endParaRPr lang="en-US" sz="1400" b="0" i="0" u="none" strike="noStrike" cap="none" smtClean="0">
+              <a:solidFill>
+                <a:srgbClr val="000000"/>
+              </a:solidFill>
+              <a:latin typeface="Arial"/>
+              <a:ea typeface="Arial"/>
+              <a:cs typeface="Arial"/>
+              <a:sym typeface="Arial"/>
+            </a:endParaRPr>
+          </a:p>
+          <a:p>
+            <a:pPr marL="0" marR="0" lvl="3" indent="0" algn="l" rtl="0">
+              <a:lnSpc>
+                <a:spcPct val="100000"/>
+              </a:lnSpc>
+              <a:spcBef>
+                <a:spcPts val="0"/>
+              </a:spcBef>
+              <a:spcAft>
+                <a:spcPts val="0"/>
+              </a:spcAft>
+              <a:buClr>
+                <a:srgbClr val="000000"/>
+              </a:buClr>
+              <a:buFont typeface="Arial"/>
+              <a:buNone/>
+            </a:pPr>
+            <a:endParaRPr lang="en-US" sz="1400" b="0" i="0" u="none" strike="noStrike" cap="none" smtClean="0">
+              <a:solidFill>
+                <a:srgbClr val="000000"/>
+              </a:solidFill>
+              <a:latin typeface="Arial"/>
+              <a:ea typeface="Arial"/>
+              <a:cs typeface="Arial"/>
+              <a:sym typeface="Arial"/>
+            </a:endParaRPr>
+          </a:p>
+          <a:p>
+            <a:pPr marL="0" marR="0" lvl="4" indent="0" algn="l" rtl="0">
+              <a:lnSpc>
+                <a:spcPct val="100000"/>
+              </a:lnSpc>
+              <a:spcBef>
+                <a:spcPts val="0"/>
+              </a:spcBef>
+              <a:spcAft>
+                <a:spcPts val="0"/>
+              </a:spcAft>
+              <a:buClr>
+                <a:srgbClr val="000000"/>
+              </a:buClr>
+              <a:buFont typeface="Arial"/>
+              <a:buNone/>
+            </a:pPr>
+            <a:endParaRPr lang="en-US" sz="1400" b="0" i="0" u="none" strike="noStrike" cap="none" smtClean="0">
+              <a:solidFill>
+                <a:srgbClr val="000000"/>
+              </a:solidFill>
+              <a:latin typeface="Arial"/>
+              <a:ea typeface="Arial"/>
+              <a:cs typeface="Arial"/>
+              <a:sym typeface="Arial"/>
+            </a:endParaRPr>
+          </a:p>
+          <a:p>
+            <a:pPr marL="0" marR="0" lvl="5" indent="0" algn="l" rtl="0">
+              <a:lnSpc>
+                <a:spcPct val="100000"/>
+              </a:lnSpc>
+              <a:spcBef>
+                <a:spcPts val="0"/>
+              </a:spcBef>
+              <a:spcAft>
+                <a:spcPts val="0"/>
+              </a:spcAft>
+              <a:buClr>
+                <a:srgbClr val="000000"/>
+              </a:buClr>
+              <a:buFont typeface="Arial"/>
+              <a:buNone/>
+            </a:pPr>
+            <a:endParaRPr lang="en-US" sz="1400" b="0" i="0" u="none" strike="noStrike" cap="none" smtClean="0">
+              <a:solidFill>
+                <a:srgbClr val="000000"/>
+              </a:solidFill>
+              <a:latin typeface="Arial"/>
+              <a:ea typeface="Arial"/>
+              <a:cs typeface="Arial"/>
+              <a:sym typeface="Arial"/>
+            </a:endParaRPr>
+          </a:p>
+          <a:p>
+            <a:pPr marL="0" marR="0" lvl="6" indent="0" algn="l" rtl="0">
+              <a:lnSpc>
+                <a:spcPct val="100000"/>
+              </a:lnSpc>
+              <a:spcBef>
+                <a:spcPts val="0"/>
+              </a:spcBef>
+              <a:spcAft>
+                <a:spcPts val="0"/>
+              </a:spcAft>
+              <a:buClr>
+                <a:srgbClr val="000000"/>
+              </a:buClr>
+              <a:buFont typeface="Arial"/>
+              <a:buNone/>
+            </a:pPr>
+            <a:endParaRPr lang="en-US" sz="1400" b="0" i="0" u="none" strike="noStrike" cap="none" smtClean="0">
+              <a:solidFill>
+                <a:srgbClr val="000000"/>
+              </a:solidFill>
+              <a:latin typeface="Arial"/>
+              <a:ea typeface="Arial"/>
+              <a:cs typeface="Arial"/>
+              <a:sym typeface="Arial"/>
+            </a:endParaRPr>
+          </a:p>
+          <a:p>
+            <a:pPr marL="0" marR="0" lvl="7" indent="0" algn="l" rtl="0">
+              <a:lnSpc>
+                <a:spcPct val="100000"/>
+              </a:lnSpc>
+              <a:spcBef>
+                <a:spcPts val="0"/>
+              </a:spcBef>
+              <a:spcAft>
+                <a:spcPts val="0"/>
+              </a:spcAft>
+              <a:buClr>
+                <a:srgbClr val="000000"/>
+              </a:buClr>
+              <a:buFont typeface="Arial"/>
+              <a:buNone/>
+            </a:pPr>
+            <a:endParaRPr lang="en-US" sz="1400" b="0" i="0" u="none" strike="noStrike" cap="none" smtClean="0">
+              <a:solidFill>
+                <a:srgbClr val="000000"/>
+              </a:solidFill>
+              <a:latin typeface="Arial"/>
+              <a:ea typeface="Arial"/>
+              <a:cs typeface="Arial"/>
+              <a:sym typeface="Arial"/>
+            </a:endParaRPr>
+          </a:p>
+          <a:p>
+            <a:pPr marL="0" marR="0" lvl="8" indent="0" algn="l" rtl="0">
+              <a:lnSpc>
+                <a:spcPct val="100000"/>
+              </a:lnSpc>
+              <a:spcBef>
+                <a:spcPts val="0"/>
+              </a:spcBef>
+              <a:spcAft>
+                <a:spcPts val="0"/>
+              </a:spcAft>
+              <a:buClr>
+                <a:srgbClr val="000000"/>
+              </a:buClr>
+              <a:buFont typeface="Arial"/>
+              <a:buNone/>
+            </a:pPr>
+            <a:endParaRPr lang="en-US" sz="1400" b="0" i="0" u="none" strike="noStrike" cap="none">
+              <a:solidFill>
+                <a:srgbClr val="000000"/>
+              </a:solidFill>
+              <a:latin typeface="Arial"/>
+              <a:ea typeface="Arial"/>
+              <a:cs typeface="Arial"/>
+              <a:sym typeface="Arial"/>
+            </a:endParaRPr>
+          </a:p>
+        </p:txBody>
+      </p:sp>
+    </p:spTree>
+    <p:extLst>
+      <p:ext uri="{BB962C8B-B14F-4D97-AF65-F5344CB8AC3E}">
+        <p14:creationId xmlns:p14="http://schemas.microsoft.com/office/powerpoint/2010/main" val="720348738"/>
+      </p:ext>
+    </p:extLst>
+  </p:cSld>
+  <p:clrMapOvr>
+    <a:masterClrMapping/>
+  </p:clrMapOvr>
+</p:notes>
+</file>
+
+<file path=ppt/notesSlides/notesSlide13.xml><?xml version="1.0" encoding="utf-8"?>
+<p:notes xmlns:a="http://schemas.openxmlformats.org/drawingml/2006/main" xmlns:r="http://schemas.openxmlformats.org/officeDocument/2006/relationships" xmlns:p="http://schemas.openxmlformats.org/presentationml/2006/main">
+  <p:cSld>
+    <p:spTree>
+      <p:nvGrpSpPr>
+        <p:cNvPr id="1" name=""/>
+        <p:cNvGrpSpPr/>
+        <p:nvPr/>
+      </p:nvGrpSpPr>
+      <p:grpSpPr>
+        <a:xfrm>
+          <a:off x="0" y="0"/>
+          <a:ext cx="0" cy="0"/>
+          <a:chOff x="0" y="0"/>
+          <a:chExt cx="0" cy="0"/>
+        </a:xfrm>
+      </p:grpSpPr>
+      <p:sp>
+        <p:nvSpPr>
+          <p:cNvPr id="2" name="Slide Image Placeholder 1"/>
+          <p:cNvSpPr>
+            <a:spLocks noGrp="1" noRot="1" noChangeAspect="1"/>
+          </p:cNvSpPr>
+          <p:nvPr>
+            <p:ph type="sldImg"/>
+          </p:nvPr>
+        </p:nvSpPr>
+        <p:spPr>
+          <a:xfrm>
+            <a:off x="406400" y="696913"/>
+            <a:ext cx="6196013" cy="3486150"/>
+          </a:xfrm>
+        </p:spPr>
+      </p:sp>
+      <p:sp>
+        <p:nvSpPr>
+          <p:cNvPr id="3" name="Notes Placeholder 2"/>
+          <p:cNvSpPr>
+            <a:spLocks noGrp="1"/>
+          </p:cNvSpPr>
+          <p:nvPr>
+            <p:ph type="body" idx="1"/>
+          </p:nvPr>
+        </p:nvSpPr>
+        <p:spPr/>
+        <p:txBody>
+          <a:bodyPr/>
+          <a:lstStyle/>
+          <a:p>
+            <a:r>
+              <a:rPr lang="en-US" dirty="0" smtClean="0"/>
+              <a:t>https://docs.ultralytics.com/yolov5/environments/aws_quickstart_tutorial/</a:t>
+            </a:r>
+            <a:endParaRPr lang="en-US" dirty="0"/>
+          </a:p>
+        </p:txBody>
+      </p:sp>
+      <p:sp>
+        <p:nvSpPr>
+          <p:cNvPr id="4" name="Slide Number Placeholder 3"/>
+          <p:cNvSpPr>
+            <a:spLocks noGrp="1"/>
+          </p:cNvSpPr>
+          <p:nvPr>
+            <p:ph type="sldNum" idx="10"/>
+          </p:nvPr>
+        </p:nvSpPr>
+        <p:spPr/>
+        <p:txBody>
+          <a:bodyPr/>
+          <a:lstStyle/>
+          <a:p>
+            <a:pPr marL="0" marR="0" lvl="0" indent="0" algn="r" rtl="0">
+              <a:lnSpc>
+                <a:spcPct val="100000"/>
+              </a:lnSpc>
+              <a:spcBef>
+                <a:spcPts val="0"/>
+              </a:spcBef>
+              <a:spcAft>
+                <a:spcPts val="0"/>
+              </a:spcAft>
+              <a:buClr>
+                <a:srgbClr val="000000"/>
+              </a:buClr>
+              <a:buFont typeface="Arial"/>
+              <a:buNone/>
+            </a:pPr>
+            <a:endParaRPr lang="en-US" sz="1200" b="0" i="0" u="none" strike="noStrike" cap="none" smtClean="0">
+              <a:solidFill>
+                <a:srgbClr val="000000"/>
+              </a:solidFill>
+              <a:latin typeface="Arial"/>
+              <a:ea typeface="Arial"/>
+              <a:cs typeface="Arial"/>
+              <a:sym typeface="Arial"/>
+            </a:endParaRPr>
+          </a:p>
+          <a:p>
+            <a:pPr marL="0" marR="0" lvl="1" indent="0" algn="l" rtl="0">
+              <a:lnSpc>
+                <a:spcPct val="100000"/>
+              </a:lnSpc>
+              <a:spcBef>
+                <a:spcPts val="0"/>
+              </a:spcBef>
+              <a:spcAft>
+                <a:spcPts val="0"/>
+              </a:spcAft>
+              <a:buClr>
+                <a:srgbClr val="000000"/>
+              </a:buClr>
+              <a:buFont typeface="Arial"/>
+              <a:buNone/>
+            </a:pPr>
+            <a:endParaRPr lang="en-US" sz="1400" b="0" i="0" u="none" strike="noStrike" cap="none" smtClean="0">
+              <a:solidFill>
+                <a:srgbClr val="000000"/>
+              </a:solidFill>
+              <a:latin typeface="Arial"/>
+              <a:ea typeface="Arial"/>
+              <a:cs typeface="Arial"/>
+              <a:sym typeface="Arial"/>
+            </a:endParaRPr>
+          </a:p>
+          <a:p>
+            <a:pPr marL="0" marR="0" lvl="2" indent="0" algn="l" rtl="0">
+              <a:lnSpc>
+                <a:spcPct val="100000"/>
+              </a:lnSpc>
+              <a:spcBef>
+                <a:spcPts val="0"/>
+              </a:spcBef>
+              <a:spcAft>
+                <a:spcPts val="0"/>
+              </a:spcAft>
+              <a:buClr>
+                <a:srgbClr val="000000"/>
+              </a:buClr>
+              <a:buFont typeface="Arial"/>
+              <a:buNone/>
+            </a:pPr>
+            <a:endParaRPr lang="en-US" sz="1400" b="0" i="0" u="none" strike="noStrike" cap="none" smtClean="0">
+              <a:solidFill>
+                <a:srgbClr val="000000"/>
+              </a:solidFill>
+              <a:latin typeface="Arial"/>
+              <a:ea typeface="Arial"/>
+              <a:cs typeface="Arial"/>
+              <a:sym typeface="Arial"/>
+            </a:endParaRPr>
+          </a:p>
+          <a:p>
+            <a:pPr marL="0" marR="0" lvl="3" indent="0" algn="l" rtl="0">
+              <a:lnSpc>
+                <a:spcPct val="100000"/>
+              </a:lnSpc>
+              <a:spcBef>
+                <a:spcPts val="0"/>
+              </a:spcBef>
+              <a:spcAft>
+                <a:spcPts val="0"/>
+              </a:spcAft>
+              <a:buClr>
+                <a:srgbClr val="000000"/>
+              </a:buClr>
+              <a:buFont typeface="Arial"/>
+              <a:buNone/>
+            </a:pPr>
+            <a:endParaRPr lang="en-US" sz="1400" b="0" i="0" u="none" strike="noStrike" cap="none" smtClean="0">
+              <a:solidFill>
+                <a:srgbClr val="000000"/>
+              </a:solidFill>
+              <a:latin typeface="Arial"/>
+              <a:ea typeface="Arial"/>
+              <a:cs typeface="Arial"/>
+              <a:sym typeface="Arial"/>
+            </a:endParaRPr>
+          </a:p>
+          <a:p>
+            <a:pPr marL="0" marR="0" lvl="4" indent="0" algn="l" rtl="0">
+              <a:lnSpc>
+                <a:spcPct val="100000"/>
+              </a:lnSpc>
+              <a:spcBef>
+                <a:spcPts val="0"/>
+              </a:spcBef>
+              <a:spcAft>
+                <a:spcPts val="0"/>
+              </a:spcAft>
+              <a:buClr>
+                <a:srgbClr val="000000"/>
+              </a:buClr>
+              <a:buFont typeface="Arial"/>
+              <a:buNone/>
+            </a:pPr>
+            <a:endParaRPr lang="en-US" sz="1400" b="0" i="0" u="none" strike="noStrike" cap="none" smtClean="0">
+              <a:solidFill>
+                <a:srgbClr val="000000"/>
+              </a:solidFill>
+              <a:latin typeface="Arial"/>
+              <a:ea typeface="Arial"/>
+              <a:cs typeface="Arial"/>
+              <a:sym typeface="Arial"/>
+            </a:endParaRPr>
+          </a:p>
+          <a:p>
+            <a:pPr marL="0" marR="0" lvl="5" indent="0" algn="l" rtl="0">
+              <a:lnSpc>
+                <a:spcPct val="100000"/>
+              </a:lnSpc>
+              <a:spcBef>
+                <a:spcPts val="0"/>
+              </a:spcBef>
+              <a:spcAft>
+                <a:spcPts val="0"/>
+              </a:spcAft>
+              <a:buClr>
+                <a:srgbClr val="000000"/>
+              </a:buClr>
+              <a:buFont typeface="Arial"/>
+              <a:buNone/>
+            </a:pPr>
+            <a:endParaRPr lang="en-US" sz="1400" b="0" i="0" u="none" strike="noStrike" cap="none" smtClean="0">
+              <a:solidFill>
+                <a:srgbClr val="000000"/>
+              </a:solidFill>
+              <a:latin typeface="Arial"/>
+              <a:ea typeface="Arial"/>
+              <a:cs typeface="Arial"/>
+              <a:sym typeface="Arial"/>
+            </a:endParaRPr>
+          </a:p>
+          <a:p>
+            <a:pPr marL="0" marR="0" lvl="6" indent="0" algn="l" rtl="0">
+              <a:lnSpc>
+                <a:spcPct val="100000"/>
+              </a:lnSpc>
+              <a:spcBef>
+                <a:spcPts val="0"/>
+              </a:spcBef>
+              <a:spcAft>
+                <a:spcPts val="0"/>
+              </a:spcAft>
+              <a:buClr>
+                <a:srgbClr val="000000"/>
+              </a:buClr>
+              <a:buFont typeface="Arial"/>
+              <a:buNone/>
+            </a:pPr>
+            <a:endParaRPr lang="en-US" sz="1400" b="0" i="0" u="none" strike="noStrike" cap="none" smtClean="0">
+              <a:solidFill>
+                <a:srgbClr val="000000"/>
+              </a:solidFill>
+              <a:latin typeface="Arial"/>
+              <a:ea typeface="Arial"/>
+              <a:cs typeface="Arial"/>
+              <a:sym typeface="Arial"/>
+            </a:endParaRPr>
+          </a:p>
+          <a:p>
+            <a:pPr marL="0" marR="0" lvl="7" indent="0" algn="l" rtl="0">
+              <a:lnSpc>
+                <a:spcPct val="100000"/>
+              </a:lnSpc>
+              <a:spcBef>
+                <a:spcPts val="0"/>
+              </a:spcBef>
+              <a:spcAft>
+                <a:spcPts val="0"/>
+              </a:spcAft>
+              <a:buClr>
+                <a:srgbClr val="000000"/>
+              </a:buClr>
+              <a:buFont typeface="Arial"/>
+              <a:buNone/>
+            </a:pPr>
+            <a:endParaRPr lang="en-US" sz="1400" b="0" i="0" u="none" strike="noStrike" cap="none" smtClean="0">
+              <a:solidFill>
+                <a:srgbClr val="000000"/>
+              </a:solidFill>
+              <a:latin typeface="Arial"/>
+              <a:ea typeface="Arial"/>
+              <a:cs typeface="Arial"/>
+              <a:sym typeface="Arial"/>
+            </a:endParaRPr>
+          </a:p>
+          <a:p>
+            <a:pPr marL="0" marR="0" lvl="8" indent="0" algn="l" rtl="0">
+              <a:lnSpc>
+                <a:spcPct val="100000"/>
+              </a:lnSpc>
+              <a:spcBef>
+                <a:spcPts val="0"/>
+              </a:spcBef>
+              <a:spcAft>
+                <a:spcPts val="0"/>
+              </a:spcAft>
+              <a:buClr>
+                <a:srgbClr val="000000"/>
+              </a:buClr>
+              <a:buFont typeface="Arial"/>
+              <a:buNone/>
+            </a:pPr>
+            <a:endParaRPr lang="en-US" sz="1400" b="0" i="0" u="none" strike="noStrike" cap="none">
+              <a:solidFill>
+                <a:srgbClr val="000000"/>
+              </a:solidFill>
+              <a:latin typeface="Arial"/>
+              <a:ea typeface="Arial"/>
+              <a:cs typeface="Arial"/>
+              <a:sym typeface="Arial"/>
+            </a:endParaRPr>
+          </a:p>
+        </p:txBody>
+      </p:sp>
+    </p:spTree>
+    <p:extLst>
+      <p:ext uri="{BB962C8B-B14F-4D97-AF65-F5344CB8AC3E}">
+        <p14:creationId xmlns:p14="http://schemas.microsoft.com/office/powerpoint/2010/main" val="3147343993"/>
+      </p:ext>
+    </p:extLst>
+  </p:cSld>
+  <p:clrMapOvr>
+    <a:masterClrMapping/>
+  </p:clrMapOvr>
+</p:notes>
+</file>
+
 <file path=ppt/notesSlides/notesSlide2.xml><?xml version="1.0" encoding="utf-8"?>
 <p:notes xmlns:a="http://schemas.openxmlformats.org/drawingml/2006/main" xmlns:r="http://schemas.openxmlformats.org/officeDocument/2006/relationships" xmlns:p="http://schemas.openxmlformats.org/presentationml/2006/main">
   <p:cSld>
@@ -3453,11 +4773,7 @@
           <a:p>
             <a:r>
               <a:rPr lang="en-US" dirty="0" smtClean="0"/>
-              <a:t>https://k21academy.com/amazon-web-services/aws-for-testers-and-qa</a:t>
-            </a:r>
-            <a:r>
-              <a:rPr lang="en-US" dirty="0" smtClean="0"/>
-              <a:t>/</a:t>
+              <a:t>https://k21academy.com/amazon-web-services/aws-for-testers-and-qa/</a:t>
             </a:r>
           </a:p>
           <a:p>
@@ -4459,11 +5775,7 @@
           <a:p>
             <a:r>
               <a:rPr lang="en-US" dirty="0" smtClean="0"/>
-              <a:t>https://k21academy.com/amazon-web-services/aws-for-testers-and-qa</a:t>
-            </a:r>
-            <a:r>
-              <a:rPr lang="en-US" dirty="0" smtClean="0"/>
-              <a:t>/</a:t>
+              <a:t>https://k21academy.com/amazon-web-services/aws-for-testers-and-qa/</a:t>
             </a:r>
           </a:p>
           <a:p>
@@ -4878,7 +6190,7 @@
           <a:p>
             <a:fld id="{7A02337E-4703-49AB-8D81-EA2F8A6577FC}" type="datetimeFigureOut">
               <a:rPr lang="en-US" smtClean="0"/>
-              <a:t>9/11/2025</a:t>
+              <a:t>10/7/2025</a:t>
             </a:fld>
             <a:endParaRPr lang="en-US"/>
           </a:p>
@@ -5049,7 +6361,7 @@
           <a:p>
             <a:fld id="{7A02337E-4703-49AB-8D81-EA2F8A6577FC}" type="datetimeFigureOut">
               <a:rPr lang="en-US" smtClean="0"/>
-              <a:t>9/11/2025</a:t>
+              <a:t>10/7/2025</a:t>
             </a:fld>
             <a:endParaRPr lang="en-US"/>
           </a:p>
@@ -5230,7 +6542,7 @@
           <a:p>
             <a:fld id="{7A02337E-4703-49AB-8D81-EA2F8A6577FC}" type="datetimeFigureOut">
               <a:rPr lang="en-US" smtClean="0"/>
-              <a:t>9/11/2025</a:t>
+              <a:t>10/7/2025</a:t>
             </a:fld>
             <a:endParaRPr lang="en-US"/>
           </a:p>
@@ -5401,7 +6713,7 @@
           <a:p>
             <a:fld id="{48A87A34-81AB-432B-8DAE-1953F412C126}" type="datetimeFigureOut">
               <a:rPr lang="en-US" smtClean="0"/>
-              <a:t>9/11/2025</a:t>
+              <a:t>10/7/2025</a:t>
             </a:fld>
             <a:endParaRPr lang="en-US" dirty="0"/>
           </a:p>
@@ -5647,7 +6959,7 @@
           <a:p>
             <a:fld id="{7A02337E-4703-49AB-8D81-EA2F8A6577FC}" type="datetimeFigureOut">
               <a:rPr lang="en-US" smtClean="0"/>
-              <a:t>9/11/2025</a:t>
+              <a:t>10/7/2025</a:t>
             </a:fld>
             <a:endParaRPr lang="en-US"/>
           </a:p>
@@ -5880,7 +7192,7 @@
           <a:p>
             <a:fld id="{7A02337E-4703-49AB-8D81-EA2F8A6577FC}" type="datetimeFigureOut">
               <a:rPr lang="en-US" smtClean="0"/>
-              <a:t>9/11/2025</a:t>
+              <a:t>10/7/2025</a:t>
             </a:fld>
             <a:endParaRPr lang="en-US"/>
           </a:p>
@@ -6248,7 +7560,7 @@
           <a:p>
             <a:fld id="{7A02337E-4703-49AB-8D81-EA2F8A6577FC}" type="datetimeFigureOut">
               <a:rPr lang="en-US" smtClean="0"/>
-              <a:t>9/11/2025</a:t>
+              <a:t>10/7/2025</a:t>
             </a:fld>
             <a:endParaRPr lang="en-US"/>
           </a:p>
@@ -6367,7 +7679,7 @@
           <a:p>
             <a:fld id="{7A02337E-4703-49AB-8D81-EA2F8A6577FC}" type="datetimeFigureOut">
               <a:rPr lang="en-US" smtClean="0"/>
-              <a:t>9/11/2025</a:t>
+              <a:t>10/7/2025</a:t>
             </a:fld>
             <a:endParaRPr lang="en-US"/>
           </a:p>
@@ -6463,7 +7775,7 @@
           <a:p>
             <a:fld id="{7A02337E-4703-49AB-8D81-EA2F8A6577FC}" type="datetimeFigureOut">
               <a:rPr lang="en-US" smtClean="0"/>
-              <a:t>9/11/2025</a:t>
+              <a:t>10/7/2025</a:t>
             </a:fld>
             <a:endParaRPr lang="en-US"/>
           </a:p>
@@ -6741,7 +8053,7 @@
           <a:p>
             <a:fld id="{7A02337E-4703-49AB-8D81-EA2F8A6577FC}" type="datetimeFigureOut">
               <a:rPr lang="en-US" smtClean="0"/>
-              <a:t>9/11/2025</a:t>
+              <a:t>10/7/2025</a:t>
             </a:fld>
             <a:endParaRPr lang="en-US"/>
           </a:p>
@@ -6995,7 +8307,7 @@
           <a:p>
             <a:fld id="{7A02337E-4703-49AB-8D81-EA2F8A6577FC}" type="datetimeFigureOut">
               <a:rPr lang="en-US" smtClean="0"/>
-              <a:t>9/11/2025</a:t>
+              <a:t>10/7/2025</a:t>
             </a:fld>
             <a:endParaRPr lang="en-US"/>
           </a:p>
@@ -7209,7 +8521,7 @@
           <a:p>
             <a:fld id="{7A02337E-4703-49AB-8D81-EA2F8A6577FC}" type="datetimeFigureOut">
               <a:rPr lang="en-US" smtClean="0"/>
-              <a:t>9/11/2025</a:t>
+              <a:t>10/7/2025</a:t>
             </a:fld>
             <a:endParaRPr lang="en-US"/>
           </a:p>
@@ -9686,6 +10998,78 @@
       </p:grpSpPr>
       <p:sp>
         <p:nvSpPr>
+          <p:cNvPr id="2" name="Title 1"/>
+          <p:cNvSpPr>
+            <a:spLocks noGrp="1"/>
+          </p:cNvSpPr>
+          <p:nvPr>
+            <p:ph type="title"/>
+          </p:nvPr>
+        </p:nvSpPr>
+        <p:spPr>
+          <a:xfrm>
+            <a:off x="210962" y="160956"/>
+            <a:ext cx="7886700" cy="403489"/>
+          </a:xfrm>
+        </p:spPr>
+        <p:txBody>
+          <a:bodyPr>
+            <a:normAutofit fontScale="90000"/>
+          </a:bodyPr>
+          <a:lstStyle/>
+          <a:p>
+            <a:r>
+              <a:rPr lang="en-US" b="1" dirty="0" err="1" smtClean="0">
+                <a:solidFill>
+                  <a:srgbClr val="FF0000"/>
+                </a:solidFill>
+              </a:rPr>
+              <a:t>Exampe</a:t>
+            </a:r>
+            <a:r>
+              <a:rPr lang="en-US" b="1" dirty="0" smtClean="0">
+                <a:solidFill>
+                  <a:srgbClr val="FF0000"/>
+                </a:solidFill>
+              </a:rPr>
+              <a:t> 1</a:t>
+            </a:r>
+            <a:endParaRPr lang="en-US" b="1" dirty="0">
+              <a:solidFill>
+                <a:srgbClr val="FF0000"/>
+              </a:solidFill>
+            </a:endParaRPr>
+          </a:p>
+        </p:txBody>
+      </p:sp>
+      <p:pic>
+        <p:nvPicPr>
+          <p:cNvPr id="6" name="Content Placeholder 5"/>
+          <p:cNvPicPr>
+            <a:picLocks noGrp="1" noChangeAspect="1"/>
+          </p:cNvPicPr>
+          <p:nvPr>
+            <p:ph idx="1"/>
+          </p:nvPr>
+        </p:nvPicPr>
+        <p:blipFill>
+          <a:blip r:embed="rId3"/>
+          <a:stretch>
+            <a:fillRect/>
+          </a:stretch>
+        </p:blipFill>
+        <p:spPr>
+          <a:xfrm>
+            <a:off x="210962" y="2194008"/>
+            <a:ext cx="2741179" cy="2033042"/>
+          </a:xfrm>
+          <a:prstGeom prst="rect">
+            <a:avLst/>
+          </a:prstGeom>
+        </p:spPr>
+      </p:pic>
+      <p:sp>
+        <p:nvSpPr>
           <p:cNvPr id="4" name="Slide Number Placeholder 3"/>
           <p:cNvSpPr>
             <a:spLocks noGrp="1"/>
@@ -9702,6 +11086,1949 @@
             <a:fld id="{6D22F896-40B5-4ADD-8801-0D06FADFA095}" type="slidenum">
               <a:rPr lang="en-US" smtClean="0"/>
               <a:t>11</a:t>
+            </a:fld>
+            <a:endParaRPr lang="en-US" dirty="0"/>
+          </a:p>
+        </p:txBody>
+      </p:sp>
+      <p:sp>
+        <p:nvSpPr>
+          <p:cNvPr id="5" name="Title 1"/>
+          <p:cNvSpPr txBox="1">
+            <a:spLocks/>
+          </p:cNvSpPr>
+          <p:nvPr/>
+        </p:nvSpPr>
+        <p:spPr>
+          <a:xfrm>
+            <a:off x="425451" y="696716"/>
+            <a:ext cx="7886700" cy="403489"/>
+          </a:xfrm>
+          <a:prstGeom prst="rect">
+            <a:avLst/>
+          </a:prstGeom>
+        </p:spPr>
+        <p:txBody>
+          <a:bodyPr vert="horz" lIns="91440" tIns="45720" rIns="91440" bIns="45720" rtlCol="0" anchor="ctr">
+            <a:normAutofit fontScale="82500" lnSpcReduction="20000"/>
+          </a:bodyPr>
+          <a:lstStyle>
+            <a:lvl1pPr algn="l" defTabSz="685800" rtl="0" eaLnBrk="1" latinLnBrk="0" hangingPunct="1">
+              <a:lnSpc>
+                <a:spcPct val="90000"/>
+              </a:lnSpc>
+              <a:spcBef>
+                <a:spcPct val="0"/>
+              </a:spcBef>
+              <a:buNone/>
+              <a:defRPr sz="3300" kern="1200">
+                <a:solidFill>
+                  <a:schemeClr val="tx1"/>
+                </a:solidFill>
+                <a:latin typeface="+mj-lt"/>
+                <a:ea typeface="+mj-ea"/>
+                <a:cs typeface="+mj-cs"/>
+              </a:defRPr>
+            </a:lvl1pPr>
+          </a:lstStyle>
+          <a:p>
+            <a:r>
+              <a:rPr lang="en-US" dirty="0">
+                <a:solidFill>
+                  <a:schemeClr val="accent1">
+                    <a:lumMod val="50000"/>
+                  </a:schemeClr>
+                </a:solidFill>
+              </a:rPr>
+              <a:t>YOLOv5 🚀 on AWS Deep Learning Instance</a:t>
+            </a:r>
+          </a:p>
+        </p:txBody>
+      </p:sp>
+      <p:sp>
+        <p:nvSpPr>
+          <p:cNvPr id="7" name="Rectangle 6"/>
+          <p:cNvSpPr/>
+          <p:nvPr/>
+        </p:nvSpPr>
+        <p:spPr>
+          <a:xfrm>
+            <a:off x="210962" y="1100205"/>
+            <a:ext cx="4022371" cy="1292662"/>
+          </a:xfrm>
+          <a:prstGeom prst="rect">
+            <a:avLst/>
+          </a:prstGeom>
+        </p:spPr>
+        <p:txBody>
+          <a:bodyPr wrap="square">
+            <a:spAutoFit/>
+          </a:bodyPr>
+          <a:lstStyle/>
+          <a:p>
+            <a:pPr algn="just"/>
+            <a:r>
+              <a:rPr lang="en-US" sz="1200" dirty="0"/>
+              <a:t>Step 1: AWS Console Sign-In</a:t>
+            </a:r>
+          </a:p>
+          <a:p>
+            <a:pPr algn="just"/>
+            <a:r>
+              <a:rPr lang="en-US" sz="1200" dirty="0"/>
+              <a:t>Begin by creating an account or signing in to the AWS Management Console. Once logged in, navigate to the EC2 service dashboard, where you can manage your virtual servers (instances).</a:t>
+            </a:r>
+          </a:p>
+          <a:p>
+            <a:endParaRPr lang="en-US" dirty="0"/>
+          </a:p>
+        </p:txBody>
+      </p:sp>
+      <p:sp>
+        <p:nvSpPr>
+          <p:cNvPr id="8" name="Rectangle 7"/>
+          <p:cNvSpPr/>
+          <p:nvPr/>
+        </p:nvSpPr>
+        <p:spPr>
+          <a:xfrm>
+            <a:off x="4572000" y="1093202"/>
+            <a:ext cx="4120444" cy="830997"/>
+          </a:xfrm>
+          <a:prstGeom prst="rect">
+            <a:avLst/>
+          </a:prstGeom>
+        </p:spPr>
+        <p:txBody>
+          <a:bodyPr wrap="square">
+            <a:spAutoFit/>
+          </a:bodyPr>
+          <a:lstStyle/>
+          <a:p>
+            <a:pPr algn="just"/>
+            <a:r>
+              <a:rPr lang="en-US" sz="1200" dirty="0"/>
+              <a:t>Step 2: Launch Your Instance</a:t>
+            </a:r>
+          </a:p>
+          <a:p>
+            <a:pPr algn="just"/>
+            <a:r>
+              <a:rPr lang="en-US" sz="1200" dirty="0"/>
+              <a:t>From the EC2 dashboard, click the Launch Instance button. This initiates the process of creating a new virtual server tailored to your needs.</a:t>
+            </a:r>
+          </a:p>
+        </p:txBody>
+      </p:sp>
+      <p:pic>
+        <p:nvPicPr>
+          <p:cNvPr id="9" name="Picture 8"/>
+          <p:cNvPicPr>
+            <a:picLocks noChangeAspect="1"/>
+          </p:cNvPicPr>
+          <p:nvPr/>
+        </p:nvPicPr>
+        <p:blipFill>
+          <a:blip r:embed="rId4"/>
+          <a:stretch>
+            <a:fillRect/>
+          </a:stretch>
+        </p:blipFill>
+        <p:spPr>
+          <a:xfrm>
+            <a:off x="4572000" y="2027414"/>
+            <a:ext cx="3190422" cy="2366230"/>
+          </a:xfrm>
+          <a:prstGeom prst="rect">
+            <a:avLst/>
+          </a:prstGeom>
+        </p:spPr>
+      </p:pic>
+    </p:spTree>
+    <p:extLst>
+      <p:ext uri="{BB962C8B-B14F-4D97-AF65-F5344CB8AC3E}">
+        <p14:creationId xmlns:p14="http://schemas.microsoft.com/office/powerpoint/2010/main" val="3544867966"/>
+      </p:ext>
+    </p:extLst>
+  </p:cSld>
+  <p:clrMapOvr>
+    <a:masterClrMapping/>
+  </p:clrMapOvr>
+  <p:timing>
+    <p:tnLst>
+      <p:par>
+        <p:cTn id="1" dur="indefinite" restart="never" nodeType="tmRoot"/>
+      </p:par>
+    </p:tnLst>
+  </p:timing>
+</p:sld>
+</file>
+
+<file path=ppt/slides/slide12.xml><?xml version="1.0" encoding="utf-8"?>
+<p:sld xmlns:a="http://schemas.openxmlformats.org/drawingml/2006/main" xmlns:r="http://schemas.openxmlformats.org/officeDocument/2006/relationships" xmlns:p="http://schemas.openxmlformats.org/presentationml/2006/main">
+  <p:cSld>
+    <p:spTree>
+      <p:nvGrpSpPr>
+        <p:cNvPr id="1" name=""/>
+        <p:cNvGrpSpPr/>
+        <p:nvPr/>
+      </p:nvGrpSpPr>
+      <p:grpSpPr>
+        <a:xfrm>
+          <a:off x="0" y="0"/>
+          <a:ext cx="0" cy="0"/>
+          <a:chOff x="0" y="0"/>
+          <a:chExt cx="0" cy="0"/>
+        </a:xfrm>
+      </p:grpSpPr>
+      <p:sp>
+        <p:nvSpPr>
+          <p:cNvPr id="2" name="Title 1"/>
+          <p:cNvSpPr>
+            <a:spLocks noGrp="1"/>
+          </p:cNvSpPr>
+          <p:nvPr>
+            <p:ph type="title"/>
+          </p:nvPr>
+        </p:nvSpPr>
+        <p:spPr>
+          <a:xfrm>
+            <a:off x="210962" y="160956"/>
+            <a:ext cx="7886700" cy="403489"/>
+          </a:xfrm>
+        </p:spPr>
+        <p:txBody>
+          <a:bodyPr>
+            <a:normAutofit fontScale="90000"/>
+          </a:bodyPr>
+          <a:lstStyle/>
+          <a:p>
+            <a:r>
+              <a:rPr lang="en-US" b="1" dirty="0" err="1" smtClean="0">
+                <a:solidFill>
+                  <a:srgbClr val="FF0000"/>
+                </a:solidFill>
+              </a:rPr>
+              <a:t>Exampe</a:t>
+            </a:r>
+            <a:r>
+              <a:rPr lang="en-US" b="1" dirty="0" smtClean="0">
+                <a:solidFill>
+                  <a:srgbClr val="FF0000"/>
+                </a:solidFill>
+              </a:rPr>
+              <a:t> 1</a:t>
+            </a:r>
+            <a:endParaRPr lang="en-US" b="1" dirty="0">
+              <a:solidFill>
+                <a:srgbClr val="FF0000"/>
+              </a:solidFill>
+            </a:endParaRPr>
+          </a:p>
+        </p:txBody>
+      </p:sp>
+      <p:sp>
+        <p:nvSpPr>
+          <p:cNvPr id="4" name="Slide Number Placeholder 3"/>
+          <p:cNvSpPr>
+            <a:spLocks noGrp="1"/>
+          </p:cNvSpPr>
+          <p:nvPr>
+            <p:ph type="sldNum" sz="quarter" idx="12"/>
+          </p:nvPr>
+        </p:nvSpPr>
+        <p:spPr/>
+        <p:txBody>
+          <a:bodyPr/>
+          <a:lstStyle/>
+          <a:p>
+            <a:fld id="{6D22F896-40B5-4ADD-8801-0D06FADFA095}" type="slidenum">
+              <a:rPr lang="en-US" smtClean="0"/>
+              <a:t>12</a:t>
+            </a:fld>
+            <a:endParaRPr lang="en-US" dirty="0"/>
+          </a:p>
+        </p:txBody>
+      </p:sp>
+      <p:sp>
+        <p:nvSpPr>
+          <p:cNvPr id="5" name="Title 1"/>
+          <p:cNvSpPr txBox="1">
+            <a:spLocks/>
+          </p:cNvSpPr>
+          <p:nvPr/>
+        </p:nvSpPr>
+        <p:spPr>
+          <a:xfrm>
+            <a:off x="425451" y="696716"/>
+            <a:ext cx="7886700" cy="403489"/>
+          </a:xfrm>
+          <a:prstGeom prst="rect">
+            <a:avLst/>
+          </a:prstGeom>
+        </p:spPr>
+        <p:txBody>
+          <a:bodyPr vert="horz" lIns="91440" tIns="45720" rIns="91440" bIns="45720" rtlCol="0" anchor="ctr">
+            <a:normAutofit fontScale="82500" lnSpcReduction="20000"/>
+          </a:bodyPr>
+          <a:lstStyle>
+            <a:lvl1pPr algn="l" defTabSz="685800" rtl="0" eaLnBrk="1" latinLnBrk="0" hangingPunct="1">
+              <a:lnSpc>
+                <a:spcPct val="90000"/>
+              </a:lnSpc>
+              <a:spcBef>
+                <a:spcPct val="0"/>
+              </a:spcBef>
+              <a:buNone/>
+              <a:defRPr sz="3300" kern="1200">
+                <a:solidFill>
+                  <a:schemeClr val="tx1"/>
+                </a:solidFill>
+                <a:latin typeface="+mj-lt"/>
+                <a:ea typeface="+mj-ea"/>
+                <a:cs typeface="+mj-cs"/>
+              </a:defRPr>
+            </a:lvl1pPr>
+          </a:lstStyle>
+          <a:p>
+            <a:r>
+              <a:rPr lang="en-US" dirty="0">
+                <a:solidFill>
+                  <a:schemeClr val="accent1">
+                    <a:lumMod val="50000"/>
+                  </a:schemeClr>
+                </a:solidFill>
+              </a:rPr>
+              <a:t>YOLOv5 🚀 on AWS Deep Learning </a:t>
+            </a:r>
+            <a:r>
+              <a:rPr lang="en-US" dirty="0" smtClean="0">
+                <a:solidFill>
+                  <a:schemeClr val="accent1">
+                    <a:lumMod val="50000"/>
+                  </a:schemeClr>
+                </a:solidFill>
+              </a:rPr>
+              <a:t>Instance (</a:t>
+            </a:r>
+            <a:r>
+              <a:rPr lang="en-US" dirty="0" err="1" smtClean="0">
+                <a:solidFill>
+                  <a:schemeClr val="accent1">
+                    <a:lumMod val="50000"/>
+                  </a:schemeClr>
+                </a:solidFill>
+              </a:rPr>
+              <a:t>Cons’t</a:t>
+            </a:r>
+            <a:r>
+              <a:rPr lang="en-US" dirty="0" smtClean="0">
+                <a:solidFill>
+                  <a:schemeClr val="accent1">
+                    <a:lumMod val="50000"/>
+                  </a:schemeClr>
+                </a:solidFill>
+              </a:rPr>
+              <a:t>)</a:t>
+            </a:r>
+            <a:endParaRPr lang="en-US" dirty="0">
+              <a:solidFill>
+                <a:schemeClr val="accent1">
+                  <a:lumMod val="50000"/>
+                </a:schemeClr>
+              </a:solidFill>
+            </a:endParaRPr>
+          </a:p>
+        </p:txBody>
+      </p:sp>
+      <p:sp>
+        <p:nvSpPr>
+          <p:cNvPr id="7" name="Rectangle 6"/>
+          <p:cNvSpPr/>
+          <p:nvPr/>
+        </p:nvSpPr>
+        <p:spPr>
+          <a:xfrm>
+            <a:off x="210962" y="1100205"/>
+            <a:ext cx="4022371" cy="1754326"/>
+          </a:xfrm>
+          <a:prstGeom prst="rect">
+            <a:avLst/>
+          </a:prstGeom>
+        </p:spPr>
+        <p:txBody>
+          <a:bodyPr wrap="square">
+            <a:spAutoFit/>
+          </a:bodyPr>
+          <a:lstStyle/>
+          <a:p>
+            <a:pPr algn="just"/>
+            <a:r>
+              <a:rPr lang="en-US" sz="1200" b="1" dirty="0"/>
+              <a:t>Selecting the Right Amazon Machine Image (AMI</a:t>
+            </a:r>
+            <a:r>
+              <a:rPr lang="en-US" sz="1200" b="1" dirty="0" smtClean="0"/>
+              <a:t>)</a:t>
+            </a:r>
+          </a:p>
+          <a:p>
+            <a:pPr algn="just"/>
+            <a:endParaRPr lang="en-US" sz="1200" b="1" dirty="0"/>
+          </a:p>
+          <a:p>
+            <a:pPr algn="just"/>
+            <a:r>
+              <a:rPr lang="en-US" sz="900" dirty="0"/>
+              <a:t>Choosing the correct AMI is crucial. This determines the operating system and pre-installed software for your instance. In the search bar, type '</a:t>
+            </a:r>
+            <a:r>
+              <a:rPr lang="en-US" sz="900" dirty="0">
+                <a:hlinkClick r:id="rId3"/>
+              </a:rPr>
+              <a:t>Deep Learning</a:t>
+            </a:r>
+            <a:r>
+              <a:rPr lang="en-US" sz="900" dirty="0"/>
+              <a:t>' and select the latest Ubuntu-based Deep Learning AMI (unless you have specific requirements for a different OS). Amazon's Deep Learning AMIs come pre-configured with popular </a:t>
+            </a:r>
+            <a:r>
+              <a:rPr lang="en-US" sz="900" dirty="0">
+                <a:hlinkClick r:id="rId4"/>
+              </a:rPr>
+              <a:t>deep learning frameworks</a:t>
+            </a:r>
+            <a:r>
+              <a:rPr lang="en-US" sz="900" dirty="0"/>
+              <a:t> (like </a:t>
+            </a:r>
+            <a:r>
+              <a:rPr lang="en-US" sz="900" dirty="0" err="1">
+                <a:hlinkClick r:id="rId5"/>
+              </a:rPr>
+              <a:t>PyTorch</a:t>
+            </a:r>
+            <a:r>
+              <a:rPr lang="en-US" sz="900" dirty="0"/>
+              <a:t>, used by YOLOv5) and necessary </a:t>
+            </a:r>
+            <a:r>
+              <a:rPr lang="en-US" sz="900" dirty="0">
+                <a:hlinkClick r:id="rId6"/>
+              </a:rPr>
+              <a:t>GPU drivers</a:t>
+            </a:r>
+            <a:r>
+              <a:rPr lang="en-US" sz="900" dirty="0"/>
+              <a:t>, significantly streamlining the setup process.</a:t>
+            </a:r>
+          </a:p>
+          <a:p>
+            <a:r>
+              <a:rPr lang="en-US" sz="1200" dirty="0"/>
+              <a:t/>
+            </a:r>
+            <a:br>
+              <a:rPr lang="en-US" sz="1200" dirty="0"/>
+            </a:br>
+            <a:endParaRPr lang="en-US" dirty="0"/>
+          </a:p>
+        </p:txBody>
+      </p:sp>
+      <p:pic>
+        <p:nvPicPr>
+          <p:cNvPr id="9" name="Picture 8"/>
+          <p:cNvPicPr>
+            <a:picLocks noChangeAspect="1"/>
+          </p:cNvPicPr>
+          <p:nvPr/>
+        </p:nvPicPr>
+        <p:blipFill>
+          <a:blip r:embed="rId7"/>
+          <a:stretch>
+            <a:fillRect/>
+          </a:stretch>
+        </p:blipFill>
+        <p:spPr>
+          <a:xfrm>
+            <a:off x="210962" y="2356745"/>
+            <a:ext cx="3883378" cy="2880172"/>
+          </a:xfrm>
+          <a:prstGeom prst="rect">
+            <a:avLst/>
+          </a:prstGeom>
+        </p:spPr>
+      </p:pic>
+      <p:sp>
+        <p:nvSpPr>
+          <p:cNvPr id="10" name="Rectangle 9"/>
+          <p:cNvSpPr/>
+          <p:nvPr/>
+        </p:nvSpPr>
+        <p:spPr>
+          <a:xfrm>
+            <a:off x="4647495" y="1100205"/>
+            <a:ext cx="4022371" cy="2816156"/>
+          </a:xfrm>
+          <a:prstGeom prst="rect">
+            <a:avLst/>
+          </a:prstGeom>
+        </p:spPr>
+        <p:txBody>
+          <a:bodyPr wrap="square">
+            <a:spAutoFit/>
+          </a:bodyPr>
+          <a:lstStyle/>
+          <a:p>
+            <a:pPr algn="just"/>
+            <a:r>
+              <a:rPr lang="en-US" dirty="0"/>
+              <a:t>Picking an Instance </a:t>
+            </a:r>
+            <a:r>
+              <a:rPr lang="en-US" dirty="0" smtClean="0"/>
+              <a:t>Type</a:t>
+            </a:r>
+            <a:endParaRPr lang="en-US" sz="1200" b="1" dirty="0" smtClean="0"/>
+          </a:p>
+          <a:p>
+            <a:pPr algn="just"/>
+            <a:endParaRPr lang="en-US" sz="1200" b="1" dirty="0"/>
+          </a:p>
+          <a:p>
+            <a:pPr algn="just"/>
+            <a:r>
+              <a:rPr lang="en-US" sz="900" dirty="0"/>
+              <a:t>For demanding tasks like training deep learning models, selecting a GPU-accelerated instance type is highly recommended. GPUs can dramatically reduce the time required for model training compared to CPUs. When choosing an instance size, ensure its memory capacity (RAM) is sufficient for your model and dataset.</a:t>
+            </a:r>
+          </a:p>
+          <a:p>
+            <a:pPr algn="just"/>
+            <a:endParaRPr lang="en-US" sz="900" dirty="0"/>
+          </a:p>
+          <a:p>
+            <a:pPr algn="just"/>
+            <a:r>
+              <a:rPr lang="en-US" sz="900" dirty="0"/>
+              <a:t>Note: The size of your model and dataset are critical factors. If your ML task requires more memory than the selected instance provides, you'll need to choose a larger instance type to avoid performance issues or errors.</a:t>
+            </a:r>
+          </a:p>
+          <a:p>
+            <a:pPr algn="just"/>
+            <a:endParaRPr lang="en-US" sz="900" dirty="0"/>
+          </a:p>
+          <a:p>
+            <a:pPr algn="just"/>
+            <a:r>
+              <a:rPr lang="en-US" sz="900" dirty="0"/>
+              <a:t>Explore the available GPU instance types on the EC2 Instance Types page, particularly under the Accelerated Computing category.</a:t>
+            </a:r>
+          </a:p>
+          <a:p>
+            <a:pPr algn="just"/>
+            <a:endParaRPr lang="en-US" sz="900" dirty="0"/>
+          </a:p>
+          <a:p>
+            <a:r>
+              <a:rPr lang="en-US" sz="1200" dirty="0"/>
+              <a:t/>
+            </a:r>
+            <a:br>
+              <a:rPr lang="en-US" sz="1200" dirty="0"/>
+            </a:br>
+            <a:endParaRPr lang="en-US" dirty="0"/>
+          </a:p>
+        </p:txBody>
+      </p:sp>
+      <p:pic>
+        <p:nvPicPr>
+          <p:cNvPr id="11" name="Picture 10"/>
+          <p:cNvPicPr>
+            <a:picLocks noChangeAspect="1"/>
+          </p:cNvPicPr>
+          <p:nvPr/>
+        </p:nvPicPr>
+        <p:blipFill>
+          <a:blip r:embed="rId8"/>
+          <a:stretch>
+            <a:fillRect/>
+          </a:stretch>
+        </p:blipFill>
+        <p:spPr>
+          <a:xfrm>
+            <a:off x="4675718" y="3184452"/>
+            <a:ext cx="2810932" cy="2084774"/>
+          </a:xfrm>
+          <a:prstGeom prst="rect">
+            <a:avLst/>
+          </a:prstGeom>
+        </p:spPr>
+      </p:pic>
+    </p:spTree>
+    <p:extLst>
+      <p:ext uri="{BB962C8B-B14F-4D97-AF65-F5344CB8AC3E}">
+        <p14:creationId xmlns:p14="http://schemas.microsoft.com/office/powerpoint/2010/main" val="3056377725"/>
+      </p:ext>
+    </p:extLst>
+  </p:cSld>
+  <p:clrMapOvr>
+    <a:masterClrMapping/>
+  </p:clrMapOvr>
+  <p:timing>
+    <p:tnLst>
+      <p:par>
+        <p:cTn id="1" dur="indefinite" restart="never" nodeType="tmRoot"/>
+      </p:par>
+    </p:tnLst>
+  </p:timing>
+</p:sld>
+</file>
+
+<file path=ppt/slides/slide13.xml><?xml version="1.0" encoding="utf-8"?>
+<p:sld xmlns:a="http://schemas.openxmlformats.org/drawingml/2006/main" xmlns:r="http://schemas.openxmlformats.org/officeDocument/2006/relationships" xmlns:p="http://schemas.openxmlformats.org/presentationml/2006/main">
+  <p:cSld>
+    <p:spTree>
+      <p:nvGrpSpPr>
+        <p:cNvPr id="1" name=""/>
+        <p:cNvGrpSpPr/>
+        <p:nvPr/>
+      </p:nvGrpSpPr>
+      <p:grpSpPr>
+        <a:xfrm>
+          <a:off x="0" y="0"/>
+          <a:ext cx="0" cy="0"/>
+          <a:chOff x="0" y="0"/>
+          <a:chExt cx="0" cy="0"/>
+        </a:xfrm>
+      </p:grpSpPr>
+      <p:sp>
+        <p:nvSpPr>
+          <p:cNvPr id="2" name="Title 1"/>
+          <p:cNvSpPr>
+            <a:spLocks noGrp="1"/>
+          </p:cNvSpPr>
+          <p:nvPr>
+            <p:ph type="title"/>
+          </p:nvPr>
+        </p:nvSpPr>
+        <p:spPr>
+          <a:xfrm>
+            <a:off x="210962" y="160956"/>
+            <a:ext cx="7886700" cy="403489"/>
+          </a:xfrm>
+        </p:spPr>
+        <p:txBody>
+          <a:bodyPr>
+            <a:normAutofit fontScale="90000"/>
+          </a:bodyPr>
+          <a:lstStyle/>
+          <a:p>
+            <a:r>
+              <a:rPr lang="en-US" b="1" dirty="0" err="1" smtClean="0">
+                <a:solidFill>
+                  <a:srgbClr val="FF0000"/>
+                </a:solidFill>
+              </a:rPr>
+              <a:t>Exampe</a:t>
+            </a:r>
+            <a:r>
+              <a:rPr lang="en-US" b="1" dirty="0" smtClean="0">
+                <a:solidFill>
+                  <a:srgbClr val="FF0000"/>
+                </a:solidFill>
+              </a:rPr>
+              <a:t> 1</a:t>
+            </a:r>
+            <a:endParaRPr lang="en-US" b="1" dirty="0">
+              <a:solidFill>
+                <a:srgbClr val="FF0000"/>
+              </a:solidFill>
+            </a:endParaRPr>
+          </a:p>
+        </p:txBody>
+      </p:sp>
+      <p:sp>
+        <p:nvSpPr>
+          <p:cNvPr id="4" name="Slide Number Placeholder 3"/>
+          <p:cNvSpPr>
+            <a:spLocks noGrp="1"/>
+          </p:cNvSpPr>
+          <p:nvPr>
+            <p:ph type="sldNum" sz="quarter" idx="12"/>
+          </p:nvPr>
+        </p:nvSpPr>
+        <p:spPr/>
+        <p:txBody>
+          <a:bodyPr/>
+          <a:lstStyle/>
+          <a:p>
+            <a:fld id="{6D22F896-40B5-4ADD-8801-0D06FADFA095}" type="slidenum">
+              <a:rPr lang="en-US" smtClean="0"/>
+              <a:t>13</a:t>
+            </a:fld>
+            <a:endParaRPr lang="en-US" dirty="0"/>
+          </a:p>
+        </p:txBody>
+      </p:sp>
+      <p:sp>
+        <p:nvSpPr>
+          <p:cNvPr id="5" name="Title 1"/>
+          <p:cNvSpPr txBox="1">
+            <a:spLocks/>
+          </p:cNvSpPr>
+          <p:nvPr/>
+        </p:nvSpPr>
+        <p:spPr>
+          <a:xfrm>
+            <a:off x="425451" y="696716"/>
+            <a:ext cx="7886700" cy="403489"/>
+          </a:xfrm>
+          <a:prstGeom prst="rect">
+            <a:avLst/>
+          </a:prstGeom>
+        </p:spPr>
+        <p:txBody>
+          <a:bodyPr vert="horz" lIns="91440" tIns="45720" rIns="91440" bIns="45720" rtlCol="0" anchor="ctr">
+            <a:normAutofit fontScale="82500" lnSpcReduction="20000"/>
+          </a:bodyPr>
+          <a:lstStyle>
+            <a:lvl1pPr algn="l" defTabSz="685800" rtl="0" eaLnBrk="1" latinLnBrk="0" hangingPunct="1">
+              <a:lnSpc>
+                <a:spcPct val="90000"/>
+              </a:lnSpc>
+              <a:spcBef>
+                <a:spcPct val="0"/>
+              </a:spcBef>
+              <a:buNone/>
+              <a:defRPr sz="3300" kern="1200">
+                <a:solidFill>
+                  <a:schemeClr val="tx1"/>
+                </a:solidFill>
+                <a:latin typeface="+mj-lt"/>
+                <a:ea typeface="+mj-ea"/>
+                <a:cs typeface="+mj-cs"/>
+              </a:defRPr>
+            </a:lvl1pPr>
+          </a:lstStyle>
+          <a:p>
+            <a:r>
+              <a:rPr lang="en-US" dirty="0">
+                <a:solidFill>
+                  <a:schemeClr val="accent1">
+                    <a:lumMod val="50000"/>
+                  </a:schemeClr>
+                </a:solidFill>
+              </a:rPr>
+              <a:t>YOLOv5 🚀 on AWS Deep Learning </a:t>
+            </a:r>
+            <a:r>
+              <a:rPr lang="en-US" dirty="0" smtClean="0">
+                <a:solidFill>
+                  <a:schemeClr val="accent1">
+                    <a:lumMod val="50000"/>
+                  </a:schemeClr>
+                </a:solidFill>
+              </a:rPr>
+              <a:t>Instance (</a:t>
+            </a:r>
+            <a:r>
+              <a:rPr lang="en-US" dirty="0" err="1" smtClean="0">
+                <a:solidFill>
+                  <a:schemeClr val="accent1">
+                    <a:lumMod val="50000"/>
+                  </a:schemeClr>
+                </a:solidFill>
+              </a:rPr>
+              <a:t>Cons’t</a:t>
+            </a:r>
+            <a:r>
+              <a:rPr lang="en-US" dirty="0" smtClean="0">
+                <a:solidFill>
+                  <a:schemeClr val="accent1">
+                    <a:lumMod val="50000"/>
+                  </a:schemeClr>
+                </a:solidFill>
+              </a:rPr>
+              <a:t>)</a:t>
+            </a:r>
+            <a:endParaRPr lang="en-US" dirty="0">
+              <a:solidFill>
+                <a:schemeClr val="accent1">
+                  <a:lumMod val="50000"/>
+                </a:schemeClr>
+              </a:solidFill>
+            </a:endParaRPr>
+          </a:p>
+        </p:txBody>
+      </p:sp>
+      <p:sp>
+        <p:nvSpPr>
+          <p:cNvPr id="7" name="Rectangle 6"/>
+          <p:cNvSpPr/>
+          <p:nvPr/>
+        </p:nvSpPr>
+        <p:spPr>
+          <a:xfrm>
+            <a:off x="210962" y="1100205"/>
+            <a:ext cx="4022371" cy="646331"/>
+          </a:xfrm>
+          <a:prstGeom prst="rect">
+            <a:avLst/>
+          </a:prstGeom>
+        </p:spPr>
+        <p:txBody>
+          <a:bodyPr wrap="square">
+            <a:spAutoFit/>
+          </a:bodyPr>
+          <a:lstStyle/>
+          <a:p>
+            <a:r>
+              <a:rPr lang="en-US" dirty="0"/>
+              <a:t>Configuring Your Instance</a:t>
+            </a:r>
+          </a:p>
+          <a:p>
+            <a:endParaRPr lang="en-US" dirty="0"/>
+          </a:p>
+        </p:txBody>
+      </p:sp>
+      <p:sp>
+        <p:nvSpPr>
+          <p:cNvPr id="8" name="Rectangle 7"/>
+          <p:cNvSpPr/>
+          <p:nvPr/>
+        </p:nvSpPr>
+        <p:spPr>
+          <a:xfrm>
+            <a:off x="4572000" y="1093202"/>
+            <a:ext cx="4120444" cy="1754326"/>
+          </a:xfrm>
+          <a:prstGeom prst="rect">
+            <a:avLst/>
+          </a:prstGeom>
+        </p:spPr>
+        <p:txBody>
+          <a:bodyPr wrap="square">
+            <a:spAutoFit/>
+          </a:bodyPr>
+          <a:lstStyle/>
+          <a:p>
+            <a:pPr algn="just"/>
+            <a:r>
+              <a:rPr lang="en-US" sz="1200" dirty="0"/>
+              <a:t>Step 3: Connect to Your </a:t>
+            </a:r>
+            <a:r>
+              <a:rPr lang="en-US" sz="1200" dirty="0" smtClean="0"/>
+              <a:t>Instance</a:t>
+            </a:r>
+          </a:p>
+          <a:p>
+            <a:pPr algn="just"/>
+            <a:endParaRPr lang="en-US" sz="1200" dirty="0"/>
+          </a:p>
+          <a:p>
+            <a:pPr algn="just"/>
+            <a:r>
+              <a:rPr lang="en-US" sz="1200" dirty="0"/>
+              <a:t>Once your instance state shows as 'running', select it from the EC2 dashboard. Click the Connect button to view connection options. Use the provided SSH command example in your local terminal (like Terminal on </a:t>
+            </a:r>
+            <a:r>
+              <a:rPr lang="en-US" sz="1200" dirty="0" err="1"/>
+              <a:t>macOS</a:t>
+            </a:r>
+            <a:r>
+              <a:rPr lang="en-US" sz="1200" dirty="0"/>
+              <a:t>/Linux or </a:t>
+            </a:r>
+            <a:r>
+              <a:rPr lang="en-US" sz="1200" dirty="0" err="1"/>
+              <a:t>PuTTY</a:t>
+            </a:r>
+            <a:r>
+              <a:rPr lang="en-US" sz="1200" dirty="0"/>
+              <a:t>/WSL on Windows) to establish a secure connection. You'll need the private key file (.</a:t>
+            </a:r>
+            <a:r>
+              <a:rPr lang="en-US" sz="1200" dirty="0" err="1"/>
+              <a:t>pem</a:t>
+            </a:r>
+            <a:r>
+              <a:rPr lang="en-US" sz="1200" dirty="0"/>
+              <a:t>) you created or selected during launch.</a:t>
+            </a:r>
+          </a:p>
+          <a:p>
+            <a:pPr algn="just"/>
+            <a:endParaRPr lang="en-US" sz="1200" dirty="0"/>
+          </a:p>
+        </p:txBody>
+      </p:sp>
+      <p:pic>
+        <p:nvPicPr>
+          <p:cNvPr id="10" name="Picture 9"/>
+          <p:cNvPicPr>
+            <a:picLocks noChangeAspect="1"/>
+          </p:cNvPicPr>
+          <p:nvPr/>
+        </p:nvPicPr>
+        <p:blipFill>
+          <a:blip r:embed="rId3"/>
+          <a:stretch>
+            <a:fillRect/>
+          </a:stretch>
+        </p:blipFill>
+        <p:spPr>
+          <a:xfrm>
+            <a:off x="234245" y="1423370"/>
+            <a:ext cx="2833091" cy="2101209"/>
+          </a:xfrm>
+          <a:prstGeom prst="rect">
+            <a:avLst/>
+          </a:prstGeom>
+        </p:spPr>
+      </p:pic>
+      <p:pic>
+        <p:nvPicPr>
+          <p:cNvPr id="12" name="Picture 11"/>
+          <p:cNvPicPr>
+            <a:picLocks noChangeAspect="1"/>
+          </p:cNvPicPr>
+          <p:nvPr/>
+        </p:nvPicPr>
+        <p:blipFill>
+          <a:blip r:embed="rId4"/>
+          <a:stretch>
+            <a:fillRect/>
+          </a:stretch>
+        </p:blipFill>
+        <p:spPr>
+          <a:xfrm>
+            <a:off x="4594577" y="2648424"/>
+            <a:ext cx="3446585" cy="2525701"/>
+          </a:xfrm>
+          <a:prstGeom prst="rect">
+            <a:avLst/>
+          </a:prstGeom>
+        </p:spPr>
+      </p:pic>
+    </p:spTree>
+    <p:extLst>
+      <p:ext uri="{BB962C8B-B14F-4D97-AF65-F5344CB8AC3E}">
+        <p14:creationId xmlns:p14="http://schemas.microsoft.com/office/powerpoint/2010/main" val="4162664825"/>
+      </p:ext>
+    </p:extLst>
+  </p:cSld>
+  <p:clrMapOvr>
+    <a:masterClrMapping/>
+  </p:clrMapOvr>
+  <p:timing>
+    <p:tnLst>
+      <p:par>
+        <p:cTn id="1" dur="indefinite" restart="never" nodeType="tmRoot"/>
+      </p:par>
+    </p:tnLst>
+  </p:timing>
+</p:sld>
+</file>
+
+<file path=ppt/slides/slide14.xml><?xml version="1.0" encoding="utf-8"?>
+<p:sld xmlns:a="http://schemas.openxmlformats.org/drawingml/2006/main" xmlns:r="http://schemas.openxmlformats.org/officeDocument/2006/relationships" xmlns:p="http://schemas.openxmlformats.org/presentationml/2006/main">
+  <p:cSld>
+    <p:spTree>
+      <p:nvGrpSpPr>
+        <p:cNvPr id="1" name=""/>
+        <p:cNvGrpSpPr/>
+        <p:nvPr/>
+      </p:nvGrpSpPr>
+      <p:grpSpPr>
+        <a:xfrm>
+          <a:off x="0" y="0"/>
+          <a:ext cx="0" cy="0"/>
+          <a:chOff x="0" y="0"/>
+          <a:chExt cx="0" cy="0"/>
+        </a:xfrm>
+      </p:grpSpPr>
+      <p:sp>
+        <p:nvSpPr>
+          <p:cNvPr id="2" name="Title 1"/>
+          <p:cNvSpPr>
+            <a:spLocks noGrp="1"/>
+          </p:cNvSpPr>
+          <p:nvPr>
+            <p:ph type="title"/>
+          </p:nvPr>
+        </p:nvSpPr>
+        <p:spPr>
+          <a:xfrm>
+            <a:off x="210962" y="160956"/>
+            <a:ext cx="7886700" cy="403489"/>
+          </a:xfrm>
+        </p:spPr>
+        <p:txBody>
+          <a:bodyPr>
+            <a:normAutofit fontScale="90000"/>
+          </a:bodyPr>
+          <a:lstStyle/>
+          <a:p>
+            <a:r>
+              <a:rPr lang="en-US" b="1" dirty="0" err="1" smtClean="0">
+                <a:solidFill>
+                  <a:srgbClr val="FF0000"/>
+                </a:solidFill>
+              </a:rPr>
+              <a:t>Exampe</a:t>
+            </a:r>
+            <a:r>
+              <a:rPr lang="en-US" b="1" dirty="0" smtClean="0">
+                <a:solidFill>
+                  <a:srgbClr val="FF0000"/>
+                </a:solidFill>
+              </a:rPr>
+              <a:t> 1</a:t>
+            </a:r>
+            <a:endParaRPr lang="en-US" b="1" dirty="0">
+              <a:solidFill>
+                <a:srgbClr val="FF0000"/>
+              </a:solidFill>
+            </a:endParaRPr>
+          </a:p>
+        </p:txBody>
+      </p:sp>
+      <p:sp>
+        <p:nvSpPr>
+          <p:cNvPr id="4" name="Slide Number Placeholder 3"/>
+          <p:cNvSpPr>
+            <a:spLocks noGrp="1"/>
+          </p:cNvSpPr>
+          <p:nvPr>
+            <p:ph type="sldNum" sz="quarter" idx="12"/>
+          </p:nvPr>
+        </p:nvSpPr>
+        <p:spPr/>
+        <p:txBody>
+          <a:bodyPr/>
+          <a:lstStyle/>
+          <a:p>
+            <a:fld id="{6D22F896-40B5-4ADD-8801-0D06FADFA095}" type="slidenum">
+              <a:rPr lang="en-US" smtClean="0"/>
+              <a:t>14</a:t>
+            </a:fld>
+            <a:endParaRPr lang="en-US" dirty="0"/>
+          </a:p>
+        </p:txBody>
+      </p:sp>
+      <p:sp>
+        <p:nvSpPr>
+          <p:cNvPr id="5" name="Title 1"/>
+          <p:cNvSpPr txBox="1">
+            <a:spLocks/>
+          </p:cNvSpPr>
+          <p:nvPr/>
+        </p:nvSpPr>
+        <p:spPr>
+          <a:xfrm>
+            <a:off x="425451" y="696716"/>
+            <a:ext cx="7886700" cy="403489"/>
+          </a:xfrm>
+          <a:prstGeom prst="rect">
+            <a:avLst/>
+          </a:prstGeom>
+        </p:spPr>
+        <p:txBody>
+          <a:bodyPr vert="horz" lIns="91440" tIns="45720" rIns="91440" bIns="45720" rtlCol="0" anchor="ctr">
+            <a:normAutofit fontScale="82500" lnSpcReduction="20000"/>
+          </a:bodyPr>
+          <a:lstStyle>
+            <a:lvl1pPr algn="l" defTabSz="685800" rtl="0" eaLnBrk="1" latinLnBrk="0" hangingPunct="1">
+              <a:lnSpc>
+                <a:spcPct val="90000"/>
+              </a:lnSpc>
+              <a:spcBef>
+                <a:spcPct val="0"/>
+              </a:spcBef>
+              <a:buNone/>
+              <a:defRPr sz="3300" kern="1200">
+                <a:solidFill>
+                  <a:schemeClr val="tx1"/>
+                </a:solidFill>
+                <a:latin typeface="+mj-lt"/>
+                <a:ea typeface="+mj-ea"/>
+                <a:cs typeface="+mj-cs"/>
+              </a:defRPr>
+            </a:lvl1pPr>
+          </a:lstStyle>
+          <a:p>
+            <a:r>
+              <a:rPr lang="en-US" dirty="0" smtClean="0">
+                <a:solidFill>
+                  <a:schemeClr val="accent1">
+                    <a:lumMod val="50000"/>
+                  </a:schemeClr>
+                </a:solidFill>
+              </a:rPr>
+              <a:t>YOLOv5 </a:t>
+            </a:r>
+            <a:r>
+              <a:rPr lang="en-US" dirty="0">
+                <a:solidFill>
+                  <a:schemeClr val="accent1">
+                    <a:lumMod val="50000"/>
+                  </a:schemeClr>
+                </a:solidFill>
+              </a:rPr>
+              <a:t>🚀 on AWS Deep Learning </a:t>
+            </a:r>
+            <a:r>
+              <a:rPr lang="en-US" dirty="0" smtClean="0">
+                <a:solidFill>
+                  <a:schemeClr val="accent1">
+                    <a:lumMod val="50000"/>
+                  </a:schemeClr>
+                </a:solidFill>
+              </a:rPr>
+              <a:t>Instance (</a:t>
+            </a:r>
+            <a:r>
+              <a:rPr lang="en-US" dirty="0" err="1" smtClean="0">
+                <a:solidFill>
+                  <a:schemeClr val="accent1">
+                    <a:lumMod val="50000"/>
+                  </a:schemeClr>
+                </a:solidFill>
+              </a:rPr>
+              <a:t>Cons’t</a:t>
+            </a:r>
+            <a:r>
+              <a:rPr lang="en-US" dirty="0" smtClean="0">
+                <a:solidFill>
+                  <a:schemeClr val="accent1">
+                    <a:lumMod val="50000"/>
+                  </a:schemeClr>
+                </a:solidFill>
+              </a:rPr>
+              <a:t>)</a:t>
+            </a:r>
+            <a:endParaRPr lang="en-US" dirty="0">
+              <a:solidFill>
+                <a:schemeClr val="accent1">
+                  <a:lumMod val="50000"/>
+                </a:schemeClr>
+              </a:solidFill>
+            </a:endParaRPr>
+          </a:p>
+        </p:txBody>
+      </p:sp>
+      <p:sp>
+        <p:nvSpPr>
+          <p:cNvPr id="8" name="Rectangle 7"/>
+          <p:cNvSpPr/>
+          <p:nvPr/>
+        </p:nvSpPr>
+        <p:spPr>
+          <a:xfrm>
+            <a:off x="4572000" y="1093202"/>
+            <a:ext cx="4120444" cy="461665"/>
+          </a:xfrm>
+          <a:prstGeom prst="rect">
+            <a:avLst/>
+          </a:prstGeom>
+        </p:spPr>
+        <p:txBody>
+          <a:bodyPr wrap="square">
+            <a:spAutoFit/>
+          </a:bodyPr>
+          <a:lstStyle/>
+          <a:p>
+            <a:r>
+              <a:rPr lang="en-US" sz="1200" dirty="0"/>
+              <a:t>Optional Extras: Increasing Swap Memory</a:t>
+            </a:r>
+          </a:p>
+          <a:p>
+            <a:pPr algn="just"/>
+            <a:endParaRPr lang="en-US" sz="1200" dirty="0"/>
+          </a:p>
+        </p:txBody>
+      </p:sp>
+      <p:sp>
+        <p:nvSpPr>
+          <p:cNvPr id="9" name="Rectangle 8"/>
+          <p:cNvSpPr/>
+          <p:nvPr/>
+        </p:nvSpPr>
+        <p:spPr>
+          <a:xfrm>
+            <a:off x="210962" y="1100205"/>
+            <a:ext cx="4120444" cy="1384995"/>
+          </a:xfrm>
+          <a:prstGeom prst="rect">
+            <a:avLst/>
+          </a:prstGeom>
+        </p:spPr>
+        <p:txBody>
+          <a:bodyPr wrap="square">
+            <a:spAutoFit/>
+          </a:bodyPr>
+          <a:lstStyle/>
+          <a:p>
+            <a:pPr algn="just"/>
+            <a:r>
+              <a:rPr lang="en-US" sz="1200" dirty="0"/>
+              <a:t>Step 4: Running </a:t>
+            </a:r>
+            <a:r>
+              <a:rPr lang="en-US" sz="1200" dirty="0" err="1"/>
+              <a:t>Ultralytics</a:t>
+            </a:r>
+            <a:r>
+              <a:rPr lang="en-US" sz="1200" dirty="0"/>
+              <a:t> </a:t>
+            </a:r>
+            <a:r>
+              <a:rPr lang="en-US" sz="1200" dirty="0" smtClean="0"/>
+              <a:t>YOLOv5</a:t>
+            </a:r>
+          </a:p>
+          <a:p>
+            <a:pPr algn="just"/>
+            <a:endParaRPr lang="en-US" sz="1200" dirty="0"/>
+          </a:p>
+          <a:p>
+            <a:pPr algn="just"/>
+            <a:r>
+              <a:rPr lang="en-US" sz="1000" dirty="0"/>
+              <a:t>Now that you're connected via SSH, you can set up and run YOLOv5. First, clone the official YOLOv5 repository from GitHub and navigate into the directory. Then, install the required dependencies using pip. It's recommended to use a Python 3.8 environment or later. The necessary models and datasets will be downloaded automatically from the latest YOLOv5 release when you run commands like training or detection.</a:t>
+            </a:r>
+          </a:p>
+        </p:txBody>
+      </p:sp>
+      <p:sp>
+        <p:nvSpPr>
+          <p:cNvPr id="3" name="Rectangle 2"/>
+          <p:cNvSpPr/>
+          <p:nvPr/>
+        </p:nvSpPr>
+        <p:spPr>
+          <a:xfrm>
+            <a:off x="390525" y="2650852"/>
+            <a:ext cx="3761317" cy="338554"/>
+          </a:xfrm>
+          <a:prstGeom prst="rect">
+            <a:avLst/>
+          </a:prstGeom>
+          <a:solidFill>
+            <a:schemeClr val="bg2"/>
+          </a:solidFill>
+        </p:spPr>
+        <p:txBody>
+          <a:bodyPr wrap="square">
+            <a:spAutoFit/>
+          </a:bodyPr>
+          <a:lstStyle/>
+          <a:p>
+            <a:r>
+              <a:rPr lang="en-US" sz="800" dirty="0">
+                <a:latin typeface="Roboto Mono"/>
+              </a:rPr>
+              <a:t># Clone the YOLOv5 repository</a:t>
+            </a:r>
+            <a:r>
+              <a:rPr lang="en-US" sz="800" dirty="0">
+                <a:solidFill>
+                  <a:srgbClr val="36464E"/>
+                </a:solidFill>
+                <a:latin typeface="Roboto Mono"/>
+              </a:rPr>
+              <a:t> </a:t>
+            </a:r>
+            <a:r>
+              <a:rPr lang="en-US" sz="800" dirty="0" err="1">
+                <a:solidFill>
+                  <a:srgbClr val="36464E"/>
+                </a:solidFill>
+                <a:latin typeface="Roboto Mono"/>
+              </a:rPr>
+              <a:t>git</a:t>
+            </a:r>
+            <a:r>
+              <a:rPr lang="en-US" sz="800" dirty="0">
+                <a:solidFill>
+                  <a:srgbClr val="36464E"/>
+                </a:solidFill>
+                <a:latin typeface="Roboto Mono"/>
+              </a:rPr>
+              <a:t> clone https://github.com/ultralytics/yolov5 </a:t>
+            </a:r>
+            <a:r>
+              <a:rPr lang="en-US" sz="800" dirty="0">
+                <a:solidFill>
+                  <a:srgbClr val="6E59D9"/>
+                </a:solidFill>
+                <a:latin typeface="Roboto Mono"/>
+              </a:rPr>
+              <a:t>cd</a:t>
+            </a:r>
+            <a:r>
+              <a:rPr lang="en-US" sz="800" dirty="0">
+                <a:solidFill>
+                  <a:srgbClr val="36464E"/>
+                </a:solidFill>
+                <a:latin typeface="Roboto Mono"/>
+              </a:rPr>
+              <a:t> yolov5 </a:t>
+            </a:r>
+            <a:r>
+              <a:rPr lang="en-US" sz="800" dirty="0">
+                <a:latin typeface="Roboto Mono"/>
+              </a:rPr>
+              <a:t># Install required packages</a:t>
+            </a:r>
+            <a:r>
+              <a:rPr lang="en-US" sz="800" dirty="0">
+                <a:solidFill>
+                  <a:srgbClr val="36464E"/>
+                </a:solidFill>
+                <a:latin typeface="Roboto Mono"/>
+              </a:rPr>
+              <a:t> pip install -r requirements.txt</a:t>
+            </a:r>
+            <a:endParaRPr lang="en-US" sz="800" dirty="0"/>
+          </a:p>
+        </p:txBody>
+      </p:sp>
+      <p:sp>
+        <p:nvSpPr>
+          <p:cNvPr id="6" name="Rectangle 5"/>
+          <p:cNvSpPr/>
+          <p:nvPr/>
+        </p:nvSpPr>
+        <p:spPr>
+          <a:xfrm>
+            <a:off x="4735689" y="1561874"/>
+            <a:ext cx="3697111" cy="584775"/>
+          </a:xfrm>
+          <a:prstGeom prst="rect">
+            <a:avLst/>
+          </a:prstGeom>
+          <a:solidFill>
+            <a:schemeClr val="bg2"/>
+          </a:solidFill>
+        </p:spPr>
+        <p:txBody>
+          <a:bodyPr wrap="square">
+            <a:spAutoFit/>
+          </a:bodyPr>
+          <a:lstStyle/>
+          <a:p>
+            <a:r>
+              <a:rPr lang="en-US" sz="800" dirty="0">
+                <a:latin typeface="Roboto Mono"/>
+              </a:rPr>
+              <a:t># Allocate a 64GB swap file (adjust size as needed)</a:t>
+            </a:r>
+            <a:r>
+              <a:rPr lang="en-US" sz="800" dirty="0">
+                <a:solidFill>
+                  <a:srgbClr val="36464E"/>
+                </a:solidFill>
+                <a:latin typeface="Roboto Mono"/>
+              </a:rPr>
+              <a:t> </a:t>
+            </a:r>
+            <a:r>
+              <a:rPr lang="en-US" sz="800" dirty="0" err="1">
+                <a:solidFill>
+                  <a:srgbClr val="36464E"/>
+                </a:solidFill>
+                <a:latin typeface="Roboto Mono"/>
+              </a:rPr>
+              <a:t>sudo</a:t>
+            </a:r>
+            <a:r>
+              <a:rPr lang="en-US" sz="800" dirty="0">
+                <a:solidFill>
+                  <a:srgbClr val="36464E"/>
+                </a:solidFill>
+                <a:latin typeface="Roboto Mono"/>
+              </a:rPr>
+              <a:t> </a:t>
+            </a:r>
+            <a:r>
+              <a:rPr lang="en-US" sz="800" dirty="0" err="1">
+                <a:solidFill>
+                  <a:srgbClr val="36464E"/>
+                </a:solidFill>
+                <a:latin typeface="Roboto Mono"/>
+              </a:rPr>
+              <a:t>fallocate</a:t>
+            </a:r>
+            <a:r>
+              <a:rPr lang="en-US" sz="800" dirty="0">
+                <a:solidFill>
+                  <a:srgbClr val="36464E"/>
+                </a:solidFill>
+                <a:latin typeface="Roboto Mono"/>
+              </a:rPr>
+              <a:t> -l 64G /</a:t>
+            </a:r>
+            <a:r>
+              <a:rPr lang="en-US" sz="800" dirty="0" err="1">
+                <a:solidFill>
+                  <a:srgbClr val="36464E"/>
+                </a:solidFill>
+                <a:latin typeface="Roboto Mono"/>
+              </a:rPr>
+              <a:t>swapfile</a:t>
+            </a:r>
+            <a:r>
+              <a:rPr lang="en-US" sz="800" dirty="0">
+                <a:solidFill>
+                  <a:srgbClr val="36464E"/>
+                </a:solidFill>
+                <a:latin typeface="Roboto Mono"/>
+              </a:rPr>
+              <a:t> </a:t>
+            </a:r>
+            <a:r>
+              <a:rPr lang="en-US" sz="800" dirty="0">
+                <a:latin typeface="Roboto Mono"/>
+              </a:rPr>
+              <a:t># Set correct permissions</a:t>
+            </a:r>
+            <a:r>
+              <a:rPr lang="en-US" sz="800" dirty="0">
+                <a:solidFill>
+                  <a:srgbClr val="36464E"/>
+                </a:solidFill>
+                <a:latin typeface="Roboto Mono"/>
+              </a:rPr>
+              <a:t> </a:t>
+            </a:r>
+            <a:r>
+              <a:rPr lang="en-US" sz="800" dirty="0" err="1">
+                <a:solidFill>
+                  <a:srgbClr val="36464E"/>
+                </a:solidFill>
+                <a:latin typeface="Roboto Mono"/>
+              </a:rPr>
+              <a:t>sudo</a:t>
+            </a:r>
+            <a:r>
+              <a:rPr lang="en-US" sz="800" dirty="0">
+                <a:solidFill>
+                  <a:srgbClr val="36464E"/>
+                </a:solidFill>
+                <a:latin typeface="Roboto Mono"/>
+              </a:rPr>
+              <a:t> </a:t>
+            </a:r>
+            <a:r>
+              <a:rPr lang="en-US" sz="800" dirty="0" err="1">
+                <a:solidFill>
+                  <a:srgbClr val="36464E"/>
+                </a:solidFill>
+                <a:latin typeface="Roboto Mono"/>
+              </a:rPr>
+              <a:t>chmod</a:t>
+            </a:r>
+            <a:r>
+              <a:rPr lang="en-US" sz="800" dirty="0">
+                <a:solidFill>
+                  <a:srgbClr val="36464E"/>
+                </a:solidFill>
+                <a:latin typeface="Roboto Mono"/>
+              </a:rPr>
+              <a:t> </a:t>
+            </a:r>
+            <a:r>
+              <a:rPr lang="en-US" sz="800" dirty="0">
+                <a:solidFill>
+                  <a:srgbClr val="D52A2A"/>
+                </a:solidFill>
+                <a:latin typeface="Roboto Mono"/>
+              </a:rPr>
+              <a:t>600</a:t>
+            </a:r>
+            <a:r>
+              <a:rPr lang="en-US" sz="800" dirty="0">
+                <a:solidFill>
+                  <a:srgbClr val="36464E"/>
+                </a:solidFill>
+                <a:latin typeface="Roboto Mono"/>
+              </a:rPr>
+              <a:t> /</a:t>
+            </a:r>
+            <a:r>
+              <a:rPr lang="en-US" sz="800" dirty="0" err="1">
+                <a:solidFill>
+                  <a:srgbClr val="36464E"/>
+                </a:solidFill>
+                <a:latin typeface="Roboto Mono"/>
+              </a:rPr>
+              <a:t>swapfile</a:t>
+            </a:r>
+            <a:r>
+              <a:rPr lang="en-US" sz="800" dirty="0">
+                <a:solidFill>
+                  <a:srgbClr val="36464E"/>
+                </a:solidFill>
+                <a:latin typeface="Roboto Mono"/>
+              </a:rPr>
+              <a:t> </a:t>
+            </a:r>
+            <a:r>
+              <a:rPr lang="en-US" sz="800" dirty="0">
+                <a:latin typeface="Roboto Mono"/>
+              </a:rPr>
+              <a:t># Set up the file as a Linux swap area</a:t>
+            </a:r>
+            <a:r>
+              <a:rPr lang="en-US" sz="800" dirty="0">
+                <a:solidFill>
+                  <a:srgbClr val="36464E"/>
+                </a:solidFill>
+                <a:latin typeface="Roboto Mono"/>
+              </a:rPr>
+              <a:t> </a:t>
+            </a:r>
+            <a:r>
+              <a:rPr lang="en-US" sz="800" dirty="0" err="1">
+                <a:solidFill>
+                  <a:srgbClr val="36464E"/>
+                </a:solidFill>
+                <a:latin typeface="Roboto Mono"/>
+              </a:rPr>
+              <a:t>sudo</a:t>
+            </a:r>
+            <a:r>
+              <a:rPr lang="en-US" sz="800" dirty="0">
+                <a:solidFill>
+                  <a:srgbClr val="36464E"/>
+                </a:solidFill>
+                <a:latin typeface="Roboto Mono"/>
+              </a:rPr>
+              <a:t> </a:t>
+            </a:r>
+            <a:r>
+              <a:rPr lang="en-US" sz="800" dirty="0" err="1">
+                <a:solidFill>
+                  <a:srgbClr val="36464E"/>
+                </a:solidFill>
+                <a:latin typeface="Roboto Mono"/>
+              </a:rPr>
+              <a:t>mkswap</a:t>
+            </a:r>
+            <a:r>
+              <a:rPr lang="en-US" sz="800" dirty="0">
+                <a:solidFill>
+                  <a:srgbClr val="36464E"/>
+                </a:solidFill>
+                <a:latin typeface="Roboto Mono"/>
+              </a:rPr>
+              <a:t> /</a:t>
+            </a:r>
+            <a:r>
+              <a:rPr lang="en-US" sz="800" dirty="0" err="1">
+                <a:solidFill>
+                  <a:srgbClr val="36464E"/>
+                </a:solidFill>
+                <a:latin typeface="Roboto Mono"/>
+              </a:rPr>
+              <a:t>swapfile</a:t>
+            </a:r>
+            <a:r>
+              <a:rPr lang="en-US" sz="800" dirty="0">
+                <a:solidFill>
+                  <a:srgbClr val="36464E"/>
+                </a:solidFill>
+                <a:latin typeface="Roboto Mono"/>
+              </a:rPr>
+              <a:t> </a:t>
+            </a:r>
+            <a:r>
+              <a:rPr lang="en-US" sz="800" dirty="0">
+                <a:latin typeface="Roboto Mono"/>
+              </a:rPr>
+              <a:t># Enable the swap file</a:t>
+            </a:r>
+            <a:r>
+              <a:rPr lang="en-US" sz="800" dirty="0">
+                <a:solidFill>
+                  <a:srgbClr val="36464E"/>
+                </a:solidFill>
+                <a:latin typeface="Roboto Mono"/>
+              </a:rPr>
+              <a:t> </a:t>
+            </a:r>
+            <a:r>
+              <a:rPr lang="en-US" sz="800" dirty="0" err="1">
+                <a:solidFill>
+                  <a:srgbClr val="36464E"/>
+                </a:solidFill>
+                <a:latin typeface="Roboto Mono"/>
+              </a:rPr>
+              <a:t>sudo</a:t>
+            </a:r>
+            <a:r>
+              <a:rPr lang="en-US" sz="800" dirty="0">
+                <a:solidFill>
+                  <a:srgbClr val="36464E"/>
+                </a:solidFill>
+                <a:latin typeface="Roboto Mono"/>
+              </a:rPr>
+              <a:t> </a:t>
+            </a:r>
+            <a:r>
+              <a:rPr lang="en-US" sz="800" dirty="0" err="1">
+                <a:solidFill>
+                  <a:srgbClr val="36464E"/>
+                </a:solidFill>
+                <a:latin typeface="Roboto Mono"/>
+              </a:rPr>
+              <a:t>swapon</a:t>
+            </a:r>
+            <a:r>
+              <a:rPr lang="en-US" sz="800" dirty="0">
+                <a:solidFill>
+                  <a:srgbClr val="36464E"/>
+                </a:solidFill>
+                <a:latin typeface="Roboto Mono"/>
+              </a:rPr>
+              <a:t> /</a:t>
+            </a:r>
+            <a:r>
+              <a:rPr lang="en-US" sz="800" dirty="0" err="1">
+                <a:solidFill>
+                  <a:srgbClr val="36464E"/>
+                </a:solidFill>
+                <a:latin typeface="Roboto Mono"/>
+              </a:rPr>
+              <a:t>swapfile</a:t>
+            </a:r>
+            <a:r>
+              <a:rPr lang="en-US" sz="800" dirty="0">
+                <a:solidFill>
+                  <a:srgbClr val="36464E"/>
+                </a:solidFill>
+                <a:latin typeface="Roboto Mono"/>
+              </a:rPr>
+              <a:t> </a:t>
+            </a:r>
+            <a:r>
+              <a:rPr lang="en-US" sz="800" dirty="0">
+                <a:latin typeface="Roboto Mono"/>
+              </a:rPr>
+              <a:t># Verify the swap memory is active</a:t>
+            </a:r>
+            <a:r>
+              <a:rPr lang="en-US" sz="800" dirty="0">
+                <a:solidFill>
+                  <a:srgbClr val="36464E"/>
+                </a:solidFill>
+                <a:latin typeface="Roboto Mono"/>
+              </a:rPr>
+              <a:t> free -h</a:t>
+            </a:r>
+            <a:endParaRPr lang="en-US" sz="800" dirty="0"/>
+          </a:p>
+        </p:txBody>
+      </p:sp>
+      <p:sp>
+        <p:nvSpPr>
+          <p:cNvPr id="11" name="Rectangle 10"/>
+          <p:cNvSpPr/>
+          <p:nvPr/>
+        </p:nvSpPr>
+        <p:spPr>
+          <a:xfrm>
+            <a:off x="210962" y="3023056"/>
+            <a:ext cx="4572000" cy="461665"/>
+          </a:xfrm>
+          <a:prstGeom prst="rect">
+            <a:avLst/>
+          </a:prstGeom>
+        </p:spPr>
+        <p:txBody>
+          <a:bodyPr>
+            <a:spAutoFit/>
+          </a:bodyPr>
+          <a:lstStyle/>
+          <a:p>
+            <a:r>
+              <a:rPr lang="en-US" sz="1200" dirty="0"/>
+              <a:t>With the environment ready, you can start using YOLOv5 for various tasks:</a:t>
+            </a:r>
+          </a:p>
+        </p:txBody>
+      </p:sp>
+      <p:sp>
+        <p:nvSpPr>
+          <p:cNvPr id="13" name="Rectangle 12"/>
+          <p:cNvSpPr/>
+          <p:nvPr/>
+        </p:nvSpPr>
+        <p:spPr>
+          <a:xfrm>
+            <a:off x="213078" y="3477718"/>
+            <a:ext cx="4572000" cy="1384995"/>
+          </a:xfrm>
+          <a:prstGeom prst="rect">
+            <a:avLst/>
+          </a:prstGeom>
+          <a:solidFill>
+            <a:schemeClr val="bg2"/>
+          </a:solidFill>
+        </p:spPr>
+        <p:txBody>
+          <a:bodyPr>
+            <a:spAutoFit/>
+          </a:bodyPr>
+          <a:lstStyle/>
+          <a:p>
+            <a:r>
+              <a:rPr lang="en-US" sz="700" dirty="0"/>
+              <a:t># Train a YOLOv5 model on a custom dataset (e.g., coco128.yaml)</a:t>
+            </a:r>
+          </a:p>
+          <a:p>
+            <a:r>
+              <a:rPr lang="en-US" sz="700" dirty="0"/>
+              <a:t>python train.py --data coco128.yaml --weights yolov5s.pt --</a:t>
+            </a:r>
+            <a:r>
+              <a:rPr lang="en-US" sz="700" dirty="0" err="1"/>
+              <a:t>img</a:t>
+            </a:r>
+            <a:r>
+              <a:rPr lang="en-US" sz="700" dirty="0"/>
+              <a:t> 640</a:t>
+            </a:r>
+          </a:p>
+          <a:p>
+            <a:endParaRPr lang="en-US" sz="700" dirty="0"/>
+          </a:p>
+          <a:p>
+            <a:r>
+              <a:rPr lang="en-US" sz="700" dirty="0"/>
+              <a:t># Validate the performance (Precision, Recall, </a:t>
+            </a:r>
+            <a:r>
+              <a:rPr lang="en-US" sz="700" dirty="0" err="1"/>
+              <a:t>mAP</a:t>
+            </a:r>
+            <a:r>
+              <a:rPr lang="en-US" sz="700" dirty="0"/>
+              <a:t>) of a trained model (e.g., yolov5s.pt)</a:t>
+            </a:r>
+          </a:p>
+          <a:p>
+            <a:r>
+              <a:rPr lang="en-US" sz="700" dirty="0"/>
+              <a:t>python val.py --weights yolov5s.pt --data coco128.yaml --</a:t>
+            </a:r>
+            <a:r>
+              <a:rPr lang="en-US" sz="700" dirty="0" err="1"/>
+              <a:t>img</a:t>
+            </a:r>
+            <a:r>
+              <a:rPr lang="en-US" sz="700" dirty="0"/>
+              <a:t> 640</a:t>
+            </a:r>
+          </a:p>
+          <a:p>
+            <a:endParaRPr lang="en-US" sz="700" dirty="0"/>
+          </a:p>
+          <a:p>
+            <a:r>
+              <a:rPr lang="en-US" sz="700" dirty="0"/>
+              <a:t># Run inference (object detection) on images or videos using a trained model</a:t>
+            </a:r>
+          </a:p>
+          <a:p>
+            <a:r>
+              <a:rPr lang="en-US" sz="700" dirty="0"/>
+              <a:t>python detect.py --weights yolov5s.pt --source path/to/your/</a:t>
+            </a:r>
+            <a:r>
+              <a:rPr lang="en-US" sz="700" dirty="0" err="1"/>
+              <a:t>images_or_videos</a:t>
+            </a:r>
+            <a:r>
+              <a:rPr lang="en-US" sz="700" dirty="0"/>
+              <a:t>/ --</a:t>
+            </a:r>
+            <a:r>
+              <a:rPr lang="en-US" sz="700" dirty="0" err="1"/>
+              <a:t>img</a:t>
+            </a:r>
+            <a:r>
+              <a:rPr lang="en-US" sz="700" dirty="0"/>
+              <a:t> 640</a:t>
+            </a:r>
+          </a:p>
+          <a:p>
+            <a:endParaRPr lang="en-US" sz="700" dirty="0"/>
+          </a:p>
+          <a:p>
+            <a:r>
+              <a:rPr lang="en-US" sz="700" dirty="0"/>
+              <a:t># Export the trained model to various formats like ONNX, </a:t>
+            </a:r>
+            <a:r>
+              <a:rPr lang="en-US" sz="700" dirty="0" err="1"/>
+              <a:t>CoreML</a:t>
+            </a:r>
+            <a:r>
+              <a:rPr lang="en-US" sz="700" dirty="0"/>
+              <a:t>, </a:t>
+            </a:r>
+            <a:r>
+              <a:rPr lang="en-US" sz="700" dirty="0" err="1"/>
+              <a:t>TFLite</a:t>
+            </a:r>
+            <a:r>
+              <a:rPr lang="en-US" sz="700" dirty="0"/>
+              <a:t> for deployment</a:t>
+            </a:r>
+          </a:p>
+          <a:p>
+            <a:r>
+              <a:rPr lang="en-US" sz="700" dirty="0"/>
+              <a:t># See https://docs.ultralytics.com/modes/export/ for more details</a:t>
+            </a:r>
+          </a:p>
+          <a:p>
+            <a:r>
+              <a:rPr lang="en-US" sz="700" dirty="0"/>
+              <a:t>python export.py --weights yolov5s.pt --include </a:t>
+            </a:r>
+            <a:r>
+              <a:rPr lang="en-US" sz="700" dirty="0" err="1"/>
+              <a:t>onnx</a:t>
+            </a:r>
+            <a:r>
+              <a:rPr lang="en-US" sz="700" dirty="0"/>
+              <a:t> </a:t>
+            </a:r>
+            <a:r>
+              <a:rPr lang="en-US" sz="700" dirty="0" err="1"/>
+              <a:t>coreml</a:t>
+            </a:r>
+            <a:r>
+              <a:rPr lang="en-US" sz="700" dirty="0"/>
+              <a:t> </a:t>
+            </a:r>
+            <a:r>
+              <a:rPr lang="en-US" sz="700" dirty="0" err="1"/>
+              <a:t>tflite</a:t>
+            </a:r>
+            <a:r>
+              <a:rPr lang="en-US" sz="700" dirty="0"/>
+              <a:t> --</a:t>
+            </a:r>
+            <a:r>
+              <a:rPr lang="en-US" sz="700" dirty="0" err="1"/>
+              <a:t>img</a:t>
+            </a:r>
+            <a:r>
+              <a:rPr lang="en-US" sz="700" dirty="0"/>
+              <a:t> 640</a:t>
+            </a:r>
+          </a:p>
+        </p:txBody>
+      </p:sp>
+      <p:sp>
+        <p:nvSpPr>
+          <p:cNvPr id="14" name="Rectangle 13"/>
+          <p:cNvSpPr/>
+          <p:nvPr/>
+        </p:nvSpPr>
+        <p:spPr>
+          <a:xfrm>
+            <a:off x="213078" y="4932037"/>
+            <a:ext cx="4572000" cy="200055"/>
+          </a:xfrm>
+          <a:prstGeom prst="rect">
+            <a:avLst/>
+          </a:prstGeom>
+        </p:spPr>
+        <p:txBody>
+          <a:bodyPr>
+            <a:spAutoFit/>
+          </a:bodyPr>
+          <a:lstStyle/>
+          <a:p>
+            <a:r>
+              <a:rPr lang="en-US" sz="700" dirty="0"/>
+              <a:t>Refer to the </a:t>
+            </a:r>
+            <a:r>
+              <a:rPr lang="en-US" sz="700" dirty="0" err="1"/>
+              <a:t>Ultralytics</a:t>
+            </a:r>
+            <a:r>
+              <a:rPr lang="en-US" sz="700" dirty="0"/>
+              <a:t> documentation for detailed guides on Training, Validation, Prediction (Inference), and Exporting.</a:t>
+            </a:r>
+          </a:p>
+        </p:txBody>
+      </p:sp>
+    </p:spTree>
+    <p:extLst>
+      <p:ext uri="{BB962C8B-B14F-4D97-AF65-F5344CB8AC3E}">
+        <p14:creationId xmlns:p14="http://schemas.microsoft.com/office/powerpoint/2010/main" val="1621134543"/>
+      </p:ext>
+    </p:extLst>
+  </p:cSld>
+  <p:clrMapOvr>
+    <a:masterClrMapping/>
+  </p:clrMapOvr>
+  <p:timing>
+    <p:tnLst>
+      <p:par>
+        <p:cTn id="1" dur="indefinite" restart="never" nodeType="tmRoot"/>
+      </p:par>
+    </p:tnLst>
+  </p:timing>
+</p:sld>
+</file>
+
+<file path=ppt/slides/slide15.xml><?xml version="1.0" encoding="utf-8"?>
+<p:sld xmlns:a="http://schemas.openxmlformats.org/drawingml/2006/main" xmlns:r="http://schemas.openxmlformats.org/officeDocument/2006/relationships" xmlns:p="http://schemas.openxmlformats.org/presentationml/2006/main">
+  <p:cSld>
+    <p:spTree>
+      <p:nvGrpSpPr>
+        <p:cNvPr id="1" name=""/>
+        <p:cNvGrpSpPr/>
+        <p:nvPr/>
+      </p:nvGrpSpPr>
+      <p:grpSpPr>
+        <a:xfrm>
+          <a:off x="0" y="0"/>
+          <a:ext cx="0" cy="0"/>
+          <a:chOff x="0" y="0"/>
+          <a:chExt cx="0" cy="0"/>
+        </a:xfrm>
+      </p:grpSpPr>
+      <p:sp>
+        <p:nvSpPr>
+          <p:cNvPr id="4" name="Slide Number Placeholder 3"/>
+          <p:cNvSpPr>
+            <a:spLocks noGrp="1"/>
+          </p:cNvSpPr>
+          <p:nvPr>
+            <p:ph type="sldNum" sz="quarter" idx="12"/>
+          </p:nvPr>
+        </p:nvSpPr>
+        <p:spPr/>
+        <p:txBody>
+          <a:bodyPr/>
+          <a:lstStyle/>
+          <a:p>
+            <a:fld id="{6D22F896-40B5-4ADD-8801-0D06FADFA095}" type="slidenum">
+              <a:rPr lang="en-US" smtClean="0"/>
+              <a:t>15</a:t>
             </a:fld>
             <a:endParaRPr lang="en-US" dirty="0"/>
           </a:p>
